--- a/docs/pptx/carbo/jx-carbo-linsubhr-sens-anyhosp.pptx
+++ b/docs/pptx/carbo/jx-carbo-linsubhr-sens-anyhosp.pptx
@@ -5339,7 +5339,7 @@
           <p:spPr>
             <a:xfrm>
               <a:off x="817517" y="1896563"/>
-              <a:ext cx="6169365" cy="82021"/>
+              <a:ext cx="6833128" cy="82021"/>
             </a:xfrm>
             <a:prstGeom prst="rect">
               <a:avLst/>
@@ -5371,7 +5371,7 @@
                   <a:latin typeface="Helvetica"/>
                   <a:cs typeface="Helvetica"/>
                 </a:rPr>
-                <a:t>subHR per 0.1 ratio decline: 1.10 (1.01-1.21), p = 0.036  |  per IQR decline (Δ = 0.28): 1.32 (1.02-1.71)  |  IQR: [0.70, 0.98]</a:t>
+                <a:t>subHR per 0.1 ratio decline: 1.10 (1.01-1.21), p_Bonf = 0.217 (n = 6)  |  per IQR decline (Δ = 0.28): 1.32 (1.02-1.71)  |  IQR: [0.70, 0.98]</a:t>
               </a:r>
             </a:p>
           </p:txBody>

--- a/docs/pptx/carbo/jx-carbo-linsubhr-sens-anyhosp.pptx
+++ b/docs/pptx/carbo/jx-carbo-linsubhr-sens-anyhosp.pptx
@@ -5062,8 +5062,8 @@
           </p:nvSpPr>
           <p:spPr>
             <a:xfrm>
-              <a:off x="2155289" y="5785772"/>
-              <a:ext cx="155356" cy="80101"/>
+              <a:off x="2152181" y="5785772"/>
+              <a:ext cx="161574" cy="80101"/>
             </a:xfrm>
             <a:prstGeom prst="rect">
               <a:avLst/>
@@ -5095,7 +5095,7 @@
                   <a:latin typeface="Helvetica"/>
                   <a:cs typeface="Helvetica"/>
                 </a:rPr>
-                <a:t>0.6</a:t>
+                <a:t>-40</a:t>
               </a:r>
             </a:p>
           </p:txBody>
@@ -5108,8 +5108,8 @@
           </p:nvSpPr>
           <p:spPr>
             <a:xfrm>
-              <a:off x="3887213" y="5785772"/>
-              <a:ext cx="155356" cy="80101"/>
+              <a:off x="3884104" y="5785772"/>
+              <a:ext cx="161574" cy="80101"/>
             </a:xfrm>
             <a:prstGeom prst="rect">
               <a:avLst/>
@@ -5141,7 +5141,7 @@
                   <a:latin typeface="Helvetica"/>
                   <a:cs typeface="Helvetica"/>
                 </a:rPr>
-                <a:t>0.8</a:t>
+                <a:t>-20</a:t>
               </a:r>
             </a:p>
           </p:txBody>
@@ -5154,8 +5154,8 @@
           </p:nvSpPr>
           <p:spPr>
             <a:xfrm>
-              <a:off x="5619136" y="5785772"/>
-              <a:ext cx="155356" cy="80101"/>
+              <a:off x="5665725" y="5785772"/>
+              <a:ext cx="62179" cy="80101"/>
             </a:xfrm>
             <a:prstGeom prst="rect">
               <a:avLst/>
@@ -5187,7 +5187,7 @@
                   <a:latin typeface="Helvetica"/>
                   <a:cs typeface="Helvetica"/>
                 </a:rPr>
-                <a:t>1.0</a:t>
+                <a:t>0</a:t>
               </a:r>
             </a:p>
           </p:txBody>
@@ -5200,8 +5200,8 @@
           </p:nvSpPr>
           <p:spPr>
             <a:xfrm>
-              <a:off x="7351060" y="5785772"/>
-              <a:ext cx="155356" cy="80101"/>
+              <a:off x="7366559" y="5785772"/>
+              <a:ext cx="124358" cy="80101"/>
             </a:xfrm>
             <a:prstGeom prst="rect">
               <a:avLst/>
@@ -5233,7 +5233,7 @@
                   <a:latin typeface="Helvetica"/>
                   <a:cs typeface="Helvetica"/>
                 </a:rPr>
-                <a:t>1.2</a:t>
+                <a:t>20</a:t>
               </a:r>
             </a:p>
           </p:txBody>
@@ -5246,8 +5246,8 @@
           </p:nvSpPr>
           <p:spPr>
             <a:xfrm>
-              <a:off x="2691419" y="5925448"/>
-              <a:ext cx="4051889" cy="100218"/>
+              <a:off x="1561815" y="5925448"/>
+              <a:ext cx="6311097" cy="100218"/>
             </a:xfrm>
             <a:prstGeom prst="rect">
               <a:avLst/>
@@ -5279,7 +5279,7 @@
                   <a:latin typeface="Helvetica"/>
                   <a:cs typeface="Helvetica"/>
                 </a:rPr>
-                <a:t>Sensitivity eGFR Ratio (CKD-EPI 2012 CysC / CKD-EPI 2021 Cr)</a:t>
+                <a:t>Sensitivity eGFR Difference (%): 100 × (CKD-EPI 2012 CysC − CKD-EPI 2021 Cr) / CKD-EPI 2021 Cr</a:t>
               </a:r>
             </a:p>
           </p:txBody>
@@ -5339,7 +5339,7 @@
           <p:spPr>
             <a:xfrm>
               <a:off x="817517" y="1896563"/>
-              <a:ext cx="6833128" cy="82021"/>
+              <a:ext cx="6959864" cy="82021"/>
             </a:xfrm>
             <a:prstGeom prst="rect">
               <a:avLst/>
@@ -5371,7 +5371,7 @@
                   <a:latin typeface="Helvetica"/>
                   <a:cs typeface="Helvetica"/>
                 </a:rPr>
-                <a:t>subHR per 0.1 ratio decline: 1.10 (1.01-1.21), p_Bonf = 0.217 (n = 6)  |  per IQR decline (Δ = 0.28): 1.32 (1.02-1.71)  |  IQR: [0.70, 0.98]</a:t>
+                <a:t>subHR per 10 % decline: 1.10 (1.01-1.21), p_Bonf = 0.217 (n = 6)  |  per IQR decline (Δ = 28.0 %): 1.32 (1.02-1.71)  |  IQR: [-30.0, -2.0] %</a:t>
               </a:r>
             </a:p>
           </p:txBody>

--- a/docs/pptx/carbo/jx-carbo-linsubhr-sens-anyhosp.pptx
+++ b/docs/pptx/carbo/jx-carbo-linsubhr-sens-anyhosp.pptx
@@ -2265,34 +2265,26 @@
         </p:sp>
         <p:sp>
           <p:nvSpPr>
-            <p:cNvPr id="4" name="pl4"/>
+            <p:cNvPr id="4" name="rc4"/>
             <p:cNvSpPr/>
             <p:nvPr/>
           </p:nvSpPr>
           <p:spPr>
             <a:xfrm>
-              <a:off x="817517" y="5142518"/>
-              <a:ext cx="7799693" cy="0"/>
+              <a:off x="457200" y="1600200"/>
+              <a:ext cx="8229600" cy="4525962"/>
             </a:xfrm>
-            <a:custGeom>
+            <a:prstGeom prst="rect">
               <a:avLst/>
-              <a:pathLst>
-                <a:path w="7799693" h="0">
-                  <a:moveTo>
-                    <a:pt x="0" y="0"/>
-                  </a:moveTo>
-                  <a:lnTo>
-                    <a:pt x="7799693" y="0"/>
-                  </a:lnTo>
-                  <a:lnTo>
-                    <a:pt x="7799693" y="0"/>
-                  </a:lnTo>
-                </a:path>
-              </a:pathLst>
-            </a:custGeom>
-            <a:ln w="6775" cap="flat">
+            </a:prstGeom>
+            <a:solidFill>
+              <a:srgbClr val="FFFFFF">
+                <a:alpha val="100000"/>
+              </a:srgbClr>
+            </a:solidFill>
+            <a:ln w="13550" cap="rnd">
               <a:solidFill>
-                <a:srgbClr val="EBEBEB">
+                <a:srgbClr val="FFFFFF">
                   <a:alpha val="100000"/>
                 </a:srgbClr>
               </a:solidFill>
@@ -2314,21 +2306,21 @@
           </p:nvSpPr>
           <p:spPr>
             <a:xfrm>
-              <a:off x="817517" y="4313054"/>
-              <a:ext cx="7799693" cy="0"/>
+              <a:off x="887106" y="3250627"/>
+              <a:ext cx="7660515" cy="0"/>
             </a:xfrm>
             <a:custGeom>
               <a:avLst/>
               <a:pathLst>
-                <a:path w="7799693" h="0">
+                <a:path w="7660515" h="0">
                   <a:moveTo>
                     <a:pt x="0" y="0"/>
                   </a:moveTo>
                   <a:lnTo>
-                    <a:pt x="7799693" y="0"/>
-                  </a:lnTo>
-                  <a:lnTo>
-                    <a:pt x="7799693" y="0"/>
+                    <a:pt x="7660515" y="0"/>
+                  </a:lnTo>
+                  <a:lnTo>
+                    <a:pt x="7660515" y="0"/>
                   </a:lnTo>
                 </a:path>
               </a:pathLst>
@@ -2357,21 +2349,21 @@
           </p:nvSpPr>
           <p:spPr>
             <a:xfrm>
-              <a:off x="817517" y="3483591"/>
-              <a:ext cx="7799693" cy="0"/>
+              <a:off x="887106" y="2951293"/>
+              <a:ext cx="7660515" cy="0"/>
             </a:xfrm>
             <a:custGeom>
               <a:avLst/>
               <a:pathLst>
-                <a:path w="7799693" h="0">
+                <a:path w="7660515" h="0">
                   <a:moveTo>
                     <a:pt x="0" y="0"/>
                   </a:moveTo>
                   <a:lnTo>
-                    <a:pt x="7799693" y="0"/>
-                  </a:lnTo>
-                  <a:lnTo>
-                    <a:pt x="7799693" y="0"/>
+                    <a:pt x="7660515" y="0"/>
+                  </a:lnTo>
+                  <a:lnTo>
+                    <a:pt x="7660515" y="0"/>
                   </a:lnTo>
                 </a:path>
               </a:pathLst>
@@ -2400,21 +2392,21 @@
           </p:nvSpPr>
           <p:spPr>
             <a:xfrm>
-              <a:off x="817517" y="2654127"/>
-              <a:ext cx="7799693" cy="0"/>
+              <a:off x="887106" y="2651959"/>
+              <a:ext cx="7660515" cy="0"/>
             </a:xfrm>
             <a:custGeom>
               <a:avLst/>
               <a:pathLst>
-                <a:path w="7799693" h="0">
+                <a:path w="7660515" h="0">
                   <a:moveTo>
                     <a:pt x="0" y="0"/>
                   </a:moveTo>
                   <a:lnTo>
-                    <a:pt x="7799693" y="0"/>
-                  </a:lnTo>
-                  <a:lnTo>
-                    <a:pt x="7799693" y="0"/>
+                    <a:pt x="7660515" y="0"/>
+                  </a:lnTo>
+                  <a:lnTo>
+                    <a:pt x="7660515" y="0"/>
                   </a:lnTo>
                 </a:path>
               </a:pathLst>
@@ -2443,21 +2435,21 @@
           </p:nvSpPr>
           <p:spPr>
             <a:xfrm>
-              <a:off x="1367006" y="2073503"/>
-              <a:ext cx="0" cy="3649639"/>
+              <a:off x="887106" y="2352625"/>
+              <a:ext cx="7660515" cy="0"/>
             </a:xfrm>
             <a:custGeom>
               <a:avLst/>
               <a:pathLst>
-                <a:path w="0" h="3649639">
+                <a:path w="7660515" h="0">
                   <a:moveTo>
-                    <a:pt x="0" y="3649639"/>
+                    <a:pt x="0" y="0"/>
                   </a:moveTo>
                   <a:lnTo>
-                    <a:pt x="0" y="0"/>
-                  </a:lnTo>
-                  <a:lnTo>
-                    <a:pt x="0" y="0"/>
+                    <a:pt x="7660515" y="0"/>
+                  </a:lnTo>
+                  <a:lnTo>
+                    <a:pt x="7660515" y="0"/>
                   </a:lnTo>
                 </a:path>
               </a:pathLst>
@@ -2486,15 +2478,15 @@
           </p:nvSpPr>
           <p:spPr>
             <a:xfrm>
-              <a:off x="3098929" y="2073503"/>
-              <a:ext cx="0" cy="3649639"/>
+              <a:off x="1426790" y="2143092"/>
+              <a:ext cx="0" cy="1317069"/>
             </a:xfrm>
             <a:custGeom>
               <a:avLst/>
               <a:pathLst>
-                <a:path w="0" h="3649639">
+                <a:path w="0" h="1317069">
                   <a:moveTo>
-                    <a:pt x="0" y="3649639"/>
+                    <a:pt x="0" y="1317069"/>
                   </a:moveTo>
                   <a:lnTo>
                     <a:pt x="0" y="0"/>
@@ -2529,15 +2521,15 @@
           </p:nvSpPr>
           <p:spPr>
             <a:xfrm>
-              <a:off x="4830853" y="2073503"/>
-              <a:ext cx="0" cy="3649639"/>
+              <a:off x="3127809" y="2143092"/>
+              <a:ext cx="0" cy="1317069"/>
             </a:xfrm>
             <a:custGeom>
               <a:avLst/>
               <a:pathLst>
-                <a:path w="0" h="3649639">
+                <a:path w="0" h="1317069">
                   <a:moveTo>
-                    <a:pt x="0" y="3649639"/>
+                    <a:pt x="0" y="1317069"/>
                   </a:moveTo>
                   <a:lnTo>
                     <a:pt x="0" y="0"/>
@@ -2572,15 +2564,15 @@
           </p:nvSpPr>
           <p:spPr>
             <a:xfrm>
-              <a:off x="6562776" y="2073503"/>
-              <a:ext cx="0" cy="3649639"/>
+              <a:off x="4828828" y="2143092"/>
+              <a:ext cx="0" cy="1317069"/>
             </a:xfrm>
             <a:custGeom>
               <a:avLst/>
               <a:pathLst>
-                <a:path w="0" h="3649639">
+                <a:path w="0" h="1317069">
                   <a:moveTo>
-                    <a:pt x="0" y="3649639"/>
+                    <a:pt x="0" y="1317069"/>
                   </a:moveTo>
                   <a:lnTo>
                     <a:pt x="0" y="0"/>
@@ -2615,15 +2607,15 @@
           </p:nvSpPr>
           <p:spPr>
             <a:xfrm>
-              <a:off x="8294700" y="2073503"/>
-              <a:ext cx="0" cy="3649639"/>
+              <a:off x="6529847" y="2143092"/>
+              <a:ext cx="0" cy="1317069"/>
             </a:xfrm>
             <a:custGeom>
               <a:avLst/>
               <a:pathLst>
-                <a:path w="0" h="3649639">
+                <a:path w="0" h="1317069">
                   <a:moveTo>
-                    <a:pt x="0" y="3649639"/>
+                    <a:pt x="0" y="1317069"/>
                   </a:moveTo>
                   <a:lnTo>
                     <a:pt x="0" y="0"/>
@@ -2658,26 +2650,26 @@
           </p:nvSpPr>
           <p:spPr>
             <a:xfrm>
-              <a:off x="817517" y="5557249"/>
-              <a:ext cx="7799693" cy="0"/>
+              <a:off x="8230866" y="2143092"/>
+              <a:ext cx="0" cy="1317069"/>
             </a:xfrm>
             <a:custGeom>
               <a:avLst/>
               <a:pathLst>
-                <a:path w="7799693" h="0">
+                <a:path w="0" h="1317069">
                   <a:moveTo>
+                    <a:pt x="0" y="1317069"/>
+                  </a:moveTo>
+                  <a:lnTo>
                     <a:pt x="0" y="0"/>
-                  </a:moveTo>
-                  <a:lnTo>
-                    <a:pt x="7799693" y="0"/>
-                  </a:lnTo>
-                  <a:lnTo>
-                    <a:pt x="7799693" y="0"/>
+                  </a:lnTo>
+                  <a:lnTo>
+                    <a:pt x="0" y="0"/>
                   </a:lnTo>
                 </a:path>
               </a:pathLst>
             </a:custGeom>
-            <a:ln w="13550" cap="flat">
+            <a:ln w="6775" cap="flat">
               <a:solidFill>
                 <a:srgbClr val="EBEBEB">
                   <a:alpha val="100000"/>
@@ -2701,21 +2693,21 @@
           </p:nvSpPr>
           <p:spPr>
             <a:xfrm>
-              <a:off x="817517" y="4727786"/>
-              <a:ext cx="7799693" cy="0"/>
+              <a:off x="887106" y="3400294"/>
+              <a:ext cx="7660515" cy="0"/>
             </a:xfrm>
             <a:custGeom>
               <a:avLst/>
               <a:pathLst>
-                <a:path w="7799693" h="0">
+                <a:path w="7660515" h="0">
                   <a:moveTo>
                     <a:pt x="0" y="0"/>
                   </a:moveTo>
                   <a:lnTo>
-                    <a:pt x="7799693" y="0"/>
-                  </a:lnTo>
-                  <a:lnTo>
-                    <a:pt x="7799693" y="0"/>
+                    <a:pt x="7660515" y="0"/>
+                  </a:lnTo>
+                  <a:lnTo>
+                    <a:pt x="7660515" y="0"/>
                   </a:lnTo>
                 </a:path>
               </a:pathLst>
@@ -2744,21 +2736,21 @@
           </p:nvSpPr>
           <p:spPr>
             <a:xfrm>
-              <a:off x="817517" y="3898322"/>
-              <a:ext cx="7799693" cy="0"/>
+              <a:off x="887106" y="3100960"/>
+              <a:ext cx="7660515" cy="0"/>
             </a:xfrm>
             <a:custGeom>
               <a:avLst/>
               <a:pathLst>
-                <a:path w="7799693" h="0">
+                <a:path w="7660515" h="0">
                   <a:moveTo>
                     <a:pt x="0" y="0"/>
                   </a:moveTo>
                   <a:lnTo>
-                    <a:pt x="7799693" y="0"/>
-                  </a:lnTo>
-                  <a:lnTo>
-                    <a:pt x="7799693" y="0"/>
+                    <a:pt x="7660515" y="0"/>
+                  </a:lnTo>
+                  <a:lnTo>
+                    <a:pt x="7660515" y="0"/>
                   </a:lnTo>
                 </a:path>
               </a:pathLst>
@@ -2787,21 +2779,21 @@
           </p:nvSpPr>
           <p:spPr>
             <a:xfrm>
-              <a:off x="817517" y="3068859"/>
-              <a:ext cx="7799693" cy="0"/>
+              <a:off x="887106" y="2801626"/>
+              <a:ext cx="7660515" cy="0"/>
             </a:xfrm>
             <a:custGeom>
               <a:avLst/>
               <a:pathLst>
-                <a:path w="7799693" h="0">
+                <a:path w="7660515" h="0">
                   <a:moveTo>
                     <a:pt x="0" y="0"/>
                   </a:moveTo>
                   <a:lnTo>
-                    <a:pt x="7799693" y="0"/>
-                  </a:lnTo>
-                  <a:lnTo>
-                    <a:pt x="7799693" y="0"/>
+                    <a:pt x="7660515" y="0"/>
+                  </a:lnTo>
+                  <a:lnTo>
+                    <a:pt x="7660515" y="0"/>
                   </a:lnTo>
                 </a:path>
               </a:pathLst>
@@ -2830,21 +2822,21 @@
           </p:nvSpPr>
           <p:spPr>
             <a:xfrm>
-              <a:off x="817517" y="2239395"/>
-              <a:ext cx="7799693" cy="0"/>
+              <a:off x="887106" y="2502292"/>
+              <a:ext cx="7660515" cy="0"/>
             </a:xfrm>
             <a:custGeom>
               <a:avLst/>
               <a:pathLst>
-                <a:path w="7799693" h="0">
+                <a:path w="7660515" h="0">
                   <a:moveTo>
                     <a:pt x="0" y="0"/>
                   </a:moveTo>
                   <a:lnTo>
-                    <a:pt x="7799693" y="0"/>
-                  </a:lnTo>
-                  <a:lnTo>
-                    <a:pt x="7799693" y="0"/>
+                    <a:pt x="7660515" y="0"/>
+                  </a:lnTo>
+                  <a:lnTo>
+                    <a:pt x="7660515" y="0"/>
                   </a:lnTo>
                 </a:path>
               </a:pathLst>
@@ -2873,21 +2865,21 @@
           </p:nvSpPr>
           <p:spPr>
             <a:xfrm>
-              <a:off x="2232968" y="2073503"/>
-              <a:ext cx="0" cy="3649639"/>
+              <a:off x="887106" y="2202958"/>
+              <a:ext cx="7660515" cy="0"/>
             </a:xfrm>
             <a:custGeom>
               <a:avLst/>
               <a:pathLst>
-                <a:path w="0" h="3649639">
+                <a:path w="7660515" h="0">
                   <a:moveTo>
-                    <a:pt x="0" y="3649639"/>
+                    <a:pt x="0" y="0"/>
                   </a:moveTo>
                   <a:lnTo>
-                    <a:pt x="0" y="0"/>
-                  </a:lnTo>
-                  <a:lnTo>
-                    <a:pt x="0" y="0"/>
+                    <a:pt x="7660515" y="0"/>
+                  </a:lnTo>
+                  <a:lnTo>
+                    <a:pt x="7660515" y="0"/>
                   </a:lnTo>
                 </a:path>
               </a:pathLst>
@@ -2916,15 +2908,15 @@
           </p:nvSpPr>
           <p:spPr>
             <a:xfrm>
-              <a:off x="3964891" y="2073503"/>
-              <a:ext cx="0" cy="3649639"/>
+              <a:off x="2277299" y="2143092"/>
+              <a:ext cx="0" cy="1317069"/>
             </a:xfrm>
             <a:custGeom>
               <a:avLst/>
               <a:pathLst>
-                <a:path w="0" h="3649639">
+                <a:path w="0" h="1317069">
                   <a:moveTo>
-                    <a:pt x="0" y="3649639"/>
+                    <a:pt x="0" y="1317069"/>
                   </a:moveTo>
                   <a:lnTo>
                     <a:pt x="0" y="0"/>
@@ -2959,15 +2951,15 @@
           </p:nvSpPr>
           <p:spPr>
             <a:xfrm>
-              <a:off x="5696815" y="2073503"/>
-              <a:ext cx="0" cy="3649639"/>
+              <a:off x="3978318" y="2143092"/>
+              <a:ext cx="0" cy="1317069"/>
             </a:xfrm>
             <a:custGeom>
               <a:avLst/>
               <a:pathLst>
-                <a:path w="0" h="3649639">
+                <a:path w="0" h="1317069">
                   <a:moveTo>
-                    <a:pt x="0" y="3649639"/>
+                    <a:pt x="0" y="1317069"/>
                   </a:moveTo>
                   <a:lnTo>
                     <a:pt x="0" y="0"/>
@@ -3002,15 +2994,15 @@
           </p:nvSpPr>
           <p:spPr>
             <a:xfrm>
-              <a:off x="7428738" y="2073503"/>
-              <a:ext cx="0" cy="3649639"/>
+              <a:off x="5679337" y="2143092"/>
+              <a:ext cx="0" cy="1317069"/>
             </a:xfrm>
             <a:custGeom>
               <a:avLst/>
               <a:pathLst>
-                <a:path w="0" h="3649639">
+                <a:path w="0" h="1317069">
                   <a:moveTo>
-                    <a:pt x="0" y="3649639"/>
+                    <a:pt x="0" y="1317069"/>
                   </a:moveTo>
                   <a:lnTo>
                     <a:pt x="0" y="0"/>
@@ -3039,618 +3031,661 @@
         </p:sp>
         <p:sp>
           <p:nvSpPr>
-            <p:cNvPr id="22" name="pg22"/>
+            <p:cNvPr id="22" name="pl22"/>
             <p:cNvSpPr/>
             <p:nvPr/>
           </p:nvSpPr>
           <p:spPr>
             <a:xfrm>
-              <a:off x="1172049" y="3900887"/>
-              <a:ext cx="7090630" cy="1313628"/>
+              <a:off x="7380356" y="2143092"/>
+              <a:ext cx="0" cy="1317069"/>
             </a:xfrm>
             <a:custGeom>
               <a:avLst/>
               <a:pathLst>
-                <a:path w="7090630" h="1313628">
+                <a:path w="0" h="1317069">
+                  <a:moveTo>
+                    <a:pt x="0" y="1317069"/>
+                  </a:moveTo>
+                  <a:lnTo>
+                    <a:pt x="0" y="0"/>
+                  </a:lnTo>
+                  <a:lnTo>
+                    <a:pt x="0" y="0"/>
+                  </a:lnTo>
+                </a:path>
+              </a:pathLst>
+            </a:custGeom>
+            <a:ln w="13550" cap="flat">
+              <a:solidFill>
+                <a:srgbClr val="EBEBEB">
+                  <a:alpha val="100000"/>
+                </a:srgbClr>
+              </a:solidFill>
+              <a:prstDash val="solid"/>
+              <a:round/>
+            </a:ln>
+          </p:spPr>
+          <p:txBody>
+            <a:bodyPr/>
+            <a:lstStyle/>
+            <a:p/>
+          </p:txBody>
+        </p:sp>
+        <p:sp>
+          <p:nvSpPr>
+            <p:cNvPr id="23" name="pg23"/>
+            <p:cNvSpPr/>
+            <p:nvPr/>
+          </p:nvSpPr>
+          <p:spPr>
+            <a:xfrm>
+              <a:off x="1235312" y="2802552"/>
+              <a:ext cx="6964104" cy="474057"/>
+            </a:xfrm>
+            <a:custGeom>
+              <a:avLst/>
+              <a:pathLst>
+                <a:path w="6964104" h="474057">
                   <a:moveTo>
                     <a:pt x="0" y="0"/>
                   </a:moveTo>
                   <a:lnTo>
-                    <a:pt x="71622" y="26149"/>
-                  </a:lnTo>
-                  <a:lnTo>
-                    <a:pt x="143245" y="51886"/>
-                  </a:lnTo>
-                  <a:lnTo>
-                    <a:pt x="214867" y="77217"/>
-                  </a:lnTo>
-                  <a:lnTo>
-                    <a:pt x="286490" y="102147"/>
-                  </a:lnTo>
-                  <a:lnTo>
-                    <a:pt x="358112" y="126684"/>
-                  </a:lnTo>
-                  <a:lnTo>
-                    <a:pt x="429735" y="150834"/>
-                  </a:lnTo>
-                  <a:lnTo>
-                    <a:pt x="501357" y="174602"/>
-                  </a:lnTo>
-                  <a:lnTo>
-                    <a:pt x="572980" y="197996"/>
-                  </a:lnTo>
-                  <a:lnTo>
-                    <a:pt x="644602" y="221020"/>
-                  </a:lnTo>
-                  <a:lnTo>
-                    <a:pt x="716225" y="243680"/>
-                  </a:lnTo>
-                  <a:lnTo>
-                    <a:pt x="787847" y="265983"/>
-                  </a:lnTo>
-                  <a:lnTo>
-                    <a:pt x="859470" y="287933"/>
-                  </a:lnTo>
-                  <a:lnTo>
-                    <a:pt x="931092" y="309537"/>
-                  </a:lnTo>
-                  <a:lnTo>
-                    <a:pt x="1002715" y="330800"/>
-                  </a:lnTo>
-                  <a:lnTo>
-                    <a:pt x="1074337" y="351727"/>
-                  </a:lnTo>
-                  <a:lnTo>
-                    <a:pt x="1145960" y="372324"/>
-                  </a:lnTo>
-                  <a:lnTo>
-                    <a:pt x="1217582" y="392596"/>
-                  </a:lnTo>
-                  <a:lnTo>
-                    <a:pt x="1289205" y="412547"/>
-                  </a:lnTo>
-                  <a:lnTo>
-                    <a:pt x="1360827" y="432184"/>
-                  </a:lnTo>
-                  <a:lnTo>
-                    <a:pt x="1432450" y="451511"/>
-                  </a:lnTo>
-                  <a:lnTo>
-                    <a:pt x="1504073" y="470532"/>
-                  </a:lnTo>
-                  <a:lnTo>
-                    <a:pt x="1575695" y="489253"/>
-                  </a:lnTo>
-                  <a:lnTo>
-                    <a:pt x="1647318" y="507679"/>
-                  </a:lnTo>
-                  <a:lnTo>
-                    <a:pt x="1718940" y="525814"/>
-                  </a:lnTo>
-                  <a:lnTo>
-                    <a:pt x="1790563" y="543662"/>
-                  </a:lnTo>
-                  <a:lnTo>
-                    <a:pt x="1862185" y="561229"/>
-                  </a:lnTo>
-                  <a:lnTo>
-                    <a:pt x="1933808" y="578518"/>
-                  </a:lnTo>
-                  <a:lnTo>
-                    <a:pt x="2005430" y="595535"/>
-                  </a:lnTo>
-                  <a:lnTo>
-                    <a:pt x="2077053" y="612282"/>
-                  </a:lnTo>
-                  <a:lnTo>
-                    <a:pt x="2148675" y="628766"/>
-                  </a:lnTo>
-                  <a:lnTo>
-                    <a:pt x="2220298" y="644989"/>
-                  </a:lnTo>
-                  <a:lnTo>
-                    <a:pt x="2291920" y="660956"/>
-                  </a:lnTo>
-                  <a:lnTo>
-                    <a:pt x="2363543" y="676671"/>
-                  </a:lnTo>
-                  <a:lnTo>
-                    <a:pt x="2435165" y="692138"/>
-                  </a:lnTo>
-                  <a:lnTo>
-                    <a:pt x="2506788" y="707360"/>
-                  </a:lnTo>
-                  <a:lnTo>
-                    <a:pt x="2578410" y="722342"/>
-                  </a:lnTo>
-                  <a:lnTo>
-                    <a:pt x="2650033" y="737088"/>
-                  </a:lnTo>
-                  <a:lnTo>
-                    <a:pt x="2721655" y="751601"/>
-                  </a:lnTo>
-                  <a:lnTo>
-                    <a:pt x="2793278" y="765885"/>
-                  </a:lnTo>
-                  <a:lnTo>
-                    <a:pt x="2864901" y="779943"/>
-                  </a:lnTo>
-                  <a:lnTo>
-                    <a:pt x="2936523" y="793780"/>
-                  </a:lnTo>
-                  <a:lnTo>
-                    <a:pt x="3008146" y="807398"/>
-                  </a:lnTo>
-                  <a:lnTo>
-                    <a:pt x="3079768" y="820801"/>
-                  </a:lnTo>
-                  <a:lnTo>
-                    <a:pt x="3151391" y="827134"/>
-                  </a:lnTo>
-                  <a:lnTo>
-                    <a:pt x="3223013" y="827572"/>
-                  </a:lnTo>
-                  <a:lnTo>
-                    <a:pt x="3294636" y="828009"/>
-                  </a:lnTo>
-                  <a:lnTo>
-                    <a:pt x="3366258" y="828447"/>
-                  </a:lnTo>
-                  <a:lnTo>
-                    <a:pt x="3437881" y="828884"/>
-                  </a:lnTo>
-                  <a:lnTo>
-                    <a:pt x="3509503" y="829320"/>
-                  </a:lnTo>
-                  <a:lnTo>
-                    <a:pt x="3581126" y="829757"/>
-                  </a:lnTo>
-                  <a:lnTo>
-                    <a:pt x="3652748" y="830193"/>
-                  </a:lnTo>
-                  <a:lnTo>
-                    <a:pt x="3724371" y="830629"/>
-                  </a:lnTo>
-                  <a:lnTo>
-                    <a:pt x="3795993" y="831065"/>
-                  </a:lnTo>
-                  <a:lnTo>
-                    <a:pt x="3867616" y="831501"/>
-                  </a:lnTo>
-                  <a:lnTo>
-                    <a:pt x="3939238" y="831936"/>
-                  </a:lnTo>
-                  <a:lnTo>
-                    <a:pt x="4010861" y="832371"/>
-                  </a:lnTo>
-                  <a:lnTo>
-                    <a:pt x="4082483" y="832806"/>
-                  </a:lnTo>
-                  <a:lnTo>
-                    <a:pt x="4154106" y="833241"/>
-                  </a:lnTo>
-                  <a:lnTo>
-                    <a:pt x="4225729" y="833675"/>
-                  </a:lnTo>
-                  <a:lnTo>
-                    <a:pt x="4297351" y="834109"/>
-                  </a:lnTo>
-                  <a:lnTo>
-                    <a:pt x="4368974" y="834543"/>
-                  </a:lnTo>
-                  <a:lnTo>
-                    <a:pt x="4440596" y="834977"/>
-                  </a:lnTo>
-                  <a:lnTo>
-                    <a:pt x="4512219" y="835411"/>
-                  </a:lnTo>
-                  <a:lnTo>
-                    <a:pt x="4583841" y="835844"/>
-                  </a:lnTo>
-                  <a:lnTo>
-                    <a:pt x="4655464" y="836277"/>
-                  </a:lnTo>
-                  <a:lnTo>
-                    <a:pt x="4727086" y="836710"/>
-                  </a:lnTo>
-                  <a:lnTo>
-                    <a:pt x="4798709" y="837143"/>
-                  </a:lnTo>
-                  <a:lnTo>
-                    <a:pt x="4870331" y="837575"/>
-                  </a:lnTo>
-                  <a:lnTo>
-                    <a:pt x="4941954" y="838007"/>
-                  </a:lnTo>
-                  <a:lnTo>
-                    <a:pt x="5013576" y="838439"/>
-                  </a:lnTo>
-                  <a:lnTo>
-                    <a:pt x="5085199" y="838871"/>
-                  </a:lnTo>
-                  <a:lnTo>
-                    <a:pt x="5156821" y="839302"/>
-                  </a:lnTo>
-                  <a:lnTo>
-                    <a:pt x="5228444" y="839734"/>
-                  </a:lnTo>
-                  <a:lnTo>
-                    <a:pt x="5300066" y="840165"/>
-                  </a:lnTo>
-                  <a:lnTo>
-                    <a:pt x="5371689" y="840595"/>
-                  </a:lnTo>
-                  <a:lnTo>
-                    <a:pt x="5443311" y="841026"/>
-                  </a:lnTo>
-                  <a:lnTo>
-                    <a:pt x="5514934" y="841456"/>
-                  </a:lnTo>
-                  <a:lnTo>
-                    <a:pt x="5586557" y="841886"/>
-                  </a:lnTo>
-                  <a:lnTo>
-                    <a:pt x="5658179" y="842316"/>
-                  </a:lnTo>
-                  <a:lnTo>
-                    <a:pt x="5729802" y="842746"/>
-                  </a:lnTo>
-                  <a:lnTo>
-                    <a:pt x="5801424" y="843175"/>
-                  </a:lnTo>
-                  <a:lnTo>
-                    <a:pt x="5873047" y="843605"/>
-                  </a:lnTo>
-                  <a:lnTo>
-                    <a:pt x="5944669" y="844034"/>
-                  </a:lnTo>
-                  <a:lnTo>
-                    <a:pt x="6016292" y="844462"/>
-                  </a:lnTo>
-                  <a:lnTo>
-                    <a:pt x="6087914" y="844891"/>
-                  </a:lnTo>
-                  <a:lnTo>
-                    <a:pt x="6159537" y="845319"/>
-                  </a:lnTo>
-                  <a:lnTo>
-                    <a:pt x="6231159" y="845747"/>
-                  </a:lnTo>
-                  <a:lnTo>
-                    <a:pt x="6302782" y="846175"/>
-                  </a:lnTo>
-                  <a:lnTo>
-                    <a:pt x="6374404" y="846603"/>
-                  </a:lnTo>
-                  <a:lnTo>
-                    <a:pt x="6446027" y="847030"/>
-                  </a:lnTo>
-                  <a:lnTo>
-                    <a:pt x="6517649" y="847457"/>
-                  </a:lnTo>
-                  <a:lnTo>
-                    <a:pt x="6589272" y="847884"/>
-                  </a:lnTo>
-                  <a:lnTo>
-                    <a:pt x="6660894" y="848311"/>
-                  </a:lnTo>
-                  <a:lnTo>
-                    <a:pt x="6732517" y="848737"/>
-                  </a:lnTo>
-                  <a:lnTo>
-                    <a:pt x="6804139" y="849164"/>
-                  </a:lnTo>
-                  <a:lnTo>
-                    <a:pt x="6875762" y="849590"/>
-                  </a:lnTo>
-                  <a:lnTo>
-                    <a:pt x="6947385" y="850016"/>
-                  </a:lnTo>
-                  <a:lnTo>
-                    <a:pt x="7019007" y="850441"/>
-                  </a:lnTo>
-                  <a:lnTo>
-                    <a:pt x="7090630" y="850866"/>
-                  </a:lnTo>
-                  <a:lnTo>
-                    <a:pt x="7090630" y="1313628"/>
-                  </a:lnTo>
-                  <a:lnTo>
-                    <a:pt x="7019007" y="1308130"/>
-                  </a:lnTo>
-                  <a:lnTo>
-                    <a:pt x="6947385" y="1302544"/>
-                  </a:lnTo>
-                  <a:lnTo>
-                    <a:pt x="6875762" y="1296869"/>
-                  </a:lnTo>
-                  <a:lnTo>
-                    <a:pt x="6804139" y="1291102"/>
-                  </a:lnTo>
-                  <a:lnTo>
-                    <a:pt x="6732517" y="1285243"/>
-                  </a:lnTo>
-                  <a:lnTo>
-                    <a:pt x="6660894" y="1279291"/>
-                  </a:lnTo>
-                  <a:lnTo>
-                    <a:pt x="6589272" y="1273242"/>
-                  </a:lnTo>
-                  <a:lnTo>
-                    <a:pt x="6517649" y="1267097"/>
-                  </a:lnTo>
-                  <a:lnTo>
-                    <a:pt x="6446027" y="1260852"/>
-                  </a:lnTo>
-                  <a:lnTo>
-                    <a:pt x="6374404" y="1254508"/>
-                  </a:lnTo>
-                  <a:lnTo>
-                    <a:pt x="6302782" y="1248062"/>
-                  </a:lnTo>
-                  <a:lnTo>
-                    <a:pt x="6231159" y="1241513"/>
-                  </a:lnTo>
-                  <a:lnTo>
-                    <a:pt x="6159537" y="1234858"/>
-                  </a:lnTo>
-                  <a:lnTo>
-                    <a:pt x="6087914" y="1228097"/>
-                  </a:lnTo>
-                  <a:lnTo>
-                    <a:pt x="6016292" y="1221228"/>
-                  </a:lnTo>
-                  <a:lnTo>
-                    <a:pt x="5944669" y="1214248"/>
-                  </a:lnTo>
-                  <a:lnTo>
-                    <a:pt x="5873047" y="1207156"/>
-                  </a:lnTo>
-                  <a:lnTo>
-                    <a:pt x="5801424" y="1199950"/>
-                  </a:lnTo>
-                  <a:lnTo>
-                    <a:pt x="5729802" y="1192629"/>
-                  </a:lnTo>
-                  <a:lnTo>
-                    <a:pt x="5658179" y="1185191"/>
-                  </a:lnTo>
-                  <a:lnTo>
-                    <a:pt x="5586557" y="1177633"/>
-                  </a:lnTo>
-                  <a:lnTo>
-                    <a:pt x="5514934" y="1169954"/>
-                  </a:lnTo>
-                  <a:lnTo>
-                    <a:pt x="5443311" y="1162151"/>
-                  </a:lnTo>
-                  <a:lnTo>
-                    <a:pt x="5371689" y="1154224"/>
-                  </a:lnTo>
-                  <a:lnTo>
-                    <a:pt x="5300066" y="1146169"/>
-                  </a:lnTo>
-                  <a:lnTo>
-                    <a:pt x="5228444" y="1137985"/>
-                  </a:lnTo>
-                  <a:lnTo>
-                    <a:pt x="5156821" y="1129670"/>
-                  </a:lnTo>
-                  <a:lnTo>
-                    <a:pt x="5085199" y="1121222"/>
-                  </a:lnTo>
-                  <a:lnTo>
-                    <a:pt x="5013576" y="1112638"/>
-                  </a:lnTo>
-                  <a:lnTo>
-                    <a:pt x="4941954" y="1103916"/>
-                  </a:lnTo>
-                  <a:lnTo>
-                    <a:pt x="4870331" y="1095054"/>
-                  </a:lnTo>
-                  <a:lnTo>
-                    <a:pt x="4798709" y="1086051"/>
-                  </a:lnTo>
-                  <a:lnTo>
-                    <a:pt x="4727086" y="1076902"/>
-                  </a:lnTo>
-                  <a:lnTo>
-                    <a:pt x="4655464" y="1067607"/>
-                  </a:lnTo>
-                  <a:lnTo>
-                    <a:pt x="4583841" y="1058163"/>
-                  </a:lnTo>
-                  <a:lnTo>
-                    <a:pt x="4512219" y="1048568"/>
-                  </a:lnTo>
-                  <a:lnTo>
-                    <a:pt x="4440596" y="1038819"/>
-                  </a:lnTo>
-                  <a:lnTo>
-                    <a:pt x="4368974" y="1028913"/>
-                  </a:lnTo>
-                  <a:lnTo>
-                    <a:pt x="4297351" y="1018848"/>
-                  </a:lnTo>
-                  <a:lnTo>
-                    <a:pt x="4225729" y="1008622"/>
-                  </a:lnTo>
-                  <a:lnTo>
-                    <a:pt x="4154106" y="998232"/>
-                  </a:lnTo>
-                  <a:lnTo>
-                    <a:pt x="4082483" y="987675"/>
-                  </a:lnTo>
-                  <a:lnTo>
-                    <a:pt x="4010861" y="976949"/>
-                  </a:lnTo>
-                  <a:lnTo>
-                    <a:pt x="3939238" y="966050"/>
-                  </a:lnTo>
-                  <a:lnTo>
-                    <a:pt x="3867616" y="954977"/>
-                  </a:lnTo>
-                  <a:lnTo>
-                    <a:pt x="3795993" y="943727"/>
-                  </a:lnTo>
-                  <a:lnTo>
-                    <a:pt x="3724371" y="932295"/>
-                  </a:lnTo>
-                  <a:lnTo>
-                    <a:pt x="3652748" y="920681"/>
-                  </a:lnTo>
-                  <a:lnTo>
-                    <a:pt x="3581126" y="908880"/>
-                  </a:lnTo>
-                  <a:lnTo>
-                    <a:pt x="3509503" y="896890"/>
-                  </a:lnTo>
-                  <a:lnTo>
-                    <a:pt x="3437881" y="884708"/>
-                  </a:lnTo>
-                  <a:lnTo>
-                    <a:pt x="3366258" y="872330"/>
-                  </a:lnTo>
-                  <a:lnTo>
-                    <a:pt x="3294636" y="859753"/>
-                  </a:lnTo>
-                  <a:lnTo>
-                    <a:pt x="3223013" y="846975"/>
-                  </a:lnTo>
-                  <a:lnTo>
-                    <a:pt x="3151391" y="833992"/>
-                  </a:lnTo>
-                  <a:lnTo>
-                    <a:pt x="3079768" y="826696"/>
-                  </a:lnTo>
-                  <a:lnTo>
-                    <a:pt x="3008146" y="826258"/>
-                  </a:lnTo>
-                  <a:lnTo>
-                    <a:pt x="2936523" y="825820"/>
-                  </a:lnTo>
-                  <a:lnTo>
-                    <a:pt x="2864901" y="825381"/>
-                  </a:lnTo>
-                  <a:lnTo>
-                    <a:pt x="2793278" y="824943"/>
-                  </a:lnTo>
-                  <a:lnTo>
-                    <a:pt x="2721655" y="824503"/>
-                  </a:lnTo>
-                  <a:lnTo>
-                    <a:pt x="2650033" y="824064"/>
-                  </a:lnTo>
-                  <a:lnTo>
-                    <a:pt x="2578410" y="823625"/>
-                  </a:lnTo>
-                  <a:lnTo>
-                    <a:pt x="2506788" y="823185"/>
-                  </a:lnTo>
-                  <a:lnTo>
-                    <a:pt x="2435165" y="822745"/>
-                  </a:lnTo>
-                  <a:lnTo>
-                    <a:pt x="2363543" y="822305"/>
-                  </a:lnTo>
-                  <a:lnTo>
-                    <a:pt x="2291920" y="821864"/>
-                  </a:lnTo>
-                  <a:lnTo>
-                    <a:pt x="2220298" y="821424"/>
-                  </a:lnTo>
-                  <a:lnTo>
-                    <a:pt x="2148675" y="820983"/>
-                  </a:lnTo>
-                  <a:lnTo>
-                    <a:pt x="2077053" y="820541"/>
-                  </a:lnTo>
-                  <a:lnTo>
-                    <a:pt x="2005430" y="820100"/>
-                  </a:lnTo>
-                  <a:lnTo>
-                    <a:pt x="1933808" y="819658"/>
-                  </a:lnTo>
-                  <a:lnTo>
-                    <a:pt x="1862185" y="819217"/>
-                  </a:lnTo>
-                  <a:lnTo>
-                    <a:pt x="1790563" y="818775"/>
-                  </a:lnTo>
-                  <a:lnTo>
-                    <a:pt x="1718940" y="818332"/>
-                  </a:lnTo>
-                  <a:lnTo>
-                    <a:pt x="1647318" y="817890"/>
-                  </a:lnTo>
-                  <a:lnTo>
-                    <a:pt x="1575695" y="817447"/>
-                  </a:lnTo>
-                  <a:lnTo>
-                    <a:pt x="1504073" y="817004"/>
-                  </a:lnTo>
-                  <a:lnTo>
-                    <a:pt x="1432450" y="816561"/>
-                  </a:lnTo>
-                  <a:lnTo>
-                    <a:pt x="1360827" y="816117"/>
-                  </a:lnTo>
-                  <a:lnTo>
-                    <a:pt x="1289205" y="815673"/>
-                  </a:lnTo>
-                  <a:lnTo>
-                    <a:pt x="1217582" y="815229"/>
-                  </a:lnTo>
-                  <a:lnTo>
-                    <a:pt x="1145960" y="814785"/>
-                  </a:lnTo>
-                  <a:lnTo>
-                    <a:pt x="1074337" y="814341"/>
-                  </a:lnTo>
-                  <a:lnTo>
-                    <a:pt x="1002715" y="813896"/>
-                  </a:lnTo>
-                  <a:lnTo>
-                    <a:pt x="931092" y="813451"/>
-                  </a:lnTo>
-                  <a:lnTo>
-                    <a:pt x="859470" y="813006"/>
-                  </a:lnTo>
-                  <a:lnTo>
-                    <a:pt x="787847" y="812561"/>
-                  </a:lnTo>
-                  <a:lnTo>
-                    <a:pt x="716225" y="812115"/>
-                  </a:lnTo>
-                  <a:lnTo>
-                    <a:pt x="644602" y="811669"/>
-                  </a:lnTo>
-                  <a:lnTo>
-                    <a:pt x="572980" y="811223"/>
-                  </a:lnTo>
-                  <a:lnTo>
-                    <a:pt x="501357" y="810777"/>
-                  </a:lnTo>
-                  <a:lnTo>
-                    <a:pt x="429735" y="810330"/>
-                  </a:lnTo>
-                  <a:lnTo>
-                    <a:pt x="358112" y="809884"/>
-                  </a:lnTo>
-                  <a:lnTo>
-                    <a:pt x="286490" y="809437"/>
-                  </a:lnTo>
-                  <a:lnTo>
-                    <a:pt x="214867" y="808989"/>
-                  </a:lnTo>
-                  <a:lnTo>
-                    <a:pt x="143245" y="808542"/>
-                  </a:lnTo>
-                  <a:lnTo>
-                    <a:pt x="71622" y="808094"/>
-                  </a:lnTo>
-                  <a:lnTo>
-                    <a:pt x="0" y="807646"/>
+                    <a:pt x="70344" y="9436"/>
+                  </a:lnTo>
+                  <a:lnTo>
+                    <a:pt x="140688" y="18724"/>
+                  </a:lnTo>
+                  <a:lnTo>
+                    <a:pt x="211033" y="27865"/>
+                  </a:lnTo>
+                  <a:lnTo>
+                    <a:pt x="281377" y="36862"/>
+                  </a:lnTo>
+                  <a:lnTo>
+                    <a:pt x="351722" y="45717"/>
+                  </a:lnTo>
+                  <a:lnTo>
+                    <a:pt x="422066" y="54432"/>
+                  </a:lnTo>
+                  <a:lnTo>
+                    <a:pt x="492411" y="63010"/>
+                  </a:lnTo>
+                  <a:lnTo>
+                    <a:pt x="562755" y="71452"/>
+                  </a:lnTo>
+                  <a:lnTo>
+                    <a:pt x="633100" y="79760"/>
+                  </a:lnTo>
+                  <a:lnTo>
+                    <a:pt x="703444" y="87938"/>
+                  </a:lnTo>
+                  <a:lnTo>
+                    <a:pt x="773789" y="95987"/>
+                  </a:lnTo>
+                  <a:lnTo>
+                    <a:pt x="844133" y="103908"/>
+                  </a:lnTo>
+                  <a:lnTo>
+                    <a:pt x="914478" y="111704"/>
+                  </a:lnTo>
+                  <a:lnTo>
+                    <a:pt x="984822" y="119378"/>
+                  </a:lnTo>
+                  <a:lnTo>
+                    <a:pt x="1055167" y="126930"/>
+                  </a:lnTo>
+                  <a:lnTo>
+                    <a:pt x="1125511" y="134363"/>
+                  </a:lnTo>
+                  <a:lnTo>
+                    <a:pt x="1195856" y="141678"/>
+                  </a:lnTo>
+                  <a:lnTo>
+                    <a:pt x="1266200" y="148878"/>
+                  </a:lnTo>
+                  <a:lnTo>
+                    <a:pt x="1336545" y="155965"/>
+                  </a:lnTo>
+                  <a:lnTo>
+                    <a:pt x="1406889" y="162939"/>
+                  </a:lnTo>
+                  <a:lnTo>
+                    <a:pt x="1477234" y="169804"/>
+                  </a:lnTo>
+                  <a:lnTo>
+                    <a:pt x="1547578" y="176560"/>
+                  </a:lnTo>
+                  <a:lnTo>
+                    <a:pt x="1617923" y="183209"/>
+                  </a:lnTo>
+                  <a:lnTo>
+                    <a:pt x="1688267" y="189753"/>
+                  </a:lnTo>
+                  <a:lnTo>
+                    <a:pt x="1758612" y="196195"/>
+                  </a:lnTo>
+                  <a:lnTo>
+                    <a:pt x="1828956" y="202534"/>
+                  </a:lnTo>
+                  <a:lnTo>
+                    <a:pt x="1899301" y="208773"/>
+                  </a:lnTo>
+                  <a:lnTo>
+                    <a:pt x="1969645" y="214914"/>
+                  </a:lnTo>
+                  <a:lnTo>
+                    <a:pt x="2039990" y="220958"/>
+                  </a:lnTo>
+                  <a:lnTo>
+                    <a:pt x="2110334" y="226906"/>
+                  </a:lnTo>
+                  <a:lnTo>
+                    <a:pt x="2180679" y="232761"/>
+                  </a:lnTo>
+                  <a:lnTo>
+                    <a:pt x="2251023" y="238523"/>
+                  </a:lnTo>
+                  <a:lnTo>
+                    <a:pt x="2321368" y="244194"/>
+                  </a:lnTo>
+                  <a:lnTo>
+                    <a:pt x="2391712" y="249776"/>
+                  </a:lnTo>
+                  <a:lnTo>
+                    <a:pt x="2462057" y="255269"/>
+                  </a:lnTo>
+                  <a:lnTo>
+                    <a:pt x="2532401" y="260676"/>
+                  </a:lnTo>
+                  <a:lnTo>
+                    <a:pt x="2602746" y="265997"/>
+                  </a:lnTo>
+                  <a:lnTo>
+                    <a:pt x="2673090" y="271235"/>
+                  </a:lnTo>
+                  <a:lnTo>
+                    <a:pt x="2743435" y="276390"/>
+                  </a:lnTo>
+                  <a:lnTo>
+                    <a:pt x="2813779" y="281463"/>
+                  </a:lnTo>
+                  <a:lnTo>
+                    <a:pt x="2884124" y="286456"/>
+                  </a:lnTo>
+                  <a:lnTo>
+                    <a:pt x="2954468" y="291371"/>
+                  </a:lnTo>
+                  <a:lnTo>
+                    <a:pt x="3024813" y="296207"/>
+                  </a:lnTo>
+                  <a:lnTo>
+                    <a:pt x="3095157" y="298493"/>
+                  </a:lnTo>
+                  <a:lnTo>
+                    <a:pt x="3165502" y="298651"/>
+                  </a:lnTo>
+                  <a:lnTo>
+                    <a:pt x="3235846" y="298809"/>
+                  </a:lnTo>
+                  <a:lnTo>
+                    <a:pt x="3306191" y="298967"/>
+                  </a:lnTo>
+                  <a:lnTo>
+                    <a:pt x="3376535" y="299124"/>
+                  </a:lnTo>
+                  <a:lnTo>
+                    <a:pt x="3446880" y="299282"/>
+                  </a:lnTo>
+                  <a:lnTo>
+                    <a:pt x="3517224" y="299439"/>
+                  </a:lnTo>
+                  <a:lnTo>
+                    <a:pt x="3587569" y="299597"/>
+                  </a:lnTo>
+                  <a:lnTo>
+                    <a:pt x="3657913" y="299754"/>
+                  </a:lnTo>
+                  <a:lnTo>
+                    <a:pt x="3728257" y="299912"/>
+                  </a:lnTo>
+                  <a:lnTo>
+                    <a:pt x="3798602" y="300069"/>
+                  </a:lnTo>
+                  <a:lnTo>
+                    <a:pt x="3868946" y="300226"/>
+                  </a:lnTo>
+                  <a:lnTo>
+                    <a:pt x="3939291" y="300383"/>
+                  </a:lnTo>
+                  <a:lnTo>
+                    <a:pt x="4009635" y="300540"/>
+                  </a:lnTo>
+                  <a:lnTo>
+                    <a:pt x="4079980" y="300697"/>
+                  </a:lnTo>
+                  <a:lnTo>
+                    <a:pt x="4150324" y="300853"/>
+                  </a:lnTo>
+                  <a:lnTo>
+                    <a:pt x="4220669" y="301010"/>
+                  </a:lnTo>
+                  <a:lnTo>
+                    <a:pt x="4291013" y="301167"/>
+                  </a:lnTo>
+                  <a:lnTo>
+                    <a:pt x="4361358" y="301323"/>
+                  </a:lnTo>
+                  <a:lnTo>
+                    <a:pt x="4431702" y="301480"/>
+                  </a:lnTo>
+                  <a:lnTo>
+                    <a:pt x="4502047" y="301636"/>
+                  </a:lnTo>
+                  <a:lnTo>
+                    <a:pt x="4572391" y="301792"/>
+                  </a:lnTo>
+                  <a:lnTo>
+                    <a:pt x="4642736" y="301949"/>
+                  </a:lnTo>
+                  <a:lnTo>
+                    <a:pt x="4713080" y="302105"/>
+                  </a:lnTo>
+                  <a:lnTo>
+                    <a:pt x="4783425" y="302261"/>
+                  </a:lnTo>
+                  <a:lnTo>
+                    <a:pt x="4853769" y="302417"/>
+                  </a:lnTo>
+                  <a:lnTo>
+                    <a:pt x="4924114" y="302573"/>
+                  </a:lnTo>
+                  <a:lnTo>
+                    <a:pt x="4994458" y="302728"/>
+                  </a:lnTo>
+                  <a:lnTo>
+                    <a:pt x="5064803" y="302884"/>
+                  </a:lnTo>
+                  <a:lnTo>
+                    <a:pt x="5135147" y="303040"/>
+                  </a:lnTo>
+                  <a:lnTo>
+                    <a:pt x="5205492" y="303195"/>
+                  </a:lnTo>
+                  <a:lnTo>
+                    <a:pt x="5275836" y="303351"/>
+                  </a:lnTo>
+                  <a:lnTo>
+                    <a:pt x="5346181" y="303506"/>
+                  </a:lnTo>
+                  <a:lnTo>
+                    <a:pt x="5416525" y="303661"/>
+                  </a:lnTo>
+                  <a:lnTo>
+                    <a:pt x="5486870" y="303817"/>
+                  </a:lnTo>
+                  <a:lnTo>
+                    <a:pt x="5557214" y="303972"/>
+                  </a:lnTo>
+                  <a:lnTo>
+                    <a:pt x="5627559" y="304127"/>
+                  </a:lnTo>
+                  <a:lnTo>
+                    <a:pt x="5697903" y="304282"/>
+                  </a:lnTo>
+                  <a:lnTo>
+                    <a:pt x="5768248" y="304437"/>
+                  </a:lnTo>
+                  <a:lnTo>
+                    <a:pt x="5838592" y="304592"/>
+                  </a:lnTo>
+                  <a:lnTo>
+                    <a:pt x="5908937" y="304746"/>
+                  </a:lnTo>
+                  <a:lnTo>
+                    <a:pt x="5979281" y="304901"/>
+                  </a:lnTo>
+                  <a:lnTo>
+                    <a:pt x="6049626" y="305055"/>
+                  </a:lnTo>
+                  <a:lnTo>
+                    <a:pt x="6119970" y="305210"/>
+                  </a:lnTo>
+                  <a:lnTo>
+                    <a:pt x="6190315" y="305364"/>
+                  </a:lnTo>
+                  <a:lnTo>
+                    <a:pt x="6260659" y="305519"/>
+                  </a:lnTo>
+                  <a:lnTo>
+                    <a:pt x="6331004" y="305673"/>
+                  </a:lnTo>
+                  <a:lnTo>
+                    <a:pt x="6401348" y="305827"/>
+                  </a:lnTo>
+                  <a:lnTo>
+                    <a:pt x="6471693" y="305981"/>
+                  </a:lnTo>
+                  <a:lnTo>
+                    <a:pt x="6542037" y="306135"/>
+                  </a:lnTo>
+                  <a:lnTo>
+                    <a:pt x="6612382" y="306289"/>
+                  </a:lnTo>
+                  <a:lnTo>
+                    <a:pt x="6682726" y="306443"/>
+                  </a:lnTo>
+                  <a:lnTo>
+                    <a:pt x="6753071" y="306597"/>
+                  </a:lnTo>
+                  <a:lnTo>
+                    <a:pt x="6823415" y="306750"/>
+                  </a:lnTo>
+                  <a:lnTo>
+                    <a:pt x="6893760" y="306904"/>
+                  </a:lnTo>
+                  <a:lnTo>
+                    <a:pt x="6964104" y="307057"/>
+                  </a:lnTo>
+                  <a:lnTo>
+                    <a:pt x="6964104" y="474057"/>
+                  </a:lnTo>
+                  <a:lnTo>
+                    <a:pt x="6893760" y="472073"/>
+                  </a:lnTo>
+                  <a:lnTo>
+                    <a:pt x="6823415" y="470057"/>
+                  </a:lnTo>
+                  <a:lnTo>
+                    <a:pt x="6753071" y="468009"/>
+                  </a:lnTo>
+                  <a:lnTo>
+                    <a:pt x="6682726" y="465928"/>
+                  </a:lnTo>
+                  <a:lnTo>
+                    <a:pt x="6612382" y="463814"/>
+                  </a:lnTo>
+                  <a:lnTo>
+                    <a:pt x="6542037" y="461666"/>
+                  </a:lnTo>
+                  <a:lnTo>
+                    <a:pt x="6471693" y="459483"/>
+                  </a:lnTo>
+                  <a:lnTo>
+                    <a:pt x="6401348" y="457265"/>
+                  </a:lnTo>
+                  <a:lnTo>
+                    <a:pt x="6331004" y="455012"/>
+                  </a:lnTo>
+                  <a:lnTo>
+                    <a:pt x="6260659" y="452722"/>
+                  </a:lnTo>
+                  <a:lnTo>
+                    <a:pt x="6190315" y="450396"/>
+                  </a:lnTo>
+                  <a:lnTo>
+                    <a:pt x="6119970" y="448032"/>
+                  </a:lnTo>
+                  <a:lnTo>
+                    <a:pt x="6049626" y="445631"/>
+                  </a:lnTo>
+                  <a:lnTo>
+                    <a:pt x="5979281" y="443191"/>
+                  </a:lnTo>
+                  <a:lnTo>
+                    <a:pt x="5908937" y="440712"/>
+                  </a:lnTo>
+                  <a:lnTo>
+                    <a:pt x="5838592" y="438193"/>
+                  </a:lnTo>
+                  <a:lnTo>
+                    <a:pt x="5768248" y="435634"/>
+                  </a:lnTo>
+                  <a:lnTo>
+                    <a:pt x="5697903" y="433034"/>
+                  </a:lnTo>
+                  <a:lnTo>
+                    <a:pt x="5627559" y="430391"/>
+                  </a:lnTo>
+                  <a:lnTo>
+                    <a:pt x="5557214" y="427707"/>
+                  </a:lnTo>
+                  <a:lnTo>
+                    <a:pt x="5486870" y="424980"/>
+                  </a:lnTo>
+                  <a:lnTo>
+                    <a:pt x="5416525" y="422208"/>
+                  </a:lnTo>
+                  <a:lnTo>
+                    <a:pt x="5346181" y="419393"/>
+                  </a:lnTo>
+                  <a:lnTo>
+                    <a:pt x="5275836" y="416532"/>
+                  </a:lnTo>
+                  <a:lnTo>
+                    <a:pt x="5205492" y="413625"/>
+                  </a:lnTo>
+                  <a:lnTo>
+                    <a:pt x="5135147" y="410672"/>
+                  </a:lnTo>
+                  <a:lnTo>
+                    <a:pt x="5064803" y="407671"/>
+                  </a:lnTo>
+                  <a:lnTo>
+                    <a:pt x="4994458" y="404622"/>
+                  </a:lnTo>
+                  <a:lnTo>
+                    <a:pt x="4924114" y="401524"/>
+                  </a:lnTo>
+                  <a:lnTo>
+                    <a:pt x="4853769" y="398377"/>
+                  </a:lnTo>
+                  <a:lnTo>
+                    <a:pt x="4783425" y="395179"/>
+                  </a:lnTo>
+                  <a:lnTo>
+                    <a:pt x="4713080" y="391930"/>
+                  </a:lnTo>
+                  <a:lnTo>
+                    <a:pt x="4642736" y="388628"/>
+                  </a:lnTo>
+                  <a:lnTo>
+                    <a:pt x="4572391" y="385274"/>
+                  </a:lnTo>
+                  <a:lnTo>
+                    <a:pt x="4502047" y="381866"/>
+                  </a:lnTo>
+                  <a:lnTo>
+                    <a:pt x="4431702" y="378403"/>
+                  </a:lnTo>
+                  <a:lnTo>
+                    <a:pt x="4361358" y="374885"/>
+                  </a:lnTo>
+                  <a:lnTo>
+                    <a:pt x="4291013" y="371310"/>
+                  </a:lnTo>
+                  <a:lnTo>
+                    <a:pt x="4220669" y="367678"/>
+                  </a:lnTo>
+                  <a:lnTo>
+                    <a:pt x="4150324" y="363988"/>
+                  </a:lnTo>
+                  <a:lnTo>
+                    <a:pt x="4079980" y="360238"/>
+                  </a:lnTo>
+                  <a:lnTo>
+                    <a:pt x="4009635" y="356428"/>
+                  </a:lnTo>
+                  <a:lnTo>
+                    <a:pt x="3939291" y="352557"/>
+                  </a:lnTo>
+                  <a:lnTo>
+                    <a:pt x="3868946" y="348625"/>
+                  </a:lnTo>
+                  <a:lnTo>
+                    <a:pt x="3798602" y="344629"/>
+                  </a:lnTo>
+                  <a:lnTo>
+                    <a:pt x="3728257" y="340568"/>
+                  </a:lnTo>
+                  <a:lnTo>
+                    <a:pt x="3657913" y="336443"/>
+                  </a:lnTo>
+                  <a:lnTo>
+                    <a:pt x="3587569" y="332252"/>
+                  </a:lnTo>
+                  <a:lnTo>
+                    <a:pt x="3517224" y="327993"/>
+                  </a:lnTo>
+                  <a:lnTo>
+                    <a:pt x="3446880" y="323666"/>
+                  </a:lnTo>
+                  <a:lnTo>
+                    <a:pt x="3376535" y="319270"/>
+                  </a:lnTo>
+                  <a:lnTo>
+                    <a:pt x="3306191" y="314803"/>
+                  </a:lnTo>
+                  <a:lnTo>
+                    <a:pt x="3235846" y="310264"/>
+                  </a:lnTo>
+                  <a:lnTo>
+                    <a:pt x="3165502" y="305653"/>
+                  </a:lnTo>
+                  <a:lnTo>
+                    <a:pt x="3095157" y="300968"/>
+                  </a:lnTo>
+                  <a:lnTo>
+                    <a:pt x="3024813" y="298335"/>
+                  </a:lnTo>
+                  <a:lnTo>
+                    <a:pt x="2954468" y="298177"/>
+                  </a:lnTo>
+                  <a:lnTo>
+                    <a:pt x="2884124" y="298019"/>
+                  </a:lnTo>
+                  <a:lnTo>
+                    <a:pt x="2813779" y="297860"/>
+                  </a:lnTo>
+                  <a:lnTo>
+                    <a:pt x="2743435" y="297702"/>
+                  </a:lnTo>
+                  <a:lnTo>
+                    <a:pt x="2673090" y="297544"/>
+                  </a:lnTo>
+                  <a:lnTo>
+                    <a:pt x="2602746" y="297385"/>
+                  </a:lnTo>
+                  <a:lnTo>
+                    <a:pt x="2532401" y="297226"/>
+                  </a:lnTo>
+                  <a:lnTo>
+                    <a:pt x="2462057" y="297068"/>
+                  </a:lnTo>
+                  <a:lnTo>
+                    <a:pt x="2391712" y="296909"/>
+                  </a:lnTo>
+                  <a:lnTo>
+                    <a:pt x="2321368" y="296750"/>
+                  </a:lnTo>
+                  <a:lnTo>
+                    <a:pt x="2251023" y="296591"/>
+                  </a:lnTo>
+                  <a:lnTo>
+                    <a:pt x="2180679" y="296432"/>
+                  </a:lnTo>
+                  <a:lnTo>
+                    <a:pt x="2110334" y="296273"/>
+                  </a:lnTo>
+                  <a:lnTo>
+                    <a:pt x="2039990" y="296114"/>
+                  </a:lnTo>
+                  <a:lnTo>
+                    <a:pt x="1969645" y="295955"/>
+                  </a:lnTo>
+                  <a:lnTo>
+                    <a:pt x="1899301" y="295795"/>
+                  </a:lnTo>
+                  <a:lnTo>
+                    <a:pt x="1828956" y="295636"/>
+                  </a:lnTo>
+                  <a:lnTo>
+                    <a:pt x="1758612" y="295476"/>
+                  </a:lnTo>
+                  <a:lnTo>
+                    <a:pt x="1688267" y="295317"/>
+                  </a:lnTo>
+                  <a:lnTo>
+                    <a:pt x="1617923" y="295157"/>
+                  </a:lnTo>
+                  <a:lnTo>
+                    <a:pt x="1547578" y="294997"/>
+                  </a:lnTo>
+                  <a:lnTo>
+                    <a:pt x="1477234" y="294837"/>
+                  </a:lnTo>
+                  <a:lnTo>
+                    <a:pt x="1406889" y="294677"/>
+                  </a:lnTo>
+                  <a:lnTo>
+                    <a:pt x="1336545" y="294517"/>
+                  </a:lnTo>
+                  <a:lnTo>
+                    <a:pt x="1266200" y="294357"/>
+                  </a:lnTo>
+                  <a:lnTo>
+                    <a:pt x="1195856" y="294197"/>
+                  </a:lnTo>
+                  <a:lnTo>
+                    <a:pt x="1125511" y="294037"/>
+                  </a:lnTo>
+                  <a:lnTo>
+                    <a:pt x="1055167" y="293876"/>
+                  </a:lnTo>
+                  <a:lnTo>
+                    <a:pt x="984822" y="293716"/>
+                  </a:lnTo>
+                  <a:lnTo>
+                    <a:pt x="914478" y="293555"/>
+                  </a:lnTo>
+                  <a:lnTo>
+                    <a:pt x="844133" y="293394"/>
+                  </a:lnTo>
+                  <a:lnTo>
+                    <a:pt x="773789" y="293234"/>
+                  </a:lnTo>
+                  <a:lnTo>
+                    <a:pt x="703444" y="293073"/>
+                  </a:lnTo>
+                  <a:lnTo>
+                    <a:pt x="633100" y="292912"/>
+                  </a:lnTo>
+                  <a:lnTo>
+                    <a:pt x="562755" y="292751"/>
+                  </a:lnTo>
+                  <a:lnTo>
+                    <a:pt x="492411" y="292590"/>
+                  </a:lnTo>
+                  <a:lnTo>
+                    <a:pt x="422066" y="292429"/>
+                  </a:lnTo>
+                  <a:lnTo>
+                    <a:pt x="351722" y="292268"/>
+                  </a:lnTo>
+                  <a:lnTo>
+                    <a:pt x="281377" y="292106"/>
+                  </a:lnTo>
+                  <a:lnTo>
+                    <a:pt x="211033" y="291945"/>
+                  </a:lnTo>
+                  <a:lnTo>
+                    <a:pt x="140688" y="291783"/>
+                  </a:lnTo>
+                  <a:lnTo>
+                    <a:pt x="70344" y="291622"/>
+                  </a:lnTo>
+                  <a:lnTo>
+                    <a:pt x="0" y="291460"/>
                   </a:lnTo>
                   <a:close/>
                 </a:path>
@@ -3670,643 +3705,318 @@
         </p:sp>
         <p:sp>
           <p:nvSpPr>
-            <p:cNvPr id="23" name="pl23"/>
-            <p:cNvSpPr/>
-            <p:nvPr/>
-          </p:nvSpPr>
-          <p:spPr>
-            <a:xfrm>
-              <a:off x="1172049" y="3900887"/>
-              <a:ext cx="7090630" cy="850866"/>
-            </a:xfrm>
-            <a:custGeom>
-              <a:avLst/>
-              <a:pathLst>
-                <a:path w="7090630" h="850866">
-                  <a:moveTo>
-                    <a:pt x="0" y="0"/>
-                  </a:moveTo>
-                  <a:lnTo>
-                    <a:pt x="71622" y="26149"/>
-                  </a:lnTo>
-                  <a:lnTo>
-                    <a:pt x="143245" y="51886"/>
-                  </a:lnTo>
-                  <a:lnTo>
-                    <a:pt x="214867" y="77217"/>
-                  </a:lnTo>
-                  <a:lnTo>
-                    <a:pt x="286490" y="102147"/>
-                  </a:lnTo>
-                  <a:lnTo>
-                    <a:pt x="358112" y="126684"/>
-                  </a:lnTo>
-                  <a:lnTo>
-                    <a:pt x="429735" y="150834"/>
-                  </a:lnTo>
-                  <a:lnTo>
-                    <a:pt x="501357" y="174602"/>
-                  </a:lnTo>
-                  <a:lnTo>
-                    <a:pt x="572980" y="197996"/>
-                  </a:lnTo>
-                  <a:lnTo>
-                    <a:pt x="644602" y="221020"/>
-                  </a:lnTo>
-                  <a:lnTo>
-                    <a:pt x="716225" y="243680"/>
-                  </a:lnTo>
-                  <a:lnTo>
-                    <a:pt x="787847" y="265983"/>
-                  </a:lnTo>
-                  <a:lnTo>
-                    <a:pt x="859470" y="287933"/>
-                  </a:lnTo>
-                  <a:lnTo>
-                    <a:pt x="931092" y="309537"/>
-                  </a:lnTo>
-                  <a:lnTo>
-                    <a:pt x="1002715" y="330800"/>
-                  </a:lnTo>
-                  <a:lnTo>
-                    <a:pt x="1074337" y="351727"/>
-                  </a:lnTo>
-                  <a:lnTo>
-                    <a:pt x="1145960" y="372324"/>
-                  </a:lnTo>
-                  <a:lnTo>
-                    <a:pt x="1217582" y="392596"/>
-                  </a:lnTo>
-                  <a:lnTo>
-                    <a:pt x="1289205" y="412547"/>
-                  </a:lnTo>
-                  <a:lnTo>
-                    <a:pt x="1360827" y="432184"/>
-                  </a:lnTo>
-                  <a:lnTo>
-                    <a:pt x="1432450" y="451511"/>
-                  </a:lnTo>
-                  <a:lnTo>
-                    <a:pt x="1504073" y="470532"/>
-                  </a:lnTo>
-                  <a:lnTo>
-                    <a:pt x="1575695" y="489253"/>
-                  </a:lnTo>
-                  <a:lnTo>
-                    <a:pt x="1647318" y="507679"/>
-                  </a:lnTo>
-                  <a:lnTo>
-                    <a:pt x="1718940" y="525814"/>
-                  </a:lnTo>
-                  <a:lnTo>
-                    <a:pt x="1790563" y="543662"/>
-                  </a:lnTo>
-                  <a:lnTo>
-                    <a:pt x="1862185" y="561229"/>
-                  </a:lnTo>
-                  <a:lnTo>
-                    <a:pt x="1933808" y="578518"/>
-                  </a:lnTo>
-                  <a:lnTo>
-                    <a:pt x="2005430" y="595535"/>
-                  </a:lnTo>
-                  <a:lnTo>
-                    <a:pt x="2077053" y="612282"/>
-                  </a:lnTo>
-                  <a:lnTo>
-                    <a:pt x="2148675" y="628766"/>
-                  </a:lnTo>
-                  <a:lnTo>
-                    <a:pt x="2220298" y="644989"/>
-                  </a:lnTo>
-                  <a:lnTo>
-                    <a:pt x="2291920" y="660956"/>
-                  </a:lnTo>
-                  <a:lnTo>
-                    <a:pt x="2363543" y="676671"/>
-                  </a:lnTo>
-                  <a:lnTo>
-                    <a:pt x="2435165" y="692138"/>
-                  </a:lnTo>
-                  <a:lnTo>
-                    <a:pt x="2506788" y="707360"/>
-                  </a:lnTo>
-                  <a:lnTo>
-                    <a:pt x="2578410" y="722342"/>
-                  </a:lnTo>
-                  <a:lnTo>
-                    <a:pt x="2650033" y="737088"/>
-                  </a:lnTo>
-                  <a:lnTo>
-                    <a:pt x="2721655" y="751601"/>
-                  </a:lnTo>
-                  <a:lnTo>
-                    <a:pt x="2793278" y="765885"/>
-                  </a:lnTo>
-                  <a:lnTo>
-                    <a:pt x="2864901" y="779943"/>
-                  </a:lnTo>
-                  <a:lnTo>
-                    <a:pt x="2936523" y="793780"/>
-                  </a:lnTo>
-                  <a:lnTo>
-                    <a:pt x="3008146" y="807398"/>
-                  </a:lnTo>
-                  <a:lnTo>
-                    <a:pt x="3079768" y="820801"/>
-                  </a:lnTo>
-                  <a:lnTo>
-                    <a:pt x="3151391" y="827134"/>
-                  </a:lnTo>
-                  <a:lnTo>
-                    <a:pt x="3223013" y="827572"/>
-                  </a:lnTo>
-                  <a:lnTo>
-                    <a:pt x="3294636" y="828009"/>
-                  </a:lnTo>
-                  <a:lnTo>
-                    <a:pt x="3366258" y="828447"/>
-                  </a:lnTo>
-                  <a:lnTo>
-                    <a:pt x="3437881" y="828884"/>
-                  </a:lnTo>
-                  <a:lnTo>
-                    <a:pt x="3509503" y="829320"/>
-                  </a:lnTo>
-                  <a:lnTo>
-                    <a:pt x="3581126" y="829757"/>
-                  </a:lnTo>
-                  <a:lnTo>
-                    <a:pt x="3652748" y="830193"/>
-                  </a:lnTo>
-                  <a:lnTo>
-                    <a:pt x="3724371" y="830629"/>
-                  </a:lnTo>
-                  <a:lnTo>
-                    <a:pt x="3795993" y="831065"/>
-                  </a:lnTo>
-                  <a:lnTo>
-                    <a:pt x="3867616" y="831501"/>
-                  </a:lnTo>
-                  <a:lnTo>
-                    <a:pt x="3939238" y="831936"/>
-                  </a:lnTo>
-                  <a:lnTo>
-                    <a:pt x="4010861" y="832371"/>
-                  </a:lnTo>
-                  <a:lnTo>
-                    <a:pt x="4082483" y="832806"/>
-                  </a:lnTo>
-                  <a:lnTo>
-                    <a:pt x="4154106" y="833241"/>
-                  </a:lnTo>
-                  <a:lnTo>
-                    <a:pt x="4225729" y="833675"/>
-                  </a:lnTo>
-                  <a:lnTo>
-                    <a:pt x="4297351" y="834109"/>
-                  </a:lnTo>
-                  <a:lnTo>
-                    <a:pt x="4368974" y="834543"/>
-                  </a:lnTo>
-                  <a:lnTo>
-                    <a:pt x="4440596" y="834977"/>
-                  </a:lnTo>
-                  <a:lnTo>
-                    <a:pt x="4512219" y="835411"/>
-                  </a:lnTo>
-                  <a:lnTo>
-                    <a:pt x="4583841" y="835844"/>
-                  </a:lnTo>
-                  <a:lnTo>
-                    <a:pt x="4655464" y="836277"/>
-                  </a:lnTo>
-                  <a:lnTo>
-                    <a:pt x="4727086" y="836710"/>
-                  </a:lnTo>
-                  <a:lnTo>
-                    <a:pt x="4798709" y="837143"/>
-                  </a:lnTo>
-                  <a:lnTo>
-                    <a:pt x="4870331" y="837575"/>
-                  </a:lnTo>
-                  <a:lnTo>
-                    <a:pt x="4941954" y="838007"/>
-                  </a:lnTo>
-                  <a:lnTo>
-                    <a:pt x="5013576" y="838439"/>
-                  </a:lnTo>
-                  <a:lnTo>
-                    <a:pt x="5085199" y="838871"/>
-                  </a:lnTo>
-                  <a:lnTo>
-                    <a:pt x="5156821" y="839302"/>
-                  </a:lnTo>
-                  <a:lnTo>
-                    <a:pt x="5228444" y="839734"/>
-                  </a:lnTo>
-                  <a:lnTo>
-                    <a:pt x="5300066" y="840165"/>
-                  </a:lnTo>
-                  <a:lnTo>
-                    <a:pt x="5371689" y="840595"/>
-                  </a:lnTo>
-                  <a:lnTo>
-                    <a:pt x="5443311" y="841026"/>
-                  </a:lnTo>
-                  <a:lnTo>
-                    <a:pt x="5514934" y="841456"/>
-                  </a:lnTo>
-                  <a:lnTo>
-                    <a:pt x="5586557" y="841886"/>
-                  </a:lnTo>
-                  <a:lnTo>
-                    <a:pt x="5658179" y="842316"/>
-                  </a:lnTo>
-                  <a:lnTo>
-                    <a:pt x="5729802" y="842746"/>
-                  </a:lnTo>
-                  <a:lnTo>
-                    <a:pt x="5801424" y="843175"/>
-                  </a:lnTo>
-                  <a:lnTo>
-                    <a:pt x="5873047" y="843605"/>
-                  </a:lnTo>
-                  <a:lnTo>
-                    <a:pt x="5944669" y="844034"/>
-                  </a:lnTo>
-                  <a:lnTo>
-                    <a:pt x="6016292" y="844462"/>
-                  </a:lnTo>
-                  <a:lnTo>
-                    <a:pt x="6087914" y="844891"/>
-                  </a:lnTo>
-                  <a:lnTo>
-                    <a:pt x="6159537" y="845319"/>
-                  </a:lnTo>
-                  <a:lnTo>
-                    <a:pt x="6231159" y="845747"/>
-                  </a:lnTo>
-                  <a:lnTo>
-                    <a:pt x="6302782" y="846175"/>
-                  </a:lnTo>
-                  <a:lnTo>
-                    <a:pt x="6374404" y="846603"/>
-                  </a:lnTo>
-                  <a:lnTo>
-                    <a:pt x="6446027" y="847030"/>
-                  </a:lnTo>
-                  <a:lnTo>
-                    <a:pt x="6517649" y="847457"/>
-                  </a:lnTo>
-                  <a:lnTo>
-                    <a:pt x="6589272" y="847884"/>
-                  </a:lnTo>
-                  <a:lnTo>
-                    <a:pt x="6660894" y="848311"/>
-                  </a:lnTo>
-                  <a:lnTo>
-                    <a:pt x="6732517" y="848737"/>
-                  </a:lnTo>
-                  <a:lnTo>
-                    <a:pt x="6804139" y="849164"/>
-                  </a:lnTo>
-                  <a:lnTo>
-                    <a:pt x="6875762" y="849590"/>
-                  </a:lnTo>
-                  <a:lnTo>
-                    <a:pt x="6947385" y="850016"/>
-                  </a:lnTo>
-                  <a:lnTo>
-                    <a:pt x="7019007" y="850441"/>
-                  </a:lnTo>
-                  <a:lnTo>
-                    <a:pt x="7090630" y="850866"/>
-                  </a:lnTo>
-                </a:path>
-              </a:pathLst>
-            </a:custGeom>
-          </p:spPr>
-          <p:txBody>
-            <a:bodyPr/>
-            <a:lstStyle/>
-            <a:p/>
-          </p:txBody>
-        </p:sp>
-        <p:sp>
-          <p:nvSpPr>
             <p:cNvPr id="24" name="pl24"/>
             <p:cNvSpPr/>
             <p:nvPr/>
           </p:nvSpPr>
           <p:spPr>
             <a:xfrm>
-              <a:off x="1172049" y="4708534"/>
-              <a:ext cx="7090630" cy="505981"/>
+              <a:off x="1235312" y="2802552"/>
+              <a:ext cx="6964104" cy="307057"/>
             </a:xfrm>
             <a:custGeom>
               <a:avLst/>
               <a:pathLst>
-                <a:path w="7090630" h="505981">
+                <a:path w="6964104" h="307057">
                   <a:moveTo>
-                    <a:pt x="7090630" y="505981"/>
+                    <a:pt x="0" y="0"/>
                   </a:moveTo>
                   <a:lnTo>
-                    <a:pt x="7019007" y="500484"/>
-                  </a:lnTo>
-                  <a:lnTo>
-                    <a:pt x="6947385" y="494898"/>
-                  </a:lnTo>
-                  <a:lnTo>
-                    <a:pt x="6875762" y="489222"/>
-                  </a:lnTo>
-                  <a:lnTo>
-                    <a:pt x="6804139" y="483456"/>
-                  </a:lnTo>
-                  <a:lnTo>
-                    <a:pt x="6732517" y="477597"/>
-                  </a:lnTo>
-                  <a:lnTo>
-                    <a:pt x="6660894" y="471644"/>
-                  </a:lnTo>
-                  <a:lnTo>
-                    <a:pt x="6589272" y="465595"/>
-                  </a:lnTo>
-                  <a:lnTo>
-                    <a:pt x="6517649" y="459450"/>
-                  </a:lnTo>
-                  <a:lnTo>
-                    <a:pt x="6446027" y="453206"/>
-                  </a:lnTo>
-                  <a:lnTo>
-                    <a:pt x="6374404" y="446861"/>
-                  </a:lnTo>
-                  <a:lnTo>
-                    <a:pt x="6302782" y="440415"/>
-                  </a:lnTo>
-                  <a:lnTo>
-                    <a:pt x="6231159" y="433866"/>
-                  </a:lnTo>
-                  <a:lnTo>
-                    <a:pt x="6159537" y="427212"/>
-                  </a:lnTo>
-                  <a:lnTo>
-                    <a:pt x="6087914" y="420450"/>
-                  </a:lnTo>
-                  <a:lnTo>
-                    <a:pt x="6016292" y="413581"/>
-                  </a:lnTo>
-                  <a:lnTo>
-                    <a:pt x="5944669" y="406601"/>
-                  </a:lnTo>
-                  <a:lnTo>
-                    <a:pt x="5873047" y="399509"/>
-                  </a:lnTo>
-                  <a:lnTo>
-                    <a:pt x="5801424" y="392304"/>
-                  </a:lnTo>
-                  <a:lnTo>
-                    <a:pt x="5729802" y="384982"/>
-                  </a:lnTo>
-                  <a:lnTo>
-                    <a:pt x="5658179" y="377544"/>
-                  </a:lnTo>
-                  <a:lnTo>
-                    <a:pt x="5586557" y="369986"/>
-                  </a:lnTo>
-                  <a:lnTo>
-                    <a:pt x="5514934" y="362307"/>
-                  </a:lnTo>
-                  <a:lnTo>
-                    <a:pt x="5443311" y="354504"/>
-                  </a:lnTo>
-                  <a:lnTo>
-                    <a:pt x="5371689" y="346577"/>
-                  </a:lnTo>
-                  <a:lnTo>
-                    <a:pt x="5300066" y="338522"/>
-                  </a:lnTo>
-                  <a:lnTo>
-                    <a:pt x="5228444" y="330339"/>
-                  </a:lnTo>
-                  <a:lnTo>
-                    <a:pt x="5156821" y="322023"/>
-                  </a:lnTo>
-                  <a:lnTo>
-                    <a:pt x="5085199" y="313575"/>
-                  </a:lnTo>
-                  <a:lnTo>
-                    <a:pt x="5013576" y="304991"/>
-                  </a:lnTo>
-                  <a:lnTo>
-                    <a:pt x="4941954" y="296269"/>
-                  </a:lnTo>
-                  <a:lnTo>
-                    <a:pt x="4870331" y="287408"/>
-                  </a:lnTo>
-                  <a:lnTo>
-                    <a:pt x="4798709" y="278404"/>
-                  </a:lnTo>
-                  <a:lnTo>
-                    <a:pt x="4727086" y="269256"/>
-                  </a:lnTo>
-                  <a:lnTo>
-                    <a:pt x="4655464" y="259961"/>
-                  </a:lnTo>
-                  <a:lnTo>
-                    <a:pt x="4583841" y="250517"/>
-                  </a:lnTo>
-                  <a:lnTo>
-                    <a:pt x="4512219" y="240921"/>
-                  </a:lnTo>
-                  <a:lnTo>
-                    <a:pt x="4440596" y="231172"/>
-                  </a:lnTo>
-                  <a:lnTo>
-                    <a:pt x="4368974" y="221266"/>
-                  </a:lnTo>
-                  <a:lnTo>
-                    <a:pt x="4297351" y="211201"/>
-                  </a:lnTo>
-                  <a:lnTo>
-                    <a:pt x="4225729" y="200975"/>
-                  </a:lnTo>
-                  <a:lnTo>
-                    <a:pt x="4154106" y="190585"/>
-                  </a:lnTo>
-                  <a:lnTo>
-                    <a:pt x="4082483" y="180028"/>
-                  </a:lnTo>
-                  <a:lnTo>
-                    <a:pt x="4010861" y="169302"/>
-                  </a:lnTo>
-                  <a:lnTo>
-                    <a:pt x="3939238" y="158404"/>
-                  </a:lnTo>
-                  <a:lnTo>
-                    <a:pt x="3867616" y="147331"/>
-                  </a:lnTo>
-                  <a:lnTo>
-                    <a:pt x="3795993" y="136080"/>
-                  </a:lnTo>
-                  <a:lnTo>
-                    <a:pt x="3724371" y="124649"/>
-                  </a:lnTo>
-                  <a:lnTo>
-                    <a:pt x="3652748" y="113034"/>
-                  </a:lnTo>
-                  <a:lnTo>
-                    <a:pt x="3581126" y="101233"/>
-                  </a:lnTo>
-                  <a:lnTo>
-                    <a:pt x="3509503" y="89243"/>
-                  </a:lnTo>
-                  <a:lnTo>
-                    <a:pt x="3437881" y="77061"/>
-                  </a:lnTo>
-                  <a:lnTo>
-                    <a:pt x="3366258" y="64683"/>
-                  </a:lnTo>
-                  <a:lnTo>
-                    <a:pt x="3294636" y="52107"/>
-                  </a:lnTo>
-                  <a:lnTo>
-                    <a:pt x="3223013" y="39328"/>
-                  </a:lnTo>
-                  <a:lnTo>
-                    <a:pt x="3151391" y="26345"/>
-                  </a:lnTo>
-                  <a:lnTo>
-                    <a:pt x="3079768" y="19050"/>
-                  </a:lnTo>
-                  <a:lnTo>
-                    <a:pt x="3008146" y="18612"/>
-                  </a:lnTo>
-                  <a:lnTo>
-                    <a:pt x="2936523" y="18173"/>
-                  </a:lnTo>
-                  <a:lnTo>
-                    <a:pt x="2864901" y="17735"/>
-                  </a:lnTo>
-                  <a:lnTo>
-                    <a:pt x="2793278" y="17296"/>
-                  </a:lnTo>
-                  <a:lnTo>
-                    <a:pt x="2721655" y="16857"/>
-                  </a:lnTo>
-                  <a:lnTo>
-                    <a:pt x="2650033" y="16417"/>
-                  </a:lnTo>
-                  <a:lnTo>
-                    <a:pt x="2578410" y="15978"/>
-                  </a:lnTo>
-                  <a:lnTo>
-                    <a:pt x="2506788" y="15538"/>
-                  </a:lnTo>
-                  <a:lnTo>
-                    <a:pt x="2435165" y="15098"/>
-                  </a:lnTo>
-                  <a:lnTo>
-                    <a:pt x="2363543" y="14658"/>
-                  </a:lnTo>
-                  <a:lnTo>
-                    <a:pt x="2291920" y="14218"/>
-                  </a:lnTo>
-                  <a:lnTo>
-                    <a:pt x="2220298" y="13777"/>
-                  </a:lnTo>
-                  <a:lnTo>
-                    <a:pt x="2148675" y="13336"/>
-                  </a:lnTo>
-                  <a:lnTo>
-                    <a:pt x="2077053" y="12895"/>
-                  </a:lnTo>
-                  <a:lnTo>
-                    <a:pt x="2005430" y="12453"/>
-                  </a:lnTo>
-                  <a:lnTo>
-                    <a:pt x="1933808" y="12012"/>
-                  </a:lnTo>
-                  <a:lnTo>
-                    <a:pt x="1862185" y="11570"/>
-                  </a:lnTo>
-                  <a:lnTo>
-                    <a:pt x="1790563" y="11128"/>
-                  </a:lnTo>
-                  <a:lnTo>
-                    <a:pt x="1718940" y="10685"/>
-                  </a:lnTo>
-                  <a:lnTo>
-                    <a:pt x="1647318" y="10243"/>
-                  </a:lnTo>
-                  <a:lnTo>
-                    <a:pt x="1575695" y="9800"/>
-                  </a:lnTo>
-                  <a:lnTo>
-                    <a:pt x="1504073" y="9357"/>
-                  </a:lnTo>
-                  <a:lnTo>
-                    <a:pt x="1432450" y="8914"/>
-                  </a:lnTo>
-                  <a:lnTo>
-                    <a:pt x="1360827" y="8470"/>
-                  </a:lnTo>
-                  <a:lnTo>
-                    <a:pt x="1289205" y="8027"/>
-                  </a:lnTo>
-                  <a:lnTo>
-                    <a:pt x="1217582" y="7583"/>
-                  </a:lnTo>
-                  <a:lnTo>
-                    <a:pt x="1145960" y="7139"/>
-                  </a:lnTo>
-                  <a:lnTo>
-                    <a:pt x="1074337" y="6694"/>
-                  </a:lnTo>
-                  <a:lnTo>
-                    <a:pt x="1002715" y="6249"/>
-                  </a:lnTo>
-                  <a:lnTo>
-                    <a:pt x="931092" y="5805"/>
-                  </a:lnTo>
-                  <a:lnTo>
-                    <a:pt x="859470" y="5359"/>
-                  </a:lnTo>
-                  <a:lnTo>
-                    <a:pt x="787847" y="4914"/>
-                  </a:lnTo>
-                  <a:lnTo>
-                    <a:pt x="716225" y="4468"/>
-                  </a:lnTo>
-                  <a:lnTo>
-                    <a:pt x="644602" y="4023"/>
-                  </a:lnTo>
-                  <a:lnTo>
-                    <a:pt x="572980" y="3577"/>
-                  </a:lnTo>
-                  <a:lnTo>
-                    <a:pt x="501357" y="3130"/>
-                  </a:lnTo>
-                  <a:lnTo>
-                    <a:pt x="429735" y="2684"/>
-                  </a:lnTo>
-                  <a:lnTo>
-                    <a:pt x="358112" y="2237"/>
-                  </a:lnTo>
-                  <a:lnTo>
-                    <a:pt x="286490" y="1790"/>
-                  </a:lnTo>
-                  <a:lnTo>
-                    <a:pt x="214867" y="1343"/>
-                  </a:lnTo>
-                  <a:lnTo>
-                    <a:pt x="143245" y="895"/>
-                  </a:lnTo>
-                  <a:lnTo>
-                    <a:pt x="71622" y="447"/>
-                  </a:lnTo>
-                  <a:lnTo>
-                    <a:pt x="0" y="0"/>
+                    <a:pt x="70344" y="9436"/>
+                  </a:lnTo>
+                  <a:lnTo>
+                    <a:pt x="140688" y="18724"/>
+                  </a:lnTo>
+                  <a:lnTo>
+                    <a:pt x="211033" y="27865"/>
+                  </a:lnTo>
+                  <a:lnTo>
+                    <a:pt x="281377" y="36862"/>
+                  </a:lnTo>
+                  <a:lnTo>
+                    <a:pt x="351722" y="45717"/>
+                  </a:lnTo>
+                  <a:lnTo>
+                    <a:pt x="422066" y="54432"/>
+                  </a:lnTo>
+                  <a:lnTo>
+                    <a:pt x="492411" y="63010"/>
+                  </a:lnTo>
+                  <a:lnTo>
+                    <a:pt x="562755" y="71452"/>
+                  </a:lnTo>
+                  <a:lnTo>
+                    <a:pt x="633100" y="79760"/>
+                  </a:lnTo>
+                  <a:lnTo>
+                    <a:pt x="703444" y="87938"/>
+                  </a:lnTo>
+                  <a:lnTo>
+                    <a:pt x="773789" y="95987"/>
+                  </a:lnTo>
+                  <a:lnTo>
+                    <a:pt x="844133" y="103908"/>
+                  </a:lnTo>
+                  <a:lnTo>
+                    <a:pt x="914478" y="111704"/>
+                  </a:lnTo>
+                  <a:lnTo>
+                    <a:pt x="984822" y="119378"/>
+                  </a:lnTo>
+                  <a:lnTo>
+                    <a:pt x="1055167" y="126930"/>
+                  </a:lnTo>
+                  <a:lnTo>
+                    <a:pt x="1125511" y="134363"/>
+                  </a:lnTo>
+                  <a:lnTo>
+                    <a:pt x="1195856" y="141678"/>
+                  </a:lnTo>
+                  <a:lnTo>
+                    <a:pt x="1266200" y="148878"/>
+                  </a:lnTo>
+                  <a:lnTo>
+                    <a:pt x="1336545" y="155965"/>
+                  </a:lnTo>
+                  <a:lnTo>
+                    <a:pt x="1406889" y="162939"/>
+                  </a:lnTo>
+                  <a:lnTo>
+                    <a:pt x="1477234" y="169804"/>
+                  </a:lnTo>
+                  <a:lnTo>
+                    <a:pt x="1547578" y="176560"/>
+                  </a:lnTo>
+                  <a:lnTo>
+                    <a:pt x="1617923" y="183209"/>
+                  </a:lnTo>
+                  <a:lnTo>
+                    <a:pt x="1688267" y="189753"/>
+                  </a:lnTo>
+                  <a:lnTo>
+                    <a:pt x="1758612" y="196195"/>
+                  </a:lnTo>
+                  <a:lnTo>
+                    <a:pt x="1828956" y="202534"/>
+                  </a:lnTo>
+                  <a:lnTo>
+                    <a:pt x="1899301" y="208773"/>
+                  </a:lnTo>
+                  <a:lnTo>
+                    <a:pt x="1969645" y="214914"/>
+                  </a:lnTo>
+                  <a:lnTo>
+                    <a:pt x="2039990" y="220958"/>
+                  </a:lnTo>
+                  <a:lnTo>
+                    <a:pt x="2110334" y="226906"/>
+                  </a:lnTo>
+                  <a:lnTo>
+                    <a:pt x="2180679" y="232761"/>
+                  </a:lnTo>
+                  <a:lnTo>
+                    <a:pt x="2251023" y="238523"/>
+                  </a:lnTo>
+                  <a:lnTo>
+                    <a:pt x="2321368" y="244194"/>
+                  </a:lnTo>
+                  <a:lnTo>
+                    <a:pt x="2391712" y="249776"/>
+                  </a:lnTo>
+                  <a:lnTo>
+                    <a:pt x="2462057" y="255269"/>
+                  </a:lnTo>
+                  <a:lnTo>
+                    <a:pt x="2532401" y="260676"/>
+                  </a:lnTo>
+                  <a:lnTo>
+                    <a:pt x="2602746" y="265997"/>
+                  </a:lnTo>
+                  <a:lnTo>
+                    <a:pt x="2673090" y="271235"/>
+                  </a:lnTo>
+                  <a:lnTo>
+                    <a:pt x="2743435" y="276390"/>
+                  </a:lnTo>
+                  <a:lnTo>
+                    <a:pt x="2813779" y="281463"/>
+                  </a:lnTo>
+                  <a:lnTo>
+                    <a:pt x="2884124" y="286456"/>
+                  </a:lnTo>
+                  <a:lnTo>
+                    <a:pt x="2954468" y="291371"/>
+                  </a:lnTo>
+                  <a:lnTo>
+                    <a:pt x="3024813" y="296207"/>
+                  </a:lnTo>
+                  <a:lnTo>
+                    <a:pt x="3095157" y="298493"/>
+                  </a:lnTo>
+                  <a:lnTo>
+                    <a:pt x="3165502" y="298651"/>
+                  </a:lnTo>
+                  <a:lnTo>
+                    <a:pt x="3235846" y="298809"/>
+                  </a:lnTo>
+                  <a:lnTo>
+                    <a:pt x="3306191" y="298967"/>
+                  </a:lnTo>
+                  <a:lnTo>
+                    <a:pt x="3376535" y="299124"/>
+                  </a:lnTo>
+                  <a:lnTo>
+                    <a:pt x="3446880" y="299282"/>
+                  </a:lnTo>
+                  <a:lnTo>
+                    <a:pt x="3517224" y="299439"/>
+                  </a:lnTo>
+                  <a:lnTo>
+                    <a:pt x="3587569" y="299597"/>
+                  </a:lnTo>
+                  <a:lnTo>
+                    <a:pt x="3657913" y="299754"/>
+                  </a:lnTo>
+                  <a:lnTo>
+                    <a:pt x="3728257" y="299912"/>
+                  </a:lnTo>
+                  <a:lnTo>
+                    <a:pt x="3798602" y="300069"/>
+                  </a:lnTo>
+                  <a:lnTo>
+                    <a:pt x="3868946" y="300226"/>
+                  </a:lnTo>
+                  <a:lnTo>
+                    <a:pt x="3939291" y="300383"/>
+                  </a:lnTo>
+                  <a:lnTo>
+                    <a:pt x="4009635" y="300540"/>
+                  </a:lnTo>
+                  <a:lnTo>
+                    <a:pt x="4079980" y="300697"/>
+                  </a:lnTo>
+                  <a:lnTo>
+                    <a:pt x="4150324" y="300853"/>
+                  </a:lnTo>
+                  <a:lnTo>
+                    <a:pt x="4220669" y="301010"/>
+                  </a:lnTo>
+                  <a:lnTo>
+                    <a:pt x="4291013" y="301167"/>
+                  </a:lnTo>
+                  <a:lnTo>
+                    <a:pt x="4361358" y="301323"/>
+                  </a:lnTo>
+                  <a:lnTo>
+                    <a:pt x="4431702" y="301480"/>
+                  </a:lnTo>
+                  <a:lnTo>
+                    <a:pt x="4502047" y="301636"/>
+                  </a:lnTo>
+                  <a:lnTo>
+                    <a:pt x="4572391" y="301792"/>
+                  </a:lnTo>
+                  <a:lnTo>
+                    <a:pt x="4642736" y="301949"/>
+                  </a:lnTo>
+                  <a:lnTo>
+                    <a:pt x="4713080" y="302105"/>
+                  </a:lnTo>
+                  <a:lnTo>
+                    <a:pt x="4783425" y="302261"/>
+                  </a:lnTo>
+                  <a:lnTo>
+                    <a:pt x="4853769" y="302417"/>
+                  </a:lnTo>
+                  <a:lnTo>
+                    <a:pt x="4924114" y="302573"/>
+                  </a:lnTo>
+                  <a:lnTo>
+                    <a:pt x="4994458" y="302728"/>
+                  </a:lnTo>
+                  <a:lnTo>
+                    <a:pt x="5064803" y="302884"/>
+                  </a:lnTo>
+                  <a:lnTo>
+                    <a:pt x="5135147" y="303040"/>
+                  </a:lnTo>
+                  <a:lnTo>
+                    <a:pt x="5205492" y="303195"/>
+                  </a:lnTo>
+                  <a:lnTo>
+                    <a:pt x="5275836" y="303351"/>
+                  </a:lnTo>
+                  <a:lnTo>
+                    <a:pt x="5346181" y="303506"/>
+                  </a:lnTo>
+                  <a:lnTo>
+                    <a:pt x="5416525" y="303661"/>
+                  </a:lnTo>
+                  <a:lnTo>
+                    <a:pt x="5486870" y="303817"/>
+                  </a:lnTo>
+                  <a:lnTo>
+                    <a:pt x="5557214" y="303972"/>
+                  </a:lnTo>
+                  <a:lnTo>
+                    <a:pt x="5627559" y="304127"/>
+                  </a:lnTo>
+                  <a:lnTo>
+                    <a:pt x="5697903" y="304282"/>
+                  </a:lnTo>
+                  <a:lnTo>
+                    <a:pt x="5768248" y="304437"/>
+                  </a:lnTo>
+                  <a:lnTo>
+                    <a:pt x="5838592" y="304592"/>
+                  </a:lnTo>
+                  <a:lnTo>
+                    <a:pt x="5908937" y="304746"/>
+                  </a:lnTo>
+                  <a:lnTo>
+                    <a:pt x="5979281" y="304901"/>
+                  </a:lnTo>
+                  <a:lnTo>
+                    <a:pt x="6049626" y="305055"/>
+                  </a:lnTo>
+                  <a:lnTo>
+                    <a:pt x="6119970" y="305210"/>
+                  </a:lnTo>
+                  <a:lnTo>
+                    <a:pt x="6190315" y="305364"/>
+                  </a:lnTo>
+                  <a:lnTo>
+                    <a:pt x="6260659" y="305519"/>
+                  </a:lnTo>
+                  <a:lnTo>
+                    <a:pt x="6331004" y="305673"/>
+                  </a:lnTo>
+                  <a:lnTo>
+                    <a:pt x="6401348" y="305827"/>
+                  </a:lnTo>
+                  <a:lnTo>
+                    <a:pt x="6471693" y="305981"/>
+                  </a:lnTo>
+                  <a:lnTo>
+                    <a:pt x="6542037" y="306135"/>
+                  </a:lnTo>
+                  <a:lnTo>
+                    <a:pt x="6612382" y="306289"/>
+                  </a:lnTo>
+                  <a:lnTo>
+                    <a:pt x="6682726" y="306443"/>
+                  </a:lnTo>
+                  <a:lnTo>
+                    <a:pt x="6753071" y="306597"/>
+                  </a:lnTo>
+                  <a:lnTo>
+                    <a:pt x="6823415" y="306750"/>
+                  </a:lnTo>
+                  <a:lnTo>
+                    <a:pt x="6893760" y="306904"/>
+                  </a:lnTo>
+                  <a:lnTo>
+                    <a:pt x="6964104" y="307057"/>
                   </a:lnTo>
                 </a:path>
               </a:pathLst>
@@ -4326,312 +4036,637 @@
           </p:nvSpPr>
           <p:spPr>
             <a:xfrm>
-              <a:off x="1172049" y="4371594"/>
-              <a:ext cx="7090630" cy="660232"/>
+              <a:off x="1235312" y="3094012"/>
+              <a:ext cx="6964104" cy="182596"/>
             </a:xfrm>
             <a:custGeom>
               <a:avLst/>
               <a:pathLst>
-                <a:path w="7090630" h="660232">
+                <a:path w="6964104" h="182596">
+                  <a:moveTo>
+                    <a:pt x="6964104" y="182596"/>
+                  </a:moveTo>
+                  <a:lnTo>
+                    <a:pt x="6893760" y="180612"/>
+                  </a:lnTo>
+                  <a:lnTo>
+                    <a:pt x="6823415" y="178597"/>
+                  </a:lnTo>
+                  <a:lnTo>
+                    <a:pt x="6753071" y="176548"/>
+                  </a:lnTo>
+                  <a:lnTo>
+                    <a:pt x="6682726" y="174467"/>
+                  </a:lnTo>
+                  <a:lnTo>
+                    <a:pt x="6612382" y="172353"/>
+                  </a:lnTo>
+                  <a:lnTo>
+                    <a:pt x="6542037" y="170205"/>
+                  </a:lnTo>
+                  <a:lnTo>
+                    <a:pt x="6471693" y="168022"/>
+                  </a:lnTo>
+                  <a:lnTo>
+                    <a:pt x="6401348" y="165804"/>
+                  </a:lnTo>
+                  <a:lnTo>
+                    <a:pt x="6331004" y="163551"/>
+                  </a:lnTo>
+                  <a:lnTo>
+                    <a:pt x="6260659" y="161261"/>
+                  </a:lnTo>
+                  <a:lnTo>
+                    <a:pt x="6190315" y="158935"/>
+                  </a:lnTo>
+                  <a:lnTo>
+                    <a:pt x="6119970" y="156572"/>
+                  </a:lnTo>
+                  <a:lnTo>
+                    <a:pt x="6049626" y="154170"/>
+                  </a:lnTo>
+                  <a:lnTo>
+                    <a:pt x="5979281" y="151730"/>
+                  </a:lnTo>
+                  <a:lnTo>
+                    <a:pt x="5908937" y="149251"/>
+                  </a:lnTo>
+                  <a:lnTo>
+                    <a:pt x="5838592" y="146732"/>
+                  </a:lnTo>
+                  <a:lnTo>
+                    <a:pt x="5768248" y="144173"/>
+                  </a:lnTo>
+                  <a:lnTo>
+                    <a:pt x="5697903" y="141573"/>
+                  </a:lnTo>
+                  <a:lnTo>
+                    <a:pt x="5627559" y="138931"/>
+                  </a:lnTo>
+                  <a:lnTo>
+                    <a:pt x="5557214" y="136246"/>
+                  </a:lnTo>
+                  <a:lnTo>
+                    <a:pt x="5486870" y="133519"/>
+                  </a:lnTo>
+                  <a:lnTo>
+                    <a:pt x="5416525" y="130748"/>
+                  </a:lnTo>
+                  <a:lnTo>
+                    <a:pt x="5346181" y="127932"/>
+                  </a:lnTo>
+                  <a:lnTo>
+                    <a:pt x="5275836" y="125071"/>
+                  </a:lnTo>
+                  <a:lnTo>
+                    <a:pt x="5205492" y="122164"/>
+                  </a:lnTo>
+                  <a:lnTo>
+                    <a:pt x="5135147" y="119211"/>
+                  </a:lnTo>
+                  <a:lnTo>
+                    <a:pt x="5064803" y="116210"/>
+                  </a:lnTo>
+                  <a:lnTo>
+                    <a:pt x="4994458" y="113161"/>
+                  </a:lnTo>
+                  <a:lnTo>
+                    <a:pt x="4924114" y="110064"/>
+                  </a:lnTo>
+                  <a:lnTo>
+                    <a:pt x="4853769" y="106916"/>
+                  </a:lnTo>
+                  <a:lnTo>
+                    <a:pt x="4783425" y="103718"/>
+                  </a:lnTo>
+                  <a:lnTo>
+                    <a:pt x="4713080" y="100469"/>
+                  </a:lnTo>
+                  <a:lnTo>
+                    <a:pt x="4642736" y="97168"/>
+                  </a:lnTo>
+                  <a:lnTo>
+                    <a:pt x="4572391" y="93813"/>
+                  </a:lnTo>
+                  <a:lnTo>
+                    <a:pt x="4502047" y="90405"/>
+                  </a:lnTo>
+                  <a:lnTo>
+                    <a:pt x="4431702" y="86942"/>
+                  </a:lnTo>
+                  <a:lnTo>
+                    <a:pt x="4361358" y="83424"/>
+                  </a:lnTo>
+                  <a:lnTo>
+                    <a:pt x="4291013" y="79849"/>
+                  </a:lnTo>
+                  <a:lnTo>
+                    <a:pt x="4220669" y="76217"/>
+                  </a:lnTo>
+                  <a:lnTo>
+                    <a:pt x="4150324" y="72527"/>
+                  </a:lnTo>
+                  <a:lnTo>
+                    <a:pt x="4079980" y="68777"/>
+                  </a:lnTo>
+                  <a:lnTo>
+                    <a:pt x="4009635" y="64968"/>
+                  </a:lnTo>
+                  <a:lnTo>
+                    <a:pt x="3939291" y="61097"/>
+                  </a:lnTo>
+                  <a:lnTo>
+                    <a:pt x="3868946" y="57164"/>
+                  </a:lnTo>
+                  <a:lnTo>
+                    <a:pt x="3798602" y="53168"/>
+                  </a:lnTo>
+                  <a:lnTo>
+                    <a:pt x="3728257" y="49108"/>
+                  </a:lnTo>
+                  <a:lnTo>
+                    <a:pt x="3657913" y="44982"/>
+                  </a:lnTo>
+                  <a:lnTo>
+                    <a:pt x="3587569" y="40791"/>
+                  </a:lnTo>
+                  <a:lnTo>
+                    <a:pt x="3517224" y="36532"/>
+                  </a:lnTo>
+                  <a:lnTo>
+                    <a:pt x="3446880" y="32205"/>
+                  </a:lnTo>
+                  <a:lnTo>
+                    <a:pt x="3376535" y="27809"/>
+                  </a:lnTo>
+                  <a:lnTo>
+                    <a:pt x="3306191" y="23342"/>
+                  </a:lnTo>
+                  <a:lnTo>
+                    <a:pt x="3235846" y="18804"/>
+                  </a:lnTo>
+                  <a:lnTo>
+                    <a:pt x="3165502" y="14192"/>
+                  </a:lnTo>
+                  <a:lnTo>
+                    <a:pt x="3095157" y="9507"/>
+                  </a:lnTo>
+                  <a:lnTo>
+                    <a:pt x="3024813" y="6874"/>
+                  </a:lnTo>
+                  <a:lnTo>
+                    <a:pt x="2954468" y="6716"/>
+                  </a:lnTo>
+                  <a:lnTo>
+                    <a:pt x="2884124" y="6558"/>
+                  </a:lnTo>
+                  <a:lnTo>
+                    <a:pt x="2813779" y="6400"/>
+                  </a:lnTo>
+                  <a:lnTo>
+                    <a:pt x="2743435" y="6241"/>
+                  </a:lnTo>
+                  <a:lnTo>
+                    <a:pt x="2673090" y="6083"/>
+                  </a:lnTo>
+                  <a:lnTo>
+                    <a:pt x="2602746" y="5924"/>
+                  </a:lnTo>
+                  <a:lnTo>
+                    <a:pt x="2532401" y="5766"/>
+                  </a:lnTo>
+                  <a:lnTo>
+                    <a:pt x="2462057" y="5607"/>
+                  </a:lnTo>
+                  <a:lnTo>
+                    <a:pt x="2391712" y="5448"/>
+                  </a:lnTo>
+                  <a:lnTo>
+                    <a:pt x="2321368" y="5289"/>
+                  </a:lnTo>
+                  <a:lnTo>
+                    <a:pt x="2251023" y="5130"/>
+                  </a:lnTo>
+                  <a:lnTo>
+                    <a:pt x="2180679" y="4971"/>
+                  </a:lnTo>
+                  <a:lnTo>
+                    <a:pt x="2110334" y="4812"/>
+                  </a:lnTo>
+                  <a:lnTo>
+                    <a:pt x="2039990" y="4653"/>
+                  </a:lnTo>
+                  <a:lnTo>
+                    <a:pt x="1969645" y="4494"/>
+                  </a:lnTo>
+                  <a:lnTo>
+                    <a:pt x="1899301" y="4334"/>
+                  </a:lnTo>
+                  <a:lnTo>
+                    <a:pt x="1828956" y="4175"/>
+                  </a:lnTo>
+                  <a:lnTo>
+                    <a:pt x="1758612" y="4015"/>
+                  </a:lnTo>
+                  <a:lnTo>
+                    <a:pt x="1688267" y="3856"/>
+                  </a:lnTo>
+                  <a:lnTo>
+                    <a:pt x="1617923" y="3696"/>
+                  </a:lnTo>
+                  <a:lnTo>
+                    <a:pt x="1547578" y="3536"/>
+                  </a:lnTo>
+                  <a:lnTo>
+                    <a:pt x="1477234" y="3376"/>
+                  </a:lnTo>
+                  <a:lnTo>
+                    <a:pt x="1406889" y="3216"/>
+                  </a:lnTo>
+                  <a:lnTo>
+                    <a:pt x="1336545" y="3056"/>
+                  </a:lnTo>
+                  <a:lnTo>
+                    <a:pt x="1266200" y="2896"/>
+                  </a:lnTo>
+                  <a:lnTo>
+                    <a:pt x="1195856" y="2736"/>
+                  </a:lnTo>
+                  <a:lnTo>
+                    <a:pt x="1125511" y="2576"/>
+                  </a:lnTo>
+                  <a:lnTo>
+                    <a:pt x="1055167" y="2415"/>
+                  </a:lnTo>
+                  <a:lnTo>
+                    <a:pt x="984822" y="2255"/>
+                  </a:lnTo>
+                  <a:lnTo>
+                    <a:pt x="914478" y="2094"/>
+                  </a:lnTo>
+                  <a:lnTo>
+                    <a:pt x="844133" y="1934"/>
+                  </a:lnTo>
+                  <a:lnTo>
+                    <a:pt x="773789" y="1773"/>
+                  </a:lnTo>
+                  <a:lnTo>
+                    <a:pt x="703444" y="1612"/>
+                  </a:lnTo>
+                  <a:lnTo>
+                    <a:pt x="633100" y="1451"/>
+                  </a:lnTo>
+                  <a:lnTo>
+                    <a:pt x="562755" y="1290"/>
+                  </a:lnTo>
+                  <a:lnTo>
+                    <a:pt x="492411" y="1129"/>
+                  </a:lnTo>
+                  <a:lnTo>
+                    <a:pt x="422066" y="968"/>
+                  </a:lnTo>
+                  <a:lnTo>
+                    <a:pt x="351722" y="807"/>
+                  </a:lnTo>
+                  <a:lnTo>
+                    <a:pt x="281377" y="646"/>
+                  </a:lnTo>
+                  <a:lnTo>
+                    <a:pt x="211033" y="484"/>
+                  </a:lnTo>
+                  <a:lnTo>
+                    <a:pt x="140688" y="323"/>
+                  </a:lnTo>
+                  <a:lnTo>
+                    <a:pt x="70344" y="161"/>
+                  </a:lnTo>
+                  <a:lnTo>
+                    <a:pt x="0" y="0"/>
+                  </a:lnTo>
+                </a:path>
+              </a:pathLst>
+            </a:custGeom>
+          </p:spPr>
+          <p:txBody>
+            <a:bodyPr/>
+            <a:lstStyle/>
+            <a:p/>
+          </p:txBody>
+        </p:sp>
+        <p:sp>
+          <p:nvSpPr>
+            <p:cNvPr id="26" name="pl26"/>
+            <p:cNvSpPr/>
+            <p:nvPr/>
+          </p:nvSpPr>
+          <p:spPr>
+            <a:xfrm>
+              <a:off x="1235312" y="2972419"/>
+              <a:ext cx="6964104" cy="238262"/>
+            </a:xfrm>
+            <a:custGeom>
+              <a:avLst/>
+              <a:pathLst>
+                <a:path w="6964104" h="238262">
                   <a:moveTo>
                     <a:pt x="0" y="0"/>
                   </a:moveTo>
                   <a:lnTo>
-                    <a:pt x="71622" y="9706"/>
-                  </a:lnTo>
-                  <a:lnTo>
-                    <a:pt x="143245" y="19334"/>
-                  </a:lnTo>
-                  <a:lnTo>
-                    <a:pt x="214867" y="28883"/>
-                  </a:lnTo>
-                  <a:lnTo>
-                    <a:pt x="286490" y="38353"/>
-                  </a:lnTo>
-                  <a:lnTo>
-                    <a:pt x="358112" y="47746"/>
-                  </a:lnTo>
-                  <a:lnTo>
-                    <a:pt x="429735" y="57062"/>
-                  </a:lnTo>
-                  <a:lnTo>
-                    <a:pt x="501357" y="66302"/>
-                  </a:lnTo>
-                  <a:lnTo>
-                    <a:pt x="572980" y="75466"/>
-                  </a:lnTo>
-                  <a:lnTo>
-                    <a:pt x="644602" y="84555"/>
-                  </a:lnTo>
-                  <a:lnTo>
-                    <a:pt x="716225" y="93570"/>
-                  </a:lnTo>
-                  <a:lnTo>
-                    <a:pt x="787847" y="102510"/>
-                  </a:lnTo>
-                  <a:lnTo>
-                    <a:pt x="859470" y="111378"/>
-                  </a:lnTo>
-                  <a:lnTo>
-                    <a:pt x="931092" y="120173"/>
-                  </a:lnTo>
-                  <a:lnTo>
-                    <a:pt x="1002715" y="128896"/>
-                  </a:lnTo>
-                  <a:lnTo>
-                    <a:pt x="1074337" y="137548"/>
-                  </a:lnTo>
-                  <a:lnTo>
-                    <a:pt x="1145960" y="146129"/>
-                  </a:lnTo>
-                  <a:lnTo>
-                    <a:pt x="1217582" y="154639"/>
-                  </a:lnTo>
-                  <a:lnTo>
-                    <a:pt x="1289205" y="163080"/>
-                  </a:lnTo>
-                  <a:lnTo>
-                    <a:pt x="1360827" y="171452"/>
-                  </a:lnTo>
-                  <a:lnTo>
-                    <a:pt x="1432450" y="179755"/>
-                  </a:lnTo>
-                  <a:lnTo>
-                    <a:pt x="1504073" y="187991"/>
-                  </a:lnTo>
-                  <a:lnTo>
-                    <a:pt x="1575695" y="196158"/>
-                  </a:lnTo>
-                  <a:lnTo>
-                    <a:pt x="1647318" y="204259"/>
-                  </a:lnTo>
-                  <a:lnTo>
-                    <a:pt x="1718940" y="212294"/>
-                  </a:lnTo>
-                  <a:lnTo>
-                    <a:pt x="1790563" y="220263"/>
-                  </a:lnTo>
-                  <a:lnTo>
-                    <a:pt x="1862185" y="228167"/>
-                  </a:lnTo>
-                  <a:lnTo>
-                    <a:pt x="1933808" y="236006"/>
-                  </a:lnTo>
-                  <a:lnTo>
-                    <a:pt x="2005430" y="243780"/>
-                  </a:lnTo>
-                  <a:lnTo>
-                    <a:pt x="2077053" y="251491"/>
-                  </a:lnTo>
-                  <a:lnTo>
-                    <a:pt x="2148675" y="259139"/>
-                  </a:lnTo>
-                  <a:lnTo>
-                    <a:pt x="2220298" y="266725"/>
-                  </a:lnTo>
-                  <a:lnTo>
-                    <a:pt x="2291920" y="274248"/>
-                  </a:lnTo>
-                  <a:lnTo>
-                    <a:pt x="2363543" y="281710"/>
-                  </a:lnTo>
-                  <a:lnTo>
-                    <a:pt x="2435165" y="289110"/>
-                  </a:lnTo>
-                  <a:lnTo>
-                    <a:pt x="2506788" y="296450"/>
-                  </a:lnTo>
-                  <a:lnTo>
-                    <a:pt x="2578410" y="303730"/>
-                  </a:lnTo>
-                  <a:lnTo>
-                    <a:pt x="2650033" y="310950"/>
-                  </a:lnTo>
-                  <a:lnTo>
-                    <a:pt x="2721655" y="318112"/>
-                  </a:lnTo>
-                  <a:lnTo>
-                    <a:pt x="2793278" y="325214"/>
-                  </a:lnTo>
-                  <a:lnTo>
-                    <a:pt x="2864901" y="332259"/>
-                  </a:lnTo>
-                  <a:lnTo>
-                    <a:pt x="2936523" y="339245"/>
-                  </a:lnTo>
-                  <a:lnTo>
-                    <a:pt x="3008146" y="346175"/>
-                  </a:lnTo>
-                  <a:lnTo>
-                    <a:pt x="3079768" y="353048"/>
-                  </a:lnTo>
-                  <a:lnTo>
-                    <a:pt x="3151391" y="359864"/>
-                  </a:lnTo>
-                  <a:lnTo>
-                    <a:pt x="3223013" y="366625"/>
-                  </a:lnTo>
-                  <a:lnTo>
-                    <a:pt x="3294636" y="373330"/>
-                  </a:lnTo>
-                  <a:lnTo>
-                    <a:pt x="3366258" y="379981"/>
-                  </a:lnTo>
-                  <a:lnTo>
-                    <a:pt x="3437881" y="386577"/>
-                  </a:lnTo>
-                  <a:lnTo>
-                    <a:pt x="3509503" y="393119"/>
-                  </a:lnTo>
-                  <a:lnTo>
-                    <a:pt x="3581126" y="399607"/>
-                  </a:lnTo>
-                  <a:lnTo>
-                    <a:pt x="3652748" y="406043"/>
-                  </a:lnTo>
-                  <a:lnTo>
-                    <a:pt x="3724371" y="412425"/>
-                  </a:lnTo>
-                  <a:lnTo>
-                    <a:pt x="3795993" y="418756"/>
-                  </a:lnTo>
-                  <a:lnTo>
-                    <a:pt x="3867616" y="425034"/>
-                  </a:lnTo>
-                  <a:lnTo>
-                    <a:pt x="3939238" y="431262"/>
-                  </a:lnTo>
-                  <a:lnTo>
-                    <a:pt x="4010861" y="437438"/>
-                  </a:lnTo>
-                  <a:lnTo>
-                    <a:pt x="4082483" y="443563"/>
-                  </a:lnTo>
-                  <a:lnTo>
-                    <a:pt x="4154106" y="449639"/>
-                  </a:lnTo>
-                  <a:lnTo>
-                    <a:pt x="4225729" y="455665"/>
-                  </a:lnTo>
-                  <a:lnTo>
-                    <a:pt x="4297351" y="461641"/>
-                  </a:lnTo>
-                  <a:lnTo>
-                    <a:pt x="4368974" y="467568"/>
-                  </a:lnTo>
-                  <a:lnTo>
-                    <a:pt x="4440596" y="473447"/>
-                  </a:lnTo>
-                  <a:lnTo>
-                    <a:pt x="4512219" y="479278"/>
-                  </a:lnTo>
-                  <a:lnTo>
-                    <a:pt x="4583841" y="485061"/>
-                  </a:lnTo>
-                  <a:lnTo>
-                    <a:pt x="4655464" y="490797"/>
-                  </a:lnTo>
-                  <a:lnTo>
-                    <a:pt x="4727086" y="496486"/>
-                  </a:lnTo>
-                  <a:lnTo>
-                    <a:pt x="4798709" y="502128"/>
-                  </a:lnTo>
-                  <a:lnTo>
-                    <a:pt x="4870331" y="507724"/>
-                  </a:lnTo>
-                  <a:lnTo>
-                    <a:pt x="4941954" y="513274"/>
-                  </a:lnTo>
-                  <a:lnTo>
-                    <a:pt x="5013576" y="518779"/>
-                  </a:lnTo>
-                  <a:lnTo>
-                    <a:pt x="5085199" y="524239"/>
-                  </a:lnTo>
-                  <a:lnTo>
-                    <a:pt x="5156821" y="529654"/>
-                  </a:lnTo>
-                  <a:lnTo>
-                    <a:pt x="5228444" y="535024"/>
-                  </a:lnTo>
-                  <a:lnTo>
-                    <a:pt x="5300066" y="540351"/>
-                  </a:lnTo>
-                  <a:lnTo>
-                    <a:pt x="5371689" y="545634"/>
-                  </a:lnTo>
-                  <a:lnTo>
-                    <a:pt x="5443311" y="550874"/>
-                  </a:lnTo>
-                  <a:lnTo>
-                    <a:pt x="5514934" y="556071"/>
-                  </a:lnTo>
-                  <a:lnTo>
-                    <a:pt x="5586557" y="561225"/>
-                  </a:lnTo>
-                  <a:lnTo>
-                    <a:pt x="5658179" y="566338"/>
-                  </a:lnTo>
-                  <a:lnTo>
-                    <a:pt x="5729802" y="571408"/>
-                  </a:lnTo>
-                  <a:lnTo>
-                    <a:pt x="5801424" y="576437"/>
-                  </a:lnTo>
-                  <a:lnTo>
-                    <a:pt x="5873047" y="581424"/>
-                  </a:lnTo>
-                  <a:lnTo>
-                    <a:pt x="5944669" y="586371"/>
-                  </a:lnTo>
-                  <a:lnTo>
-                    <a:pt x="6016292" y="591278"/>
-                  </a:lnTo>
-                  <a:lnTo>
-                    <a:pt x="6087914" y="596144"/>
-                  </a:lnTo>
-                  <a:lnTo>
-                    <a:pt x="6159537" y="600970"/>
-                  </a:lnTo>
-                  <a:lnTo>
-                    <a:pt x="6231159" y="605757"/>
-                  </a:lnTo>
-                  <a:lnTo>
-                    <a:pt x="6302782" y="610504"/>
-                  </a:lnTo>
-                  <a:lnTo>
-                    <a:pt x="6374404" y="615213"/>
-                  </a:lnTo>
-                  <a:lnTo>
-                    <a:pt x="6446027" y="619883"/>
-                  </a:lnTo>
-                  <a:lnTo>
-                    <a:pt x="6517649" y="624515"/>
-                  </a:lnTo>
-                  <a:lnTo>
-                    <a:pt x="6589272" y="629109"/>
-                  </a:lnTo>
-                  <a:lnTo>
-                    <a:pt x="6660894" y="633666"/>
-                  </a:lnTo>
-                  <a:lnTo>
-                    <a:pt x="6732517" y="638185"/>
-                  </a:lnTo>
-                  <a:lnTo>
-                    <a:pt x="6804139" y="642667"/>
-                  </a:lnTo>
-                  <a:lnTo>
-                    <a:pt x="6875762" y="647112"/>
-                  </a:lnTo>
-                  <a:lnTo>
-                    <a:pt x="6947385" y="651522"/>
-                  </a:lnTo>
-                  <a:lnTo>
-                    <a:pt x="7019007" y="655894"/>
-                  </a:lnTo>
-                  <a:lnTo>
-                    <a:pt x="7090630" y="660232"/>
+                    <a:pt x="70344" y="3503"/>
+                  </a:lnTo>
+                  <a:lnTo>
+                    <a:pt x="140688" y="6977"/>
+                  </a:lnTo>
+                  <a:lnTo>
+                    <a:pt x="211033" y="10423"/>
+                  </a:lnTo>
+                  <a:lnTo>
+                    <a:pt x="281377" y="13840"/>
+                  </a:lnTo>
+                  <a:lnTo>
+                    <a:pt x="351722" y="17230"/>
+                  </a:lnTo>
+                  <a:lnTo>
+                    <a:pt x="422066" y="20592"/>
+                  </a:lnTo>
+                  <a:lnTo>
+                    <a:pt x="492411" y="23926"/>
+                  </a:lnTo>
+                  <a:lnTo>
+                    <a:pt x="562755" y="27234"/>
+                  </a:lnTo>
+                  <a:lnTo>
+                    <a:pt x="633100" y="30514"/>
+                  </a:lnTo>
+                  <a:lnTo>
+                    <a:pt x="703444" y="33767"/>
+                  </a:lnTo>
+                  <a:lnTo>
+                    <a:pt x="773789" y="36993"/>
+                  </a:lnTo>
+                  <a:lnTo>
+                    <a:pt x="844133" y="40193"/>
+                  </a:lnTo>
+                  <a:lnTo>
+                    <a:pt x="914478" y="43367"/>
+                  </a:lnTo>
+                  <a:lnTo>
+                    <a:pt x="984822" y="46515"/>
+                  </a:lnTo>
+                  <a:lnTo>
+                    <a:pt x="1055167" y="49638"/>
+                  </a:lnTo>
+                  <a:lnTo>
+                    <a:pt x="1125511" y="52734"/>
+                  </a:lnTo>
+                  <a:lnTo>
+                    <a:pt x="1195856" y="55805"/>
+                  </a:lnTo>
+                  <a:lnTo>
+                    <a:pt x="1266200" y="58852"/>
+                  </a:lnTo>
+                  <a:lnTo>
+                    <a:pt x="1336545" y="61873"/>
+                  </a:lnTo>
+                  <a:lnTo>
+                    <a:pt x="1406889" y="64869"/>
+                  </a:lnTo>
+                  <a:lnTo>
+                    <a:pt x="1477234" y="67841"/>
+                  </a:lnTo>
+                  <a:lnTo>
+                    <a:pt x="1547578" y="70789"/>
+                  </a:lnTo>
+                  <a:lnTo>
+                    <a:pt x="1617923" y="73712"/>
+                  </a:lnTo>
+                  <a:lnTo>
+                    <a:pt x="1688267" y="76612"/>
+                  </a:lnTo>
+                  <a:lnTo>
+                    <a:pt x="1758612" y="79487"/>
+                  </a:lnTo>
+                  <a:lnTo>
+                    <a:pt x="1828956" y="82340"/>
+                  </a:lnTo>
+                  <a:lnTo>
+                    <a:pt x="1899301" y="85169"/>
+                  </a:lnTo>
+                  <a:lnTo>
+                    <a:pt x="1969645" y="87974"/>
+                  </a:lnTo>
+                  <a:lnTo>
+                    <a:pt x="2039990" y="90757"/>
+                  </a:lnTo>
+                  <a:lnTo>
+                    <a:pt x="2110334" y="93517"/>
+                  </a:lnTo>
+                  <a:lnTo>
+                    <a:pt x="2180679" y="96254"/>
+                  </a:lnTo>
+                  <a:lnTo>
+                    <a:pt x="2251023" y="98969"/>
+                  </a:lnTo>
+                  <a:lnTo>
+                    <a:pt x="2321368" y="101662"/>
+                  </a:lnTo>
+                  <a:lnTo>
+                    <a:pt x="2391712" y="104333"/>
+                  </a:lnTo>
+                  <a:lnTo>
+                    <a:pt x="2462057" y="106982"/>
+                  </a:lnTo>
+                  <a:lnTo>
+                    <a:pt x="2532401" y="109609"/>
+                  </a:lnTo>
+                  <a:lnTo>
+                    <a:pt x="2602746" y="112214"/>
+                  </a:lnTo>
+                  <a:lnTo>
+                    <a:pt x="2673090" y="114799"/>
+                  </a:lnTo>
+                  <a:lnTo>
+                    <a:pt x="2743435" y="117362"/>
+                  </a:lnTo>
+                  <a:lnTo>
+                    <a:pt x="2813779" y="119904"/>
+                  </a:lnTo>
+                  <a:lnTo>
+                    <a:pt x="2884124" y="122425"/>
+                  </a:lnTo>
+                  <a:lnTo>
+                    <a:pt x="2954468" y="124926"/>
+                  </a:lnTo>
+                  <a:lnTo>
+                    <a:pt x="3024813" y="127406"/>
+                  </a:lnTo>
+                  <a:lnTo>
+                    <a:pt x="3095157" y="129866"/>
+                  </a:lnTo>
+                  <a:lnTo>
+                    <a:pt x="3165502" y="132306"/>
+                  </a:lnTo>
+                  <a:lnTo>
+                    <a:pt x="3235846" y="134726"/>
+                  </a:lnTo>
+                  <a:lnTo>
+                    <a:pt x="3306191" y="137126"/>
+                  </a:lnTo>
+                  <a:lnTo>
+                    <a:pt x="3376535" y="139506"/>
+                  </a:lnTo>
+                  <a:lnTo>
+                    <a:pt x="3446880" y="141867"/>
+                  </a:lnTo>
+                  <a:lnTo>
+                    <a:pt x="3517224" y="144209"/>
+                  </a:lnTo>
+                  <a:lnTo>
+                    <a:pt x="3587569" y="146531"/>
+                  </a:lnTo>
+                  <a:lnTo>
+                    <a:pt x="3657913" y="148834"/>
+                  </a:lnTo>
+                  <a:lnTo>
+                    <a:pt x="3728257" y="151119"/>
+                  </a:lnTo>
+                  <a:lnTo>
+                    <a:pt x="3798602" y="153385"/>
+                  </a:lnTo>
+                  <a:lnTo>
+                    <a:pt x="3868946" y="155632"/>
+                  </a:lnTo>
+                  <a:lnTo>
+                    <a:pt x="3939291" y="157861"/>
+                  </a:lnTo>
+                  <a:lnTo>
+                    <a:pt x="4009635" y="160071"/>
+                  </a:lnTo>
+                  <a:lnTo>
+                    <a:pt x="4079980" y="162264"/>
+                  </a:lnTo>
+                  <a:lnTo>
+                    <a:pt x="4150324" y="164438"/>
+                  </a:lnTo>
+                  <a:lnTo>
+                    <a:pt x="4220669" y="166595"/>
+                  </a:lnTo>
+                  <a:lnTo>
+                    <a:pt x="4291013" y="168734"/>
+                  </a:lnTo>
+                  <a:lnTo>
+                    <a:pt x="4361358" y="170856"/>
+                  </a:lnTo>
+                  <a:lnTo>
+                    <a:pt x="4431702" y="172960"/>
+                  </a:lnTo>
+                  <a:lnTo>
+                    <a:pt x="4502047" y="175047"/>
+                  </a:lnTo>
+                  <a:lnTo>
+                    <a:pt x="4572391" y="177117"/>
+                  </a:lnTo>
+                  <a:lnTo>
+                    <a:pt x="4642736" y="179170"/>
+                  </a:lnTo>
+                  <a:lnTo>
+                    <a:pt x="4713080" y="181206"/>
+                  </a:lnTo>
+                  <a:lnTo>
+                    <a:pt x="4783425" y="183225"/>
+                  </a:lnTo>
+                  <a:lnTo>
+                    <a:pt x="4853769" y="185228"/>
+                  </a:lnTo>
+                  <a:lnTo>
+                    <a:pt x="4924114" y="187215"/>
+                  </a:lnTo>
+                  <a:lnTo>
+                    <a:pt x="4994458" y="189185"/>
+                  </a:lnTo>
+                  <a:lnTo>
+                    <a:pt x="5064803" y="191139"/>
+                  </a:lnTo>
+                  <a:lnTo>
+                    <a:pt x="5135147" y="193077"/>
+                  </a:lnTo>
+                  <a:lnTo>
+                    <a:pt x="5205492" y="195000"/>
+                  </a:lnTo>
+                  <a:lnTo>
+                    <a:pt x="5275836" y="196906"/>
+                  </a:lnTo>
+                  <a:lnTo>
+                    <a:pt x="5346181" y="198797"/>
+                  </a:lnTo>
+                  <a:lnTo>
+                    <a:pt x="5416525" y="200673"/>
+                  </a:lnTo>
+                  <a:lnTo>
+                    <a:pt x="5486870" y="202533"/>
+                  </a:lnTo>
+                  <a:lnTo>
+                    <a:pt x="5557214" y="204378"/>
+                  </a:lnTo>
+                  <a:lnTo>
+                    <a:pt x="5627559" y="206207"/>
+                  </a:lnTo>
+                  <a:lnTo>
+                    <a:pt x="5697903" y="208022"/>
+                  </a:lnTo>
+                  <a:lnTo>
+                    <a:pt x="5768248" y="209822"/>
+                  </a:lnTo>
+                  <a:lnTo>
+                    <a:pt x="5838592" y="211607"/>
+                  </a:lnTo>
+                  <a:lnTo>
+                    <a:pt x="5908937" y="213378"/>
+                  </a:lnTo>
+                  <a:lnTo>
+                    <a:pt x="5979281" y="215134"/>
+                  </a:lnTo>
+                  <a:lnTo>
+                    <a:pt x="6049626" y="216876"/>
+                  </a:lnTo>
+                  <a:lnTo>
+                    <a:pt x="6119970" y="218603"/>
+                  </a:lnTo>
+                  <a:lnTo>
+                    <a:pt x="6190315" y="220316"/>
+                  </a:lnTo>
+                  <a:lnTo>
+                    <a:pt x="6260659" y="222016"/>
+                  </a:lnTo>
+                  <a:lnTo>
+                    <a:pt x="6331004" y="223701"/>
+                  </a:lnTo>
+                  <a:lnTo>
+                    <a:pt x="6401348" y="225373"/>
+                  </a:lnTo>
+                  <a:lnTo>
+                    <a:pt x="6471693" y="227030"/>
+                  </a:lnTo>
+                  <a:lnTo>
+                    <a:pt x="6542037" y="228675"/>
+                  </a:lnTo>
+                  <a:lnTo>
+                    <a:pt x="6612382" y="230306"/>
+                  </a:lnTo>
+                  <a:lnTo>
+                    <a:pt x="6682726" y="231923"/>
+                  </a:lnTo>
+                  <a:lnTo>
+                    <a:pt x="6753071" y="233527"/>
+                  </a:lnTo>
+                  <a:lnTo>
+                    <a:pt x="6823415" y="235118"/>
+                  </a:lnTo>
+                  <a:lnTo>
+                    <a:pt x="6893760" y="236697"/>
+                  </a:lnTo>
+                  <a:lnTo>
+                    <a:pt x="6964104" y="238262"/>
                   </a:lnTo>
                 </a:path>
               </a:pathLst>
@@ -4654,27 +4689,27 @@
         </p:sp>
         <p:sp>
           <p:nvSpPr>
-            <p:cNvPr id="26" name="pl26"/>
+            <p:cNvPr id="27" name="pl27"/>
             <p:cNvSpPr/>
             <p:nvPr/>
           </p:nvSpPr>
           <p:spPr>
             <a:xfrm>
-              <a:off x="817517" y="4727786"/>
-              <a:ext cx="7799693" cy="0"/>
+              <a:off x="887106" y="3100960"/>
+              <a:ext cx="7660515" cy="0"/>
             </a:xfrm>
             <a:custGeom>
               <a:avLst/>
               <a:pathLst>
-                <a:path w="7799693" h="0">
+                <a:path w="7660515" h="0">
                   <a:moveTo>
                     <a:pt x="0" y="0"/>
                   </a:moveTo>
                   <a:lnTo>
-                    <a:pt x="7799693" y="0"/>
-                  </a:lnTo>
-                  <a:lnTo>
-                    <a:pt x="7799693" y="0"/>
+                    <a:pt x="7660515" y="0"/>
+                  </a:lnTo>
+                  <a:lnTo>
+                    <a:pt x="7660515" y="0"/>
                   </a:lnTo>
                 </a:path>
               </a:pathLst>
@@ -4697,21 +4732,21 @@
         </p:sp>
         <p:sp>
           <p:nvSpPr>
-            <p:cNvPr id="27" name="pl27"/>
+            <p:cNvPr id="28" name="pl28"/>
             <p:cNvSpPr/>
             <p:nvPr/>
           </p:nvSpPr>
           <p:spPr>
             <a:xfrm>
-              <a:off x="4284781" y="2073503"/>
-              <a:ext cx="0" cy="3649639"/>
+              <a:off x="4292500" y="2143092"/>
+              <a:ext cx="0" cy="1317069"/>
             </a:xfrm>
             <a:custGeom>
               <a:avLst/>
               <a:pathLst>
-                <a:path w="0" h="3649639">
+                <a:path w="0" h="1317069">
                   <a:moveTo>
-                    <a:pt x="0" y="3649639"/>
+                    <a:pt x="0" y="1317069"/>
                   </a:moveTo>
                   <a:lnTo>
                     <a:pt x="0" y="0"/>
@@ -4740,21 +4775,21 @@
         </p:sp>
         <p:sp>
           <p:nvSpPr>
-            <p:cNvPr id="28" name="pl28"/>
+            <p:cNvPr id="29" name="pl29"/>
             <p:cNvSpPr/>
             <p:nvPr/>
           </p:nvSpPr>
           <p:spPr>
             <a:xfrm>
-              <a:off x="3095906" y="2073503"/>
-              <a:ext cx="0" cy="3649639"/>
+              <a:off x="3124839" y="2143092"/>
+              <a:ext cx="0" cy="1317069"/>
             </a:xfrm>
             <a:custGeom>
               <a:avLst/>
               <a:pathLst>
-                <a:path w="0" h="3649639">
+                <a:path w="0" h="1317069">
                   <a:moveTo>
-                    <a:pt x="0" y="3649639"/>
+                    <a:pt x="0" y="1317069"/>
                   </a:moveTo>
                   <a:lnTo>
                     <a:pt x="0" y="0"/>
@@ -4783,21 +4818,21 @@
         </p:sp>
         <p:sp>
           <p:nvSpPr>
-            <p:cNvPr id="29" name="pl29"/>
+            <p:cNvPr id="30" name="pl30"/>
             <p:cNvSpPr/>
             <p:nvPr/>
           </p:nvSpPr>
           <p:spPr>
             <a:xfrm>
-              <a:off x="5522967" y="2073503"/>
-              <a:ext cx="0" cy="3649639"/>
+              <a:off x="5508592" y="2143092"/>
+              <a:ext cx="0" cy="1317069"/>
             </a:xfrm>
             <a:custGeom>
               <a:avLst/>
               <a:pathLst>
-                <a:path w="0" h="3649639">
+                <a:path w="0" h="1317069">
                   <a:moveTo>
-                    <a:pt x="0" y="3649639"/>
+                    <a:pt x="0" y="1317069"/>
                   </a:moveTo>
                   <a:lnTo>
                     <a:pt x="0" y="0"/>
@@ -4826,13 +4861,13 @@
         </p:sp>
         <p:sp>
           <p:nvSpPr>
-            <p:cNvPr id="30" name="tx30"/>
+            <p:cNvPr id="31" name="tx31"/>
             <p:cNvSpPr/>
             <p:nvPr/>
           </p:nvSpPr>
           <p:spPr>
             <a:xfrm>
-              <a:off x="692708" y="5517199"/>
+              <a:off x="762297" y="3360243"/>
               <a:ext cx="62179" cy="80101"/>
             </a:xfrm>
             <a:prstGeom prst="rect">
@@ -4872,13 +4907,13 @@
         </p:sp>
         <p:sp>
           <p:nvSpPr>
-            <p:cNvPr id="31" name="tx31"/>
+            <p:cNvPr id="32" name="tx32"/>
             <p:cNvSpPr/>
             <p:nvPr/>
           </p:nvSpPr>
           <p:spPr>
             <a:xfrm>
-              <a:off x="692708" y="4687735"/>
+              <a:off x="762297" y="3060909"/>
               <a:ext cx="62179" cy="80101"/>
             </a:xfrm>
             <a:prstGeom prst="rect">
@@ -4918,13 +4953,13 @@
         </p:sp>
         <p:sp>
           <p:nvSpPr>
-            <p:cNvPr id="32" name="tx32"/>
+            <p:cNvPr id="33" name="tx33"/>
             <p:cNvSpPr/>
             <p:nvPr/>
           </p:nvSpPr>
           <p:spPr>
             <a:xfrm>
-              <a:off x="692708" y="3858272"/>
+              <a:off x="762297" y="2761575"/>
               <a:ext cx="62179" cy="80101"/>
             </a:xfrm>
             <a:prstGeom prst="rect">
@@ -4964,13 +4999,13 @@
         </p:sp>
         <p:sp>
           <p:nvSpPr>
-            <p:cNvPr id="33" name="tx33"/>
+            <p:cNvPr id="34" name="tx34"/>
             <p:cNvSpPr/>
             <p:nvPr/>
           </p:nvSpPr>
           <p:spPr>
             <a:xfrm>
-              <a:off x="692708" y="3028808"/>
+              <a:off x="762297" y="2462242"/>
               <a:ext cx="62179" cy="80101"/>
             </a:xfrm>
             <a:prstGeom prst="rect">
@@ -5010,13 +5045,13 @@
         </p:sp>
         <p:sp>
           <p:nvSpPr>
-            <p:cNvPr id="34" name="tx34"/>
+            <p:cNvPr id="35" name="tx35"/>
             <p:cNvSpPr/>
             <p:nvPr/>
           </p:nvSpPr>
           <p:spPr>
             <a:xfrm>
-              <a:off x="692708" y="2199345"/>
+              <a:off x="762297" y="2162908"/>
               <a:ext cx="62179" cy="80101"/>
             </a:xfrm>
             <a:prstGeom prst="rect">
@@ -5056,13 +5091,13 @@
         </p:sp>
         <p:sp>
           <p:nvSpPr>
-            <p:cNvPr id="35" name="tx35"/>
+            <p:cNvPr id="36" name="tx36"/>
             <p:cNvSpPr/>
             <p:nvPr/>
           </p:nvSpPr>
           <p:spPr>
             <a:xfrm>
-              <a:off x="2152181" y="5785772"/>
+              <a:off x="2196512" y="3522791"/>
               <a:ext cx="161574" cy="80101"/>
             </a:xfrm>
             <a:prstGeom prst="rect">
@@ -5102,13 +5137,13 @@
         </p:sp>
         <p:sp>
           <p:nvSpPr>
-            <p:cNvPr id="36" name="tx36"/>
+            <p:cNvPr id="37" name="tx37"/>
             <p:cNvSpPr/>
             <p:nvPr/>
           </p:nvSpPr>
           <p:spPr>
             <a:xfrm>
-              <a:off x="3884104" y="5785772"/>
+              <a:off x="3897531" y="3522791"/>
               <a:ext cx="161574" cy="80101"/>
             </a:xfrm>
             <a:prstGeom prst="rect">
@@ -5148,13 +5183,13 @@
         </p:sp>
         <p:sp>
           <p:nvSpPr>
-            <p:cNvPr id="37" name="tx37"/>
+            <p:cNvPr id="38" name="tx38"/>
             <p:cNvSpPr/>
             <p:nvPr/>
           </p:nvSpPr>
           <p:spPr>
             <a:xfrm>
-              <a:off x="5665725" y="5785772"/>
+              <a:off x="5648248" y="3522791"/>
               <a:ext cx="62179" cy="80101"/>
             </a:xfrm>
             <a:prstGeom prst="rect">
@@ -5194,13 +5229,13 @@
         </p:sp>
         <p:sp>
           <p:nvSpPr>
-            <p:cNvPr id="38" name="tx38"/>
+            <p:cNvPr id="39" name="tx39"/>
             <p:cNvSpPr/>
             <p:nvPr/>
           </p:nvSpPr>
           <p:spPr>
             <a:xfrm>
-              <a:off x="7366559" y="5785772"/>
+              <a:off x="7318177" y="3522791"/>
               <a:ext cx="124358" cy="80101"/>
             </a:xfrm>
             <a:prstGeom prst="rect">
@@ -5240,13 +5275,13 @@
         </p:sp>
         <p:sp>
           <p:nvSpPr>
-            <p:cNvPr id="39" name="tx39"/>
+            <p:cNvPr id="40" name="tx40"/>
             <p:cNvSpPr/>
             <p:nvPr/>
           </p:nvSpPr>
           <p:spPr>
             <a:xfrm>
-              <a:off x="1561815" y="5925448"/>
+              <a:off x="1561815" y="3662467"/>
               <a:ext cx="6311097" cy="100218"/>
             </a:xfrm>
             <a:prstGeom prst="rect">
@@ -5286,13 +5321,13 @@
         </p:sp>
         <p:sp>
           <p:nvSpPr>
-            <p:cNvPr id="40" name="tx40"/>
+            <p:cNvPr id="41" name="tx41"/>
             <p:cNvSpPr/>
             <p:nvPr/>
           </p:nvSpPr>
           <p:spPr>
             <a:xfrm rot="-5400000">
-              <a:off x="68446" y="3848213"/>
+              <a:off x="138035" y="2751517"/>
               <a:ext cx="1016904" cy="100218"/>
             </a:xfrm>
             <a:prstGeom prst="rect">
@@ -5332,13 +5367,13 @@
         </p:sp>
         <p:sp>
           <p:nvSpPr>
-            <p:cNvPr id="41" name="tx41"/>
+            <p:cNvPr id="42" name="tx42"/>
             <p:cNvSpPr/>
             <p:nvPr/>
           </p:nvSpPr>
           <p:spPr>
             <a:xfrm>
-              <a:off x="817517" y="1896563"/>
+              <a:off x="887106" y="1966152"/>
               <a:ext cx="6959864" cy="82021"/>
             </a:xfrm>
             <a:prstGeom prst="rect">
@@ -5378,13 +5413,3789 @@
         </p:sp>
         <p:sp>
           <p:nvSpPr>
-            <p:cNvPr id="42" name="tx42"/>
+            <p:cNvPr id="43" name="tx43"/>
             <p:cNvSpPr/>
             <p:nvPr/>
           </p:nvSpPr>
           <p:spPr>
             <a:xfrm>
-              <a:off x="817517" y="1669789"/>
+              <a:off x="887106" y="1739378"/>
+              <a:ext cx="3528761" cy="120152"/>
+            </a:xfrm>
+            <a:prstGeom prst="rect">
+              <a:avLst/>
+            </a:prstGeom>
+            <a:noFill/>
+          </p:spPr>
+          <p:txBody>
+            <a:bodyPr lIns="0" rIns="0" tIns="0" bIns="0" anchorCtr="1" anchor="ctr" wrap="none"/>
+            <a:lstStyle/>
+            <a:p>
+              <a:pPr algn="l" marL="0" marR="0" indent="0">
+                <a:lnSpc>
+                  <a:spcPts val="1320"/>
+                </a:lnSpc>
+                <a:spcBef>
+                  <a:spcPts val="0"/>
+                </a:spcBef>
+                <a:spcAft>
+                  <a:spcPts val="0"/>
+                </a:spcAft>
+              </a:pPr>
+              <a:r>
+                <a:rPr sz="1320">
+                  <a:solidFill>
+                    <a:srgbClr val="000000">
+                      <a:alpha val="100000"/>
+                    </a:srgbClr>
+                  </a:solidFill>
+                  <a:latin typeface="Helvetica"/>
+                  <a:cs typeface="Helvetica"/>
+                </a:rPr>
+                <a:t>Overall Hospitalization (Sensitivity, Carboplatin)</a:t>
+              </a:r>
+            </a:p>
+          </p:txBody>
+        </p:sp>
+        <p:sp>
+          <p:nvSpPr>
+            <p:cNvPr id="44" name="pl44"/>
+            <p:cNvSpPr/>
+            <p:nvPr/>
+          </p:nvSpPr>
+          <p:spPr>
+            <a:xfrm>
+              <a:off x="887106" y="5444019"/>
+              <a:ext cx="7660515" cy="0"/>
+            </a:xfrm>
+            <a:custGeom>
+              <a:avLst/>
+              <a:pathLst>
+                <a:path w="7660515" h="0">
+                  <a:moveTo>
+                    <a:pt x="0" y="0"/>
+                  </a:moveTo>
+                  <a:lnTo>
+                    <a:pt x="7660515" y="0"/>
+                  </a:lnTo>
+                  <a:lnTo>
+                    <a:pt x="7660515" y="0"/>
+                  </a:lnTo>
+                </a:path>
+              </a:pathLst>
+            </a:custGeom>
+            <a:ln w="6775" cap="flat">
+              <a:solidFill>
+                <a:srgbClr val="EBEBEB">
+                  <a:alpha val="100000"/>
+                </a:srgbClr>
+              </a:solidFill>
+              <a:prstDash val="solid"/>
+              <a:round/>
+            </a:ln>
+          </p:spPr>
+          <p:txBody>
+            <a:bodyPr/>
+            <a:lstStyle/>
+            <a:p/>
+          </p:txBody>
+        </p:sp>
+        <p:sp>
+          <p:nvSpPr>
+            <p:cNvPr id="45" name="pl45"/>
+            <p:cNvSpPr/>
+            <p:nvPr/>
+          </p:nvSpPr>
+          <p:spPr>
+            <a:xfrm>
+              <a:off x="887106" y="5144686"/>
+              <a:ext cx="7660515" cy="0"/>
+            </a:xfrm>
+            <a:custGeom>
+              <a:avLst/>
+              <a:pathLst>
+                <a:path w="7660515" h="0">
+                  <a:moveTo>
+                    <a:pt x="0" y="0"/>
+                  </a:moveTo>
+                  <a:lnTo>
+                    <a:pt x="7660515" y="0"/>
+                  </a:lnTo>
+                  <a:lnTo>
+                    <a:pt x="7660515" y="0"/>
+                  </a:lnTo>
+                </a:path>
+              </a:pathLst>
+            </a:custGeom>
+            <a:ln w="6775" cap="flat">
+              <a:solidFill>
+                <a:srgbClr val="EBEBEB">
+                  <a:alpha val="100000"/>
+                </a:srgbClr>
+              </a:solidFill>
+              <a:prstDash val="solid"/>
+              <a:round/>
+            </a:ln>
+          </p:spPr>
+          <p:txBody>
+            <a:bodyPr/>
+            <a:lstStyle/>
+            <a:p/>
+          </p:txBody>
+        </p:sp>
+        <p:sp>
+          <p:nvSpPr>
+            <p:cNvPr id="46" name="pl46"/>
+            <p:cNvSpPr/>
+            <p:nvPr/>
+          </p:nvSpPr>
+          <p:spPr>
+            <a:xfrm>
+              <a:off x="887106" y="4845352"/>
+              <a:ext cx="7660515" cy="0"/>
+            </a:xfrm>
+            <a:custGeom>
+              <a:avLst/>
+              <a:pathLst>
+                <a:path w="7660515" h="0">
+                  <a:moveTo>
+                    <a:pt x="0" y="0"/>
+                  </a:moveTo>
+                  <a:lnTo>
+                    <a:pt x="7660515" y="0"/>
+                  </a:lnTo>
+                  <a:lnTo>
+                    <a:pt x="7660515" y="0"/>
+                  </a:lnTo>
+                </a:path>
+              </a:pathLst>
+            </a:custGeom>
+            <a:ln w="6775" cap="flat">
+              <a:solidFill>
+                <a:srgbClr val="EBEBEB">
+                  <a:alpha val="100000"/>
+                </a:srgbClr>
+              </a:solidFill>
+              <a:prstDash val="solid"/>
+              <a:round/>
+            </a:ln>
+          </p:spPr>
+          <p:txBody>
+            <a:bodyPr/>
+            <a:lstStyle/>
+            <a:p/>
+          </p:txBody>
+        </p:sp>
+        <p:sp>
+          <p:nvSpPr>
+            <p:cNvPr id="47" name="pl47"/>
+            <p:cNvSpPr/>
+            <p:nvPr/>
+          </p:nvSpPr>
+          <p:spPr>
+            <a:xfrm>
+              <a:off x="887106" y="4546018"/>
+              <a:ext cx="7660515" cy="0"/>
+            </a:xfrm>
+            <a:custGeom>
+              <a:avLst/>
+              <a:pathLst>
+                <a:path w="7660515" h="0">
+                  <a:moveTo>
+                    <a:pt x="0" y="0"/>
+                  </a:moveTo>
+                  <a:lnTo>
+                    <a:pt x="7660515" y="0"/>
+                  </a:lnTo>
+                  <a:lnTo>
+                    <a:pt x="7660515" y="0"/>
+                  </a:lnTo>
+                </a:path>
+              </a:pathLst>
+            </a:custGeom>
+            <a:ln w="6775" cap="flat">
+              <a:solidFill>
+                <a:srgbClr val="EBEBEB">
+                  <a:alpha val="100000"/>
+                </a:srgbClr>
+              </a:solidFill>
+              <a:prstDash val="solid"/>
+              <a:round/>
+            </a:ln>
+          </p:spPr>
+          <p:txBody>
+            <a:bodyPr/>
+            <a:lstStyle/>
+            <a:p/>
+          </p:txBody>
+        </p:sp>
+        <p:sp>
+          <p:nvSpPr>
+            <p:cNvPr id="48" name="pl48"/>
+            <p:cNvSpPr/>
+            <p:nvPr/>
+          </p:nvSpPr>
+          <p:spPr>
+            <a:xfrm>
+              <a:off x="1001535" y="4336484"/>
+              <a:ext cx="0" cy="1317069"/>
+            </a:xfrm>
+            <a:custGeom>
+              <a:avLst/>
+              <a:pathLst>
+                <a:path w="0" h="1317069">
+                  <a:moveTo>
+                    <a:pt x="0" y="1317069"/>
+                  </a:moveTo>
+                  <a:lnTo>
+                    <a:pt x="0" y="0"/>
+                  </a:lnTo>
+                  <a:lnTo>
+                    <a:pt x="0" y="0"/>
+                  </a:lnTo>
+                </a:path>
+              </a:pathLst>
+            </a:custGeom>
+            <a:ln w="6775" cap="flat">
+              <a:solidFill>
+                <a:srgbClr val="EBEBEB">
+                  <a:alpha val="100000"/>
+                </a:srgbClr>
+              </a:solidFill>
+              <a:prstDash val="solid"/>
+              <a:round/>
+            </a:ln>
+          </p:spPr>
+          <p:txBody>
+            <a:bodyPr/>
+            <a:lstStyle/>
+            <a:p/>
+          </p:txBody>
+        </p:sp>
+        <p:sp>
+          <p:nvSpPr>
+            <p:cNvPr id="49" name="pl49"/>
+            <p:cNvSpPr/>
+            <p:nvPr/>
+          </p:nvSpPr>
+          <p:spPr>
+            <a:xfrm>
+              <a:off x="1852045" y="4336484"/>
+              <a:ext cx="0" cy="1317069"/>
+            </a:xfrm>
+            <a:custGeom>
+              <a:avLst/>
+              <a:pathLst>
+                <a:path w="0" h="1317069">
+                  <a:moveTo>
+                    <a:pt x="0" y="1317069"/>
+                  </a:moveTo>
+                  <a:lnTo>
+                    <a:pt x="0" y="0"/>
+                  </a:lnTo>
+                  <a:lnTo>
+                    <a:pt x="0" y="0"/>
+                  </a:lnTo>
+                </a:path>
+              </a:pathLst>
+            </a:custGeom>
+            <a:ln w="6775" cap="flat">
+              <a:solidFill>
+                <a:srgbClr val="EBEBEB">
+                  <a:alpha val="100000"/>
+                </a:srgbClr>
+              </a:solidFill>
+              <a:prstDash val="solid"/>
+              <a:round/>
+            </a:ln>
+          </p:spPr>
+          <p:txBody>
+            <a:bodyPr/>
+            <a:lstStyle/>
+            <a:p/>
+          </p:txBody>
+        </p:sp>
+        <p:sp>
+          <p:nvSpPr>
+            <p:cNvPr id="50" name="pl50"/>
+            <p:cNvSpPr/>
+            <p:nvPr/>
+          </p:nvSpPr>
+          <p:spPr>
+            <a:xfrm>
+              <a:off x="2702554" y="4336484"/>
+              <a:ext cx="0" cy="1317069"/>
+            </a:xfrm>
+            <a:custGeom>
+              <a:avLst/>
+              <a:pathLst>
+                <a:path w="0" h="1317069">
+                  <a:moveTo>
+                    <a:pt x="0" y="1317069"/>
+                  </a:moveTo>
+                  <a:lnTo>
+                    <a:pt x="0" y="0"/>
+                  </a:lnTo>
+                  <a:lnTo>
+                    <a:pt x="0" y="0"/>
+                  </a:lnTo>
+                </a:path>
+              </a:pathLst>
+            </a:custGeom>
+            <a:ln w="6775" cap="flat">
+              <a:solidFill>
+                <a:srgbClr val="EBEBEB">
+                  <a:alpha val="100000"/>
+                </a:srgbClr>
+              </a:solidFill>
+              <a:prstDash val="solid"/>
+              <a:round/>
+            </a:ln>
+          </p:spPr>
+          <p:txBody>
+            <a:bodyPr/>
+            <a:lstStyle/>
+            <a:p/>
+          </p:txBody>
+        </p:sp>
+        <p:sp>
+          <p:nvSpPr>
+            <p:cNvPr id="51" name="pl51"/>
+            <p:cNvSpPr/>
+            <p:nvPr/>
+          </p:nvSpPr>
+          <p:spPr>
+            <a:xfrm>
+              <a:off x="3553064" y="4336484"/>
+              <a:ext cx="0" cy="1317069"/>
+            </a:xfrm>
+            <a:custGeom>
+              <a:avLst/>
+              <a:pathLst>
+                <a:path w="0" h="1317069">
+                  <a:moveTo>
+                    <a:pt x="0" y="1317069"/>
+                  </a:moveTo>
+                  <a:lnTo>
+                    <a:pt x="0" y="0"/>
+                  </a:lnTo>
+                  <a:lnTo>
+                    <a:pt x="0" y="0"/>
+                  </a:lnTo>
+                </a:path>
+              </a:pathLst>
+            </a:custGeom>
+            <a:ln w="6775" cap="flat">
+              <a:solidFill>
+                <a:srgbClr val="EBEBEB">
+                  <a:alpha val="100000"/>
+                </a:srgbClr>
+              </a:solidFill>
+              <a:prstDash val="solid"/>
+              <a:round/>
+            </a:ln>
+          </p:spPr>
+          <p:txBody>
+            <a:bodyPr/>
+            <a:lstStyle/>
+            <a:p/>
+          </p:txBody>
+        </p:sp>
+        <p:sp>
+          <p:nvSpPr>
+            <p:cNvPr id="52" name="pl52"/>
+            <p:cNvSpPr/>
+            <p:nvPr/>
+          </p:nvSpPr>
+          <p:spPr>
+            <a:xfrm>
+              <a:off x="4403573" y="4336484"/>
+              <a:ext cx="0" cy="1317069"/>
+            </a:xfrm>
+            <a:custGeom>
+              <a:avLst/>
+              <a:pathLst>
+                <a:path w="0" h="1317069">
+                  <a:moveTo>
+                    <a:pt x="0" y="1317069"/>
+                  </a:moveTo>
+                  <a:lnTo>
+                    <a:pt x="0" y="0"/>
+                  </a:lnTo>
+                  <a:lnTo>
+                    <a:pt x="0" y="0"/>
+                  </a:lnTo>
+                </a:path>
+              </a:pathLst>
+            </a:custGeom>
+            <a:ln w="6775" cap="flat">
+              <a:solidFill>
+                <a:srgbClr val="EBEBEB">
+                  <a:alpha val="100000"/>
+                </a:srgbClr>
+              </a:solidFill>
+              <a:prstDash val="solid"/>
+              <a:round/>
+            </a:ln>
+          </p:spPr>
+          <p:txBody>
+            <a:bodyPr/>
+            <a:lstStyle/>
+            <a:p/>
+          </p:txBody>
+        </p:sp>
+        <p:sp>
+          <p:nvSpPr>
+            <p:cNvPr id="53" name="pl53"/>
+            <p:cNvSpPr/>
+            <p:nvPr/>
+          </p:nvSpPr>
+          <p:spPr>
+            <a:xfrm>
+              <a:off x="5254082" y="4336484"/>
+              <a:ext cx="0" cy="1317069"/>
+            </a:xfrm>
+            <a:custGeom>
+              <a:avLst/>
+              <a:pathLst>
+                <a:path w="0" h="1317069">
+                  <a:moveTo>
+                    <a:pt x="0" y="1317069"/>
+                  </a:moveTo>
+                  <a:lnTo>
+                    <a:pt x="0" y="0"/>
+                  </a:lnTo>
+                  <a:lnTo>
+                    <a:pt x="0" y="0"/>
+                  </a:lnTo>
+                </a:path>
+              </a:pathLst>
+            </a:custGeom>
+            <a:ln w="6775" cap="flat">
+              <a:solidFill>
+                <a:srgbClr val="EBEBEB">
+                  <a:alpha val="100000"/>
+                </a:srgbClr>
+              </a:solidFill>
+              <a:prstDash val="solid"/>
+              <a:round/>
+            </a:ln>
+          </p:spPr>
+          <p:txBody>
+            <a:bodyPr/>
+            <a:lstStyle/>
+            <a:p/>
+          </p:txBody>
+        </p:sp>
+        <p:sp>
+          <p:nvSpPr>
+            <p:cNvPr id="54" name="pl54"/>
+            <p:cNvSpPr/>
+            <p:nvPr/>
+          </p:nvSpPr>
+          <p:spPr>
+            <a:xfrm>
+              <a:off x="6104592" y="4336484"/>
+              <a:ext cx="0" cy="1317069"/>
+            </a:xfrm>
+            <a:custGeom>
+              <a:avLst/>
+              <a:pathLst>
+                <a:path w="0" h="1317069">
+                  <a:moveTo>
+                    <a:pt x="0" y="1317069"/>
+                  </a:moveTo>
+                  <a:lnTo>
+                    <a:pt x="0" y="0"/>
+                  </a:lnTo>
+                  <a:lnTo>
+                    <a:pt x="0" y="0"/>
+                  </a:lnTo>
+                </a:path>
+              </a:pathLst>
+            </a:custGeom>
+            <a:ln w="6775" cap="flat">
+              <a:solidFill>
+                <a:srgbClr val="EBEBEB">
+                  <a:alpha val="100000"/>
+                </a:srgbClr>
+              </a:solidFill>
+              <a:prstDash val="solid"/>
+              <a:round/>
+            </a:ln>
+          </p:spPr>
+          <p:txBody>
+            <a:bodyPr/>
+            <a:lstStyle/>
+            <a:p/>
+          </p:txBody>
+        </p:sp>
+        <p:sp>
+          <p:nvSpPr>
+            <p:cNvPr id="55" name="pl55"/>
+            <p:cNvSpPr/>
+            <p:nvPr/>
+          </p:nvSpPr>
+          <p:spPr>
+            <a:xfrm>
+              <a:off x="6955101" y="4336484"/>
+              <a:ext cx="0" cy="1317069"/>
+            </a:xfrm>
+            <a:custGeom>
+              <a:avLst/>
+              <a:pathLst>
+                <a:path w="0" h="1317069">
+                  <a:moveTo>
+                    <a:pt x="0" y="1317069"/>
+                  </a:moveTo>
+                  <a:lnTo>
+                    <a:pt x="0" y="0"/>
+                  </a:lnTo>
+                  <a:lnTo>
+                    <a:pt x="0" y="0"/>
+                  </a:lnTo>
+                </a:path>
+              </a:pathLst>
+            </a:custGeom>
+            <a:ln w="6775" cap="flat">
+              <a:solidFill>
+                <a:srgbClr val="EBEBEB">
+                  <a:alpha val="100000"/>
+                </a:srgbClr>
+              </a:solidFill>
+              <a:prstDash val="solid"/>
+              <a:round/>
+            </a:ln>
+          </p:spPr>
+          <p:txBody>
+            <a:bodyPr/>
+            <a:lstStyle/>
+            <a:p/>
+          </p:txBody>
+        </p:sp>
+        <p:sp>
+          <p:nvSpPr>
+            <p:cNvPr id="56" name="pl56"/>
+            <p:cNvSpPr/>
+            <p:nvPr/>
+          </p:nvSpPr>
+          <p:spPr>
+            <a:xfrm>
+              <a:off x="7805611" y="4336484"/>
+              <a:ext cx="0" cy="1317069"/>
+            </a:xfrm>
+            <a:custGeom>
+              <a:avLst/>
+              <a:pathLst>
+                <a:path w="0" h="1317069">
+                  <a:moveTo>
+                    <a:pt x="0" y="1317069"/>
+                  </a:moveTo>
+                  <a:lnTo>
+                    <a:pt x="0" y="0"/>
+                  </a:lnTo>
+                  <a:lnTo>
+                    <a:pt x="0" y="0"/>
+                  </a:lnTo>
+                </a:path>
+              </a:pathLst>
+            </a:custGeom>
+            <a:ln w="6775" cap="flat">
+              <a:solidFill>
+                <a:srgbClr val="EBEBEB">
+                  <a:alpha val="100000"/>
+                </a:srgbClr>
+              </a:solidFill>
+              <a:prstDash val="solid"/>
+              <a:round/>
+            </a:ln>
+          </p:spPr>
+          <p:txBody>
+            <a:bodyPr/>
+            <a:lstStyle/>
+            <a:p/>
+          </p:txBody>
+        </p:sp>
+        <p:sp>
+          <p:nvSpPr>
+            <p:cNvPr id="57" name="pl57"/>
+            <p:cNvSpPr/>
+            <p:nvPr/>
+          </p:nvSpPr>
+          <p:spPr>
+            <a:xfrm>
+              <a:off x="887106" y="5593686"/>
+              <a:ext cx="7660515" cy="0"/>
+            </a:xfrm>
+            <a:custGeom>
+              <a:avLst/>
+              <a:pathLst>
+                <a:path w="7660515" h="0">
+                  <a:moveTo>
+                    <a:pt x="0" y="0"/>
+                  </a:moveTo>
+                  <a:lnTo>
+                    <a:pt x="7660515" y="0"/>
+                  </a:lnTo>
+                  <a:lnTo>
+                    <a:pt x="7660515" y="0"/>
+                  </a:lnTo>
+                </a:path>
+              </a:pathLst>
+            </a:custGeom>
+            <a:ln w="13550" cap="flat">
+              <a:solidFill>
+                <a:srgbClr val="EBEBEB">
+                  <a:alpha val="100000"/>
+                </a:srgbClr>
+              </a:solidFill>
+              <a:prstDash val="solid"/>
+              <a:round/>
+            </a:ln>
+          </p:spPr>
+          <p:txBody>
+            <a:bodyPr/>
+            <a:lstStyle/>
+            <a:p/>
+          </p:txBody>
+        </p:sp>
+        <p:sp>
+          <p:nvSpPr>
+            <p:cNvPr id="58" name="pl58"/>
+            <p:cNvSpPr/>
+            <p:nvPr/>
+          </p:nvSpPr>
+          <p:spPr>
+            <a:xfrm>
+              <a:off x="887106" y="5294352"/>
+              <a:ext cx="7660515" cy="0"/>
+            </a:xfrm>
+            <a:custGeom>
+              <a:avLst/>
+              <a:pathLst>
+                <a:path w="7660515" h="0">
+                  <a:moveTo>
+                    <a:pt x="0" y="0"/>
+                  </a:moveTo>
+                  <a:lnTo>
+                    <a:pt x="7660515" y="0"/>
+                  </a:lnTo>
+                  <a:lnTo>
+                    <a:pt x="7660515" y="0"/>
+                  </a:lnTo>
+                </a:path>
+              </a:pathLst>
+            </a:custGeom>
+            <a:ln w="13550" cap="flat">
+              <a:solidFill>
+                <a:srgbClr val="EBEBEB">
+                  <a:alpha val="100000"/>
+                </a:srgbClr>
+              </a:solidFill>
+              <a:prstDash val="solid"/>
+              <a:round/>
+            </a:ln>
+          </p:spPr>
+          <p:txBody>
+            <a:bodyPr/>
+            <a:lstStyle/>
+            <a:p/>
+          </p:txBody>
+        </p:sp>
+        <p:sp>
+          <p:nvSpPr>
+            <p:cNvPr id="59" name="pl59"/>
+            <p:cNvSpPr/>
+            <p:nvPr/>
+          </p:nvSpPr>
+          <p:spPr>
+            <a:xfrm>
+              <a:off x="887106" y="4995019"/>
+              <a:ext cx="7660515" cy="0"/>
+            </a:xfrm>
+            <a:custGeom>
+              <a:avLst/>
+              <a:pathLst>
+                <a:path w="7660515" h="0">
+                  <a:moveTo>
+                    <a:pt x="0" y="0"/>
+                  </a:moveTo>
+                  <a:lnTo>
+                    <a:pt x="7660515" y="0"/>
+                  </a:lnTo>
+                  <a:lnTo>
+                    <a:pt x="7660515" y="0"/>
+                  </a:lnTo>
+                </a:path>
+              </a:pathLst>
+            </a:custGeom>
+            <a:ln w="13550" cap="flat">
+              <a:solidFill>
+                <a:srgbClr val="EBEBEB">
+                  <a:alpha val="100000"/>
+                </a:srgbClr>
+              </a:solidFill>
+              <a:prstDash val="solid"/>
+              <a:round/>
+            </a:ln>
+          </p:spPr>
+          <p:txBody>
+            <a:bodyPr/>
+            <a:lstStyle/>
+            <a:p/>
+          </p:txBody>
+        </p:sp>
+        <p:sp>
+          <p:nvSpPr>
+            <p:cNvPr id="60" name="pl60"/>
+            <p:cNvSpPr/>
+            <p:nvPr/>
+          </p:nvSpPr>
+          <p:spPr>
+            <a:xfrm>
+              <a:off x="887106" y="4695685"/>
+              <a:ext cx="7660515" cy="0"/>
+            </a:xfrm>
+            <a:custGeom>
+              <a:avLst/>
+              <a:pathLst>
+                <a:path w="7660515" h="0">
+                  <a:moveTo>
+                    <a:pt x="0" y="0"/>
+                  </a:moveTo>
+                  <a:lnTo>
+                    <a:pt x="7660515" y="0"/>
+                  </a:lnTo>
+                  <a:lnTo>
+                    <a:pt x="7660515" y="0"/>
+                  </a:lnTo>
+                </a:path>
+              </a:pathLst>
+            </a:custGeom>
+            <a:ln w="13550" cap="flat">
+              <a:solidFill>
+                <a:srgbClr val="EBEBEB">
+                  <a:alpha val="100000"/>
+                </a:srgbClr>
+              </a:solidFill>
+              <a:prstDash val="solid"/>
+              <a:round/>
+            </a:ln>
+          </p:spPr>
+          <p:txBody>
+            <a:bodyPr/>
+            <a:lstStyle/>
+            <a:p/>
+          </p:txBody>
+        </p:sp>
+        <p:sp>
+          <p:nvSpPr>
+            <p:cNvPr id="61" name="pl61"/>
+            <p:cNvSpPr/>
+            <p:nvPr/>
+          </p:nvSpPr>
+          <p:spPr>
+            <a:xfrm>
+              <a:off x="887106" y="4396351"/>
+              <a:ext cx="7660515" cy="0"/>
+            </a:xfrm>
+            <a:custGeom>
+              <a:avLst/>
+              <a:pathLst>
+                <a:path w="7660515" h="0">
+                  <a:moveTo>
+                    <a:pt x="0" y="0"/>
+                  </a:moveTo>
+                  <a:lnTo>
+                    <a:pt x="7660515" y="0"/>
+                  </a:lnTo>
+                  <a:lnTo>
+                    <a:pt x="7660515" y="0"/>
+                  </a:lnTo>
+                </a:path>
+              </a:pathLst>
+            </a:custGeom>
+            <a:ln w="13550" cap="flat">
+              <a:solidFill>
+                <a:srgbClr val="EBEBEB">
+                  <a:alpha val="100000"/>
+                </a:srgbClr>
+              </a:solidFill>
+              <a:prstDash val="solid"/>
+              <a:round/>
+            </a:ln>
+          </p:spPr>
+          <p:txBody>
+            <a:bodyPr/>
+            <a:lstStyle/>
+            <a:p/>
+          </p:txBody>
+        </p:sp>
+        <p:sp>
+          <p:nvSpPr>
+            <p:cNvPr id="62" name="pl62"/>
+            <p:cNvSpPr/>
+            <p:nvPr/>
+          </p:nvSpPr>
+          <p:spPr>
+            <a:xfrm>
+              <a:off x="1426790" y="4336484"/>
+              <a:ext cx="0" cy="1317069"/>
+            </a:xfrm>
+            <a:custGeom>
+              <a:avLst/>
+              <a:pathLst>
+                <a:path w="0" h="1317069">
+                  <a:moveTo>
+                    <a:pt x="0" y="1317069"/>
+                  </a:moveTo>
+                  <a:lnTo>
+                    <a:pt x="0" y="0"/>
+                  </a:lnTo>
+                  <a:lnTo>
+                    <a:pt x="0" y="0"/>
+                  </a:lnTo>
+                </a:path>
+              </a:pathLst>
+            </a:custGeom>
+            <a:ln w="13550" cap="flat">
+              <a:solidFill>
+                <a:srgbClr val="EBEBEB">
+                  <a:alpha val="100000"/>
+                </a:srgbClr>
+              </a:solidFill>
+              <a:prstDash val="solid"/>
+              <a:round/>
+            </a:ln>
+          </p:spPr>
+          <p:txBody>
+            <a:bodyPr/>
+            <a:lstStyle/>
+            <a:p/>
+          </p:txBody>
+        </p:sp>
+        <p:sp>
+          <p:nvSpPr>
+            <p:cNvPr id="63" name="pl63"/>
+            <p:cNvSpPr/>
+            <p:nvPr/>
+          </p:nvSpPr>
+          <p:spPr>
+            <a:xfrm>
+              <a:off x="2277299" y="4336484"/>
+              <a:ext cx="0" cy="1317069"/>
+            </a:xfrm>
+            <a:custGeom>
+              <a:avLst/>
+              <a:pathLst>
+                <a:path w="0" h="1317069">
+                  <a:moveTo>
+                    <a:pt x="0" y="1317069"/>
+                  </a:moveTo>
+                  <a:lnTo>
+                    <a:pt x="0" y="0"/>
+                  </a:lnTo>
+                  <a:lnTo>
+                    <a:pt x="0" y="0"/>
+                  </a:lnTo>
+                </a:path>
+              </a:pathLst>
+            </a:custGeom>
+            <a:ln w="13550" cap="flat">
+              <a:solidFill>
+                <a:srgbClr val="EBEBEB">
+                  <a:alpha val="100000"/>
+                </a:srgbClr>
+              </a:solidFill>
+              <a:prstDash val="solid"/>
+              <a:round/>
+            </a:ln>
+          </p:spPr>
+          <p:txBody>
+            <a:bodyPr/>
+            <a:lstStyle/>
+            <a:p/>
+          </p:txBody>
+        </p:sp>
+        <p:sp>
+          <p:nvSpPr>
+            <p:cNvPr id="64" name="pl64"/>
+            <p:cNvSpPr/>
+            <p:nvPr/>
+          </p:nvSpPr>
+          <p:spPr>
+            <a:xfrm>
+              <a:off x="3127809" y="4336484"/>
+              <a:ext cx="0" cy="1317069"/>
+            </a:xfrm>
+            <a:custGeom>
+              <a:avLst/>
+              <a:pathLst>
+                <a:path w="0" h="1317069">
+                  <a:moveTo>
+                    <a:pt x="0" y="1317069"/>
+                  </a:moveTo>
+                  <a:lnTo>
+                    <a:pt x="0" y="0"/>
+                  </a:lnTo>
+                  <a:lnTo>
+                    <a:pt x="0" y="0"/>
+                  </a:lnTo>
+                </a:path>
+              </a:pathLst>
+            </a:custGeom>
+            <a:ln w="13550" cap="flat">
+              <a:solidFill>
+                <a:srgbClr val="EBEBEB">
+                  <a:alpha val="100000"/>
+                </a:srgbClr>
+              </a:solidFill>
+              <a:prstDash val="solid"/>
+              <a:round/>
+            </a:ln>
+          </p:spPr>
+          <p:txBody>
+            <a:bodyPr/>
+            <a:lstStyle/>
+            <a:p/>
+          </p:txBody>
+        </p:sp>
+        <p:sp>
+          <p:nvSpPr>
+            <p:cNvPr id="65" name="pl65"/>
+            <p:cNvSpPr/>
+            <p:nvPr/>
+          </p:nvSpPr>
+          <p:spPr>
+            <a:xfrm>
+              <a:off x="3978318" y="4336484"/>
+              <a:ext cx="0" cy="1317069"/>
+            </a:xfrm>
+            <a:custGeom>
+              <a:avLst/>
+              <a:pathLst>
+                <a:path w="0" h="1317069">
+                  <a:moveTo>
+                    <a:pt x="0" y="1317069"/>
+                  </a:moveTo>
+                  <a:lnTo>
+                    <a:pt x="0" y="0"/>
+                  </a:lnTo>
+                  <a:lnTo>
+                    <a:pt x="0" y="0"/>
+                  </a:lnTo>
+                </a:path>
+              </a:pathLst>
+            </a:custGeom>
+            <a:ln w="13550" cap="flat">
+              <a:solidFill>
+                <a:srgbClr val="EBEBEB">
+                  <a:alpha val="100000"/>
+                </a:srgbClr>
+              </a:solidFill>
+              <a:prstDash val="solid"/>
+              <a:round/>
+            </a:ln>
+          </p:spPr>
+          <p:txBody>
+            <a:bodyPr/>
+            <a:lstStyle/>
+            <a:p/>
+          </p:txBody>
+        </p:sp>
+        <p:sp>
+          <p:nvSpPr>
+            <p:cNvPr id="66" name="pl66"/>
+            <p:cNvSpPr/>
+            <p:nvPr/>
+          </p:nvSpPr>
+          <p:spPr>
+            <a:xfrm>
+              <a:off x="4828828" y="4336484"/>
+              <a:ext cx="0" cy="1317069"/>
+            </a:xfrm>
+            <a:custGeom>
+              <a:avLst/>
+              <a:pathLst>
+                <a:path w="0" h="1317069">
+                  <a:moveTo>
+                    <a:pt x="0" y="1317069"/>
+                  </a:moveTo>
+                  <a:lnTo>
+                    <a:pt x="0" y="0"/>
+                  </a:lnTo>
+                  <a:lnTo>
+                    <a:pt x="0" y="0"/>
+                  </a:lnTo>
+                </a:path>
+              </a:pathLst>
+            </a:custGeom>
+            <a:ln w="13550" cap="flat">
+              <a:solidFill>
+                <a:srgbClr val="EBEBEB">
+                  <a:alpha val="100000"/>
+                </a:srgbClr>
+              </a:solidFill>
+              <a:prstDash val="solid"/>
+              <a:round/>
+            </a:ln>
+          </p:spPr>
+          <p:txBody>
+            <a:bodyPr/>
+            <a:lstStyle/>
+            <a:p/>
+          </p:txBody>
+        </p:sp>
+        <p:sp>
+          <p:nvSpPr>
+            <p:cNvPr id="67" name="pl67"/>
+            <p:cNvSpPr/>
+            <p:nvPr/>
+          </p:nvSpPr>
+          <p:spPr>
+            <a:xfrm>
+              <a:off x="5679337" y="4336484"/>
+              <a:ext cx="0" cy="1317069"/>
+            </a:xfrm>
+            <a:custGeom>
+              <a:avLst/>
+              <a:pathLst>
+                <a:path w="0" h="1317069">
+                  <a:moveTo>
+                    <a:pt x="0" y="1317069"/>
+                  </a:moveTo>
+                  <a:lnTo>
+                    <a:pt x="0" y="0"/>
+                  </a:lnTo>
+                  <a:lnTo>
+                    <a:pt x="0" y="0"/>
+                  </a:lnTo>
+                </a:path>
+              </a:pathLst>
+            </a:custGeom>
+            <a:ln w="13550" cap="flat">
+              <a:solidFill>
+                <a:srgbClr val="EBEBEB">
+                  <a:alpha val="100000"/>
+                </a:srgbClr>
+              </a:solidFill>
+              <a:prstDash val="solid"/>
+              <a:round/>
+            </a:ln>
+          </p:spPr>
+          <p:txBody>
+            <a:bodyPr/>
+            <a:lstStyle/>
+            <a:p/>
+          </p:txBody>
+        </p:sp>
+        <p:sp>
+          <p:nvSpPr>
+            <p:cNvPr id="68" name="pl68"/>
+            <p:cNvSpPr/>
+            <p:nvPr/>
+          </p:nvSpPr>
+          <p:spPr>
+            <a:xfrm>
+              <a:off x="6529847" y="4336484"/>
+              <a:ext cx="0" cy="1317069"/>
+            </a:xfrm>
+            <a:custGeom>
+              <a:avLst/>
+              <a:pathLst>
+                <a:path w="0" h="1317069">
+                  <a:moveTo>
+                    <a:pt x="0" y="1317069"/>
+                  </a:moveTo>
+                  <a:lnTo>
+                    <a:pt x="0" y="0"/>
+                  </a:lnTo>
+                  <a:lnTo>
+                    <a:pt x="0" y="0"/>
+                  </a:lnTo>
+                </a:path>
+              </a:pathLst>
+            </a:custGeom>
+            <a:ln w="13550" cap="flat">
+              <a:solidFill>
+                <a:srgbClr val="EBEBEB">
+                  <a:alpha val="100000"/>
+                </a:srgbClr>
+              </a:solidFill>
+              <a:prstDash val="solid"/>
+              <a:round/>
+            </a:ln>
+          </p:spPr>
+          <p:txBody>
+            <a:bodyPr/>
+            <a:lstStyle/>
+            <a:p/>
+          </p:txBody>
+        </p:sp>
+        <p:sp>
+          <p:nvSpPr>
+            <p:cNvPr id="69" name="pl69"/>
+            <p:cNvSpPr/>
+            <p:nvPr/>
+          </p:nvSpPr>
+          <p:spPr>
+            <a:xfrm>
+              <a:off x="7380356" y="4336484"/>
+              <a:ext cx="0" cy="1317069"/>
+            </a:xfrm>
+            <a:custGeom>
+              <a:avLst/>
+              <a:pathLst>
+                <a:path w="0" h="1317069">
+                  <a:moveTo>
+                    <a:pt x="0" y="1317069"/>
+                  </a:moveTo>
+                  <a:lnTo>
+                    <a:pt x="0" y="0"/>
+                  </a:lnTo>
+                  <a:lnTo>
+                    <a:pt x="0" y="0"/>
+                  </a:lnTo>
+                </a:path>
+              </a:pathLst>
+            </a:custGeom>
+            <a:ln w="13550" cap="flat">
+              <a:solidFill>
+                <a:srgbClr val="EBEBEB">
+                  <a:alpha val="100000"/>
+                </a:srgbClr>
+              </a:solidFill>
+              <a:prstDash val="solid"/>
+              <a:round/>
+            </a:ln>
+          </p:spPr>
+          <p:txBody>
+            <a:bodyPr/>
+            <a:lstStyle/>
+            <a:p/>
+          </p:txBody>
+        </p:sp>
+        <p:sp>
+          <p:nvSpPr>
+            <p:cNvPr id="70" name="pl70"/>
+            <p:cNvSpPr/>
+            <p:nvPr/>
+          </p:nvSpPr>
+          <p:spPr>
+            <a:xfrm>
+              <a:off x="8230866" y="4336484"/>
+              <a:ext cx="0" cy="1317069"/>
+            </a:xfrm>
+            <a:custGeom>
+              <a:avLst/>
+              <a:pathLst>
+                <a:path w="0" h="1317069">
+                  <a:moveTo>
+                    <a:pt x="0" y="1317069"/>
+                  </a:moveTo>
+                  <a:lnTo>
+                    <a:pt x="0" y="0"/>
+                  </a:lnTo>
+                  <a:lnTo>
+                    <a:pt x="0" y="0"/>
+                  </a:lnTo>
+                </a:path>
+              </a:pathLst>
+            </a:custGeom>
+            <a:ln w="13550" cap="flat">
+              <a:solidFill>
+                <a:srgbClr val="EBEBEB">
+                  <a:alpha val="100000"/>
+                </a:srgbClr>
+              </a:solidFill>
+              <a:prstDash val="solid"/>
+              <a:round/>
+            </a:ln>
+          </p:spPr>
+          <p:txBody>
+            <a:bodyPr/>
+            <a:lstStyle/>
+            <a:p/>
+          </p:txBody>
+        </p:sp>
+        <p:sp>
+          <p:nvSpPr>
+            <p:cNvPr id="71" name="pg71"/>
+            <p:cNvSpPr/>
+            <p:nvPr/>
+          </p:nvSpPr>
+          <p:spPr>
+            <a:xfrm>
+              <a:off x="1235312" y="4995944"/>
+              <a:ext cx="6964104" cy="474057"/>
+            </a:xfrm>
+            <a:custGeom>
+              <a:avLst/>
+              <a:pathLst>
+                <a:path w="6964104" h="474057">
+                  <a:moveTo>
+                    <a:pt x="0" y="0"/>
+                  </a:moveTo>
+                  <a:lnTo>
+                    <a:pt x="70344" y="9436"/>
+                  </a:lnTo>
+                  <a:lnTo>
+                    <a:pt x="140688" y="18724"/>
+                  </a:lnTo>
+                  <a:lnTo>
+                    <a:pt x="211033" y="27865"/>
+                  </a:lnTo>
+                  <a:lnTo>
+                    <a:pt x="281377" y="36862"/>
+                  </a:lnTo>
+                  <a:lnTo>
+                    <a:pt x="351722" y="45717"/>
+                  </a:lnTo>
+                  <a:lnTo>
+                    <a:pt x="422066" y="54432"/>
+                  </a:lnTo>
+                  <a:lnTo>
+                    <a:pt x="492411" y="63010"/>
+                  </a:lnTo>
+                  <a:lnTo>
+                    <a:pt x="562755" y="71452"/>
+                  </a:lnTo>
+                  <a:lnTo>
+                    <a:pt x="633100" y="79760"/>
+                  </a:lnTo>
+                  <a:lnTo>
+                    <a:pt x="703444" y="87938"/>
+                  </a:lnTo>
+                  <a:lnTo>
+                    <a:pt x="773789" y="95987"/>
+                  </a:lnTo>
+                  <a:lnTo>
+                    <a:pt x="844133" y="103908"/>
+                  </a:lnTo>
+                  <a:lnTo>
+                    <a:pt x="914478" y="111704"/>
+                  </a:lnTo>
+                  <a:lnTo>
+                    <a:pt x="984822" y="119378"/>
+                  </a:lnTo>
+                  <a:lnTo>
+                    <a:pt x="1055167" y="126930"/>
+                  </a:lnTo>
+                  <a:lnTo>
+                    <a:pt x="1125511" y="134363"/>
+                  </a:lnTo>
+                  <a:lnTo>
+                    <a:pt x="1195856" y="141678"/>
+                  </a:lnTo>
+                  <a:lnTo>
+                    <a:pt x="1266200" y="148878"/>
+                  </a:lnTo>
+                  <a:lnTo>
+                    <a:pt x="1336545" y="155965"/>
+                  </a:lnTo>
+                  <a:lnTo>
+                    <a:pt x="1406889" y="162939"/>
+                  </a:lnTo>
+                  <a:lnTo>
+                    <a:pt x="1477234" y="169804"/>
+                  </a:lnTo>
+                  <a:lnTo>
+                    <a:pt x="1547578" y="176560"/>
+                  </a:lnTo>
+                  <a:lnTo>
+                    <a:pt x="1617923" y="183209"/>
+                  </a:lnTo>
+                  <a:lnTo>
+                    <a:pt x="1688267" y="189753"/>
+                  </a:lnTo>
+                  <a:lnTo>
+                    <a:pt x="1758612" y="196195"/>
+                  </a:lnTo>
+                  <a:lnTo>
+                    <a:pt x="1828956" y="202534"/>
+                  </a:lnTo>
+                  <a:lnTo>
+                    <a:pt x="1899301" y="208773"/>
+                  </a:lnTo>
+                  <a:lnTo>
+                    <a:pt x="1969645" y="214914"/>
+                  </a:lnTo>
+                  <a:lnTo>
+                    <a:pt x="2039990" y="220958"/>
+                  </a:lnTo>
+                  <a:lnTo>
+                    <a:pt x="2110334" y="226906"/>
+                  </a:lnTo>
+                  <a:lnTo>
+                    <a:pt x="2180679" y="232761"/>
+                  </a:lnTo>
+                  <a:lnTo>
+                    <a:pt x="2251023" y="238523"/>
+                  </a:lnTo>
+                  <a:lnTo>
+                    <a:pt x="2321368" y="244194"/>
+                  </a:lnTo>
+                  <a:lnTo>
+                    <a:pt x="2391712" y="249776"/>
+                  </a:lnTo>
+                  <a:lnTo>
+                    <a:pt x="2462057" y="255269"/>
+                  </a:lnTo>
+                  <a:lnTo>
+                    <a:pt x="2532401" y="260676"/>
+                  </a:lnTo>
+                  <a:lnTo>
+                    <a:pt x="2602746" y="265997"/>
+                  </a:lnTo>
+                  <a:lnTo>
+                    <a:pt x="2673090" y="271235"/>
+                  </a:lnTo>
+                  <a:lnTo>
+                    <a:pt x="2743435" y="276390"/>
+                  </a:lnTo>
+                  <a:lnTo>
+                    <a:pt x="2813779" y="281463"/>
+                  </a:lnTo>
+                  <a:lnTo>
+                    <a:pt x="2884124" y="286456"/>
+                  </a:lnTo>
+                  <a:lnTo>
+                    <a:pt x="2954468" y="291371"/>
+                  </a:lnTo>
+                  <a:lnTo>
+                    <a:pt x="3024813" y="296207"/>
+                  </a:lnTo>
+                  <a:lnTo>
+                    <a:pt x="3095157" y="298493"/>
+                  </a:lnTo>
+                  <a:lnTo>
+                    <a:pt x="3165502" y="298651"/>
+                  </a:lnTo>
+                  <a:lnTo>
+                    <a:pt x="3235846" y="298809"/>
+                  </a:lnTo>
+                  <a:lnTo>
+                    <a:pt x="3306191" y="298967"/>
+                  </a:lnTo>
+                  <a:lnTo>
+                    <a:pt x="3376535" y="299124"/>
+                  </a:lnTo>
+                  <a:lnTo>
+                    <a:pt x="3446880" y="299282"/>
+                  </a:lnTo>
+                  <a:lnTo>
+                    <a:pt x="3517224" y="299439"/>
+                  </a:lnTo>
+                  <a:lnTo>
+                    <a:pt x="3587569" y="299597"/>
+                  </a:lnTo>
+                  <a:lnTo>
+                    <a:pt x="3657913" y="299754"/>
+                  </a:lnTo>
+                  <a:lnTo>
+                    <a:pt x="3728257" y="299912"/>
+                  </a:lnTo>
+                  <a:lnTo>
+                    <a:pt x="3798602" y="300069"/>
+                  </a:lnTo>
+                  <a:lnTo>
+                    <a:pt x="3868946" y="300226"/>
+                  </a:lnTo>
+                  <a:lnTo>
+                    <a:pt x="3939291" y="300383"/>
+                  </a:lnTo>
+                  <a:lnTo>
+                    <a:pt x="4009635" y="300540"/>
+                  </a:lnTo>
+                  <a:lnTo>
+                    <a:pt x="4079980" y="300697"/>
+                  </a:lnTo>
+                  <a:lnTo>
+                    <a:pt x="4150324" y="300853"/>
+                  </a:lnTo>
+                  <a:lnTo>
+                    <a:pt x="4220669" y="301010"/>
+                  </a:lnTo>
+                  <a:lnTo>
+                    <a:pt x="4291013" y="301167"/>
+                  </a:lnTo>
+                  <a:lnTo>
+                    <a:pt x="4361358" y="301323"/>
+                  </a:lnTo>
+                  <a:lnTo>
+                    <a:pt x="4431702" y="301480"/>
+                  </a:lnTo>
+                  <a:lnTo>
+                    <a:pt x="4502047" y="301636"/>
+                  </a:lnTo>
+                  <a:lnTo>
+                    <a:pt x="4572391" y="301792"/>
+                  </a:lnTo>
+                  <a:lnTo>
+                    <a:pt x="4642736" y="301949"/>
+                  </a:lnTo>
+                  <a:lnTo>
+                    <a:pt x="4713080" y="302105"/>
+                  </a:lnTo>
+                  <a:lnTo>
+                    <a:pt x="4783425" y="302261"/>
+                  </a:lnTo>
+                  <a:lnTo>
+                    <a:pt x="4853769" y="302417"/>
+                  </a:lnTo>
+                  <a:lnTo>
+                    <a:pt x="4924114" y="302573"/>
+                  </a:lnTo>
+                  <a:lnTo>
+                    <a:pt x="4994458" y="302728"/>
+                  </a:lnTo>
+                  <a:lnTo>
+                    <a:pt x="5064803" y="302884"/>
+                  </a:lnTo>
+                  <a:lnTo>
+                    <a:pt x="5135147" y="303040"/>
+                  </a:lnTo>
+                  <a:lnTo>
+                    <a:pt x="5205492" y="303195"/>
+                  </a:lnTo>
+                  <a:lnTo>
+                    <a:pt x="5275836" y="303351"/>
+                  </a:lnTo>
+                  <a:lnTo>
+                    <a:pt x="5346181" y="303506"/>
+                  </a:lnTo>
+                  <a:lnTo>
+                    <a:pt x="5416525" y="303661"/>
+                  </a:lnTo>
+                  <a:lnTo>
+                    <a:pt x="5486870" y="303817"/>
+                  </a:lnTo>
+                  <a:lnTo>
+                    <a:pt x="5557214" y="303972"/>
+                  </a:lnTo>
+                  <a:lnTo>
+                    <a:pt x="5627559" y="304127"/>
+                  </a:lnTo>
+                  <a:lnTo>
+                    <a:pt x="5697903" y="304282"/>
+                  </a:lnTo>
+                  <a:lnTo>
+                    <a:pt x="5768248" y="304437"/>
+                  </a:lnTo>
+                  <a:lnTo>
+                    <a:pt x="5838592" y="304592"/>
+                  </a:lnTo>
+                  <a:lnTo>
+                    <a:pt x="5908937" y="304746"/>
+                  </a:lnTo>
+                  <a:lnTo>
+                    <a:pt x="5979281" y="304901"/>
+                  </a:lnTo>
+                  <a:lnTo>
+                    <a:pt x="6049626" y="305055"/>
+                  </a:lnTo>
+                  <a:lnTo>
+                    <a:pt x="6119970" y="305210"/>
+                  </a:lnTo>
+                  <a:lnTo>
+                    <a:pt x="6190315" y="305364"/>
+                  </a:lnTo>
+                  <a:lnTo>
+                    <a:pt x="6260659" y="305519"/>
+                  </a:lnTo>
+                  <a:lnTo>
+                    <a:pt x="6331004" y="305673"/>
+                  </a:lnTo>
+                  <a:lnTo>
+                    <a:pt x="6401348" y="305827"/>
+                  </a:lnTo>
+                  <a:lnTo>
+                    <a:pt x="6471693" y="305981"/>
+                  </a:lnTo>
+                  <a:lnTo>
+                    <a:pt x="6542037" y="306135"/>
+                  </a:lnTo>
+                  <a:lnTo>
+                    <a:pt x="6612382" y="306289"/>
+                  </a:lnTo>
+                  <a:lnTo>
+                    <a:pt x="6682726" y="306443"/>
+                  </a:lnTo>
+                  <a:lnTo>
+                    <a:pt x="6753071" y="306597"/>
+                  </a:lnTo>
+                  <a:lnTo>
+                    <a:pt x="6823415" y="306750"/>
+                  </a:lnTo>
+                  <a:lnTo>
+                    <a:pt x="6893760" y="306904"/>
+                  </a:lnTo>
+                  <a:lnTo>
+                    <a:pt x="6964104" y="307057"/>
+                  </a:lnTo>
+                  <a:lnTo>
+                    <a:pt x="6964104" y="474057"/>
+                  </a:lnTo>
+                  <a:lnTo>
+                    <a:pt x="6893760" y="472073"/>
+                  </a:lnTo>
+                  <a:lnTo>
+                    <a:pt x="6823415" y="470057"/>
+                  </a:lnTo>
+                  <a:lnTo>
+                    <a:pt x="6753071" y="468009"/>
+                  </a:lnTo>
+                  <a:lnTo>
+                    <a:pt x="6682726" y="465928"/>
+                  </a:lnTo>
+                  <a:lnTo>
+                    <a:pt x="6612382" y="463814"/>
+                  </a:lnTo>
+                  <a:lnTo>
+                    <a:pt x="6542037" y="461666"/>
+                  </a:lnTo>
+                  <a:lnTo>
+                    <a:pt x="6471693" y="459483"/>
+                  </a:lnTo>
+                  <a:lnTo>
+                    <a:pt x="6401348" y="457265"/>
+                  </a:lnTo>
+                  <a:lnTo>
+                    <a:pt x="6331004" y="455012"/>
+                  </a:lnTo>
+                  <a:lnTo>
+                    <a:pt x="6260659" y="452722"/>
+                  </a:lnTo>
+                  <a:lnTo>
+                    <a:pt x="6190315" y="450396"/>
+                  </a:lnTo>
+                  <a:lnTo>
+                    <a:pt x="6119970" y="448032"/>
+                  </a:lnTo>
+                  <a:lnTo>
+                    <a:pt x="6049626" y="445631"/>
+                  </a:lnTo>
+                  <a:lnTo>
+                    <a:pt x="5979281" y="443191"/>
+                  </a:lnTo>
+                  <a:lnTo>
+                    <a:pt x="5908937" y="440712"/>
+                  </a:lnTo>
+                  <a:lnTo>
+                    <a:pt x="5838592" y="438193"/>
+                  </a:lnTo>
+                  <a:lnTo>
+                    <a:pt x="5768248" y="435634"/>
+                  </a:lnTo>
+                  <a:lnTo>
+                    <a:pt x="5697903" y="433034"/>
+                  </a:lnTo>
+                  <a:lnTo>
+                    <a:pt x="5627559" y="430391"/>
+                  </a:lnTo>
+                  <a:lnTo>
+                    <a:pt x="5557214" y="427707"/>
+                  </a:lnTo>
+                  <a:lnTo>
+                    <a:pt x="5486870" y="424980"/>
+                  </a:lnTo>
+                  <a:lnTo>
+                    <a:pt x="5416525" y="422208"/>
+                  </a:lnTo>
+                  <a:lnTo>
+                    <a:pt x="5346181" y="419393"/>
+                  </a:lnTo>
+                  <a:lnTo>
+                    <a:pt x="5275836" y="416532"/>
+                  </a:lnTo>
+                  <a:lnTo>
+                    <a:pt x="5205492" y="413625"/>
+                  </a:lnTo>
+                  <a:lnTo>
+                    <a:pt x="5135147" y="410672"/>
+                  </a:lnTo>
+                  <a:lnTo>
+                    <a:pt x="5064803" y="407671"/>
+                  </a:lnTo>
+                  <a:lnTo>
+                    <a:pt x="4994458" y="404622"/>
+                  </a:lnTo>
+                  <a:lnTo>
+                    <a:pt x="4924114" y="401524"/>
+                  </a:lnTo>
+                  <a:lnTo>
+                    <a:pt x="4853769" y="398377"/>
+                  </a:lnTo>
+                  <a:lnTo>
+                    <a:pt x="4783425" y="395179"/>
+                  </a:lnTo>
+                  <a:lnTo>
+                    <a:pt x="4713080" y="391930"/>
+                  </a:lnTo>
+                  <a:lnTo>
+                    <a:pt x="4642736" y="388628"/>
+                  </a:lnTo>
+                  <a:lnTo>
+                    <a:pt x="4572391" y="385274"/>
+                  </a:lnTo>
+                  <a:lnTo>
+                    <a:pt x="4502047" y="381866"/>
+                  </a:lnTo>
+                  <a:lnTo>
+                    <a:pt x="4431702" y="378403"/>
+                  </a:lnTo>
+                  <a:lnTo>
+                    <a:pt x="4361358" y="374885"/>
+                  </a:lnTo>
+                  <a:lnTo>
+                    <a:pt x="4291013" y="371310"/>
+                  </a:lnTo>
+                  <a:lnTo>
+                    <a:pt x="4220669" y="367678"/>
+                  </a:lnTo>
+                  <a:lnTo>
+                    <a:pt x="4150324" y="363988"/>
+                  </a:lnTo>
+                  <a:lnTo>
+                    <a:pt x="4079980" y="360238"/>
+                  </a:lnTo>
+                  <a:lnTo>
+                    <a:pt x="4009635" y="356428"/>
+                  </a:lnTo>
+                  <a:lnTo>
+                    <a:pt x="3939291" y="352557"/>
+                  </a:lnTo>
+                  <a:lnTo>
+                    <a:pt x="3868946" y="348625"/>
+                  </a:lnTo>
+                  <a:lnTo>
+                    <a:pt x="3798602" y="344629"/>
+                  </a:lnTo>
+                  <a:lnTo>
+                    <a:pt x="3728257" y="340568"/>
+                  </a:lnTo>
+                  <a:lnTo>
+                    <a:pt x="3657913" y="336443"/>
+                  </a:lnTo>
+                  <a:lnTo>
+                    <a:pt x="3587569" y="332252"/>
+                  </a:lnTo>
+                  <a:lnTo>
+                    <a:pt x="3517224" y="327993"/>
+                  </a:lnTo>
+                  <a:lnTo>
+                    <a:pt x="3446880" y="323666"/>
+                  </a:lnTo>
+                  <a:lnTo>
+                    <a:pt x="3376535" y="319270"/>
+                  </a:lnTo>
+                  <a:lnTo>
+                    <a:pt x="3306191" y="314803"/>
+                  </a:lnTo>
+                  <a:lnTo>
+                    <a:pt x="3235846" y="310264"/>
+                  </a:lnTo>
+                  <a:lnTo>
+                    <a:pt x="3165502" y="305653"/>
+                  </a:lnTo>
+                  <a:lnTo>
+                    <a:pt x="3095157" y="300968"/>
+                  </a:lnTo>
+                  <a:lnTo>
+                    <a:pt x="3024813" y="298335"/>
+                  </a:lnTo>
+                  <a:lnTo>
+                    <a:pt x="2954468" y="298177"/>
+                  </a:lnTo>
+                  <a:lnTo>
+                    <a:pt x="2884124" y="298019"/>
+                  </a:lnTo>
+                  <a:lnTo>
+                    <a:pt x="2813779" y="297860"/>
+                  </a:lnTo>
+                  <a:lnTo>
+                    <a:pt x="2743435" y="297702"/>
+                  </a:lnTo>
+                  <a:lnTo>
+                    <a:pt x="2673090" y="297544"/>
+                  </a:lnTo>
+                  <a:lnTo>
+                    <a:pt x="2602746" y="297385"/>
+                  </a:lnTo>
+                  <a:lnTo>
+                    <a:pt x="2532401" y="297226"/>
+                  </a:lnTo>
+                  <a:lnTo>
+                    <a:pt x="2462057" y="297068"/>
+                  </a:lnTo>
+                  <a:lnTo>
+                    <a:pt x="2391712" y="296909"/>
+                  </a:lnTo>
+                  <a:lnTo>
+                    <a:pt x="2321368" y="296750"/>
+                  </a:lnTo>
+                  <a:lnTo>
+                    <a:pt x="2251023" y="296591"/>
+                  </a:lnTo>
+                  <a:lnTo>
+                    <a:pt x="2180679" y="296432"/>
+                  </a:lnTo>
+                  <a:lnTo>
+                    <a:pt x="2110334" y="296273"/>
+                  </a:lnTo>
+                  <a:lnTo>
+                    <a:pt x="2039990" y="296114"/>
+                  </a:lnTo>
+                  <a:lnTo>
+                    <a:pt x="1969645" y="295955"/>
+                  </a:lnTo>
+                  <a:lnTo>
+                    <a:pt x="1899301" y="295795"/>
+                  </a:lnTo>
+                  <a:lnTo>
+                    <a:pt x="1828956" y="295636"/>
+                  </a:lnTo>
+                  <a:lnTo>
+                    <a:pt x="1758612" y="295476"/>
+                  </a:lnTo>
+                  <a:lnTo>
+                    <a:pt x="1688267" y="295317"/>
+                  </a:lnTo>
+                  <a:lnTo>
+                    <a:pt x="1617923" y="295157"/>
+                  </a:lnTo>
+                  <a:lnTo>
+                    <a:pt x="1547578" y="294997"/>
+                  </a:lnTo>
+                  <a:lnTo>
+                    <a:pt x="1477234" y="294837"/>
+                  </a:lnTo>
+                  <a:lnTo>
+                    <a:pt x="1406889" y="294677"/>
+                  </a:lnTo>
+                  <a:lnTo>
+                    <a:pt x="1336545" y="294517"/>
+                  </a:lnTo>
+                  <a:lnTo>
+                    <a:pt x="1266200" y="294357"/>
+                  </a:lnTo>
+                  <a:lnTo>
+                    <a:pt x="1195856" y="294197"/>
+                  </a:lnTo>
+                  <a:lnTo>
+                    <a:pt x="1125511" y="294037"/>
+                  </a:lnTo>
+                  <a:lnTo>
+                    <a:pt x="1055167" y="293876"/>
+                  </a:lnTo>
+                  <a:lnTo>
+                    <a:pt x="984822" y="293716"/>
+                  </a:lnTo>
+                  <a:lnTo>
+                    <a:pt x="914478" y="293555"/>
+                  </a:lnTo>
+                  <a:lnTo>
+                    <a:pt x="844133" y="293394"/>
+                  </a:lnTo>
+                  <a:lnTo>
+                    <a:pt x="773789" y="293234"/>
+                  </a:lnTo>
+                  <a:lnTo>
+                    <a:pt x="703444" y="293073"/>
+                  </a:lnTo>
+                  <a:lnTo>
+                    <a:pt x="633100" y="292912"/>
+                  </a:lnTo>
+                  <a:lnTo>
+                    <a:pt x="562755" y="292751"/>
+                  </a:lnTo>
+                  <a:lnTo>
+                    <a:pt x="492411" y="292590"/>
+                  </a:lnTo>
+                  <a:lnTo>
+                    <a:pt x="422066" y="292429"/>
+                  </a:lnTo>
+                  <a:lnTo>
+                    <a:pt x="351722" y="292268"/>
+                  </a:lnTo>
+                  <a:lnTo>
+                    <a:pt x="281377" y="292106"/>
+                  </a:lnTo>
+                  <a:lnTo>
+                    <a:pt x="211033" y="291945"/>
+                  </a:lnTo>
+                  <a:lnTo>
+                    <a:pt x="140688" y="291783"/>
+                  </a:lnTo>
+                  <a:lnTo>
+                    <a:pt x="70344" y="291622"/>
+                  </a:lnTo>
+                  <a:lnTo>
+                    <a:pt x="0" y="291460"/>
+                  </a:lnTo>
+                  <a:close/>
+                </a:path>
+              </a:pathLst>
+            </a:custGeom>
+            <a:solidFill>
+              <a:srgbClr val="FF8C00">
+                <a:alpha val="20000"/>
+              </a:srgbClr>
+            </a:solidFill>
+          </p:spPr>
+          <p:txBody>
+            <a:bodyPr/>
+            <a:lstStyle/>
+            <a:p/>
+          </p:txBody>
+        </p:sp>
+        <p:sp>
+          <p:nvSpPr>
+            <p:cNvPr id="72" name="pl72"/>
+            <p:cNvSpPr/>
+            <p:nvPr/>
+          </p:nvSpPr>
+          <p:spPr>
+            <a:xfrm>
+              <a:off x="1235312" y="4995944"/>
+              <a:ext cx="6964104" cy="307057"/>
+            </a:xfrm>
+            <a:custGeom>
+              <a:avLst/>
+              <a:pathLst>
+                <a:path w="6964104" h="307057">
+                  <a:moveTo>
+                    <a:pt x="0" y="0"/>
+                  </a:moveTo>
+                  <a:lnTo>
+                    <a:pt x="70344" y="9436"/>
+                  </a:lnTo>
+                  <a:lnTo>
+                    <a:pt x="140688" y="18724"/>
+                  </a:lnTo>
+                  <a:lnTo>
+                    <a:pt x="211033" y="27865"/>
+                  </a:lnTo>
+                  <a:lnTo>
+                    <a:pt x="281377" y="36862"/>
+                  </a:lnTo>
+                  <a:lnTo>
+                    <a:pt x="351722" y="45717"/>
+                  </a:lnTo>
+                  <a:lnTo>
+                    <a:pt x="422066" y="54432"/>
+                  </a:lnTo>
+                  <a:lnTo>
+                    <a:pt x="492411" y="63010"/>
+                  </a:lnTo>
+                  <a:lnTo>
+                    <a:pt x="562755" y="71452"/>
+                  </a:lnTo>
+                  <a:lnTo>
+                    <a:pt x="633100" y="79760"/>
+                  </a:lnTo>
+                  <a:lnTo>
+                    <a:pt x="703444" y="87938"/>
+                  </a:lnTo>
+                  <a:lnTo>
+                    <a:pt x="773789" y="95987"/>
+                  </a:lnTo>
+                  <a:lnTo>
+                    <a:pt x="844133" y="103908"/>
+                  </a:lnTo>
+                  <a:lnTo>
+                    <a:pt x="914478" y="111704"/>
+                  </a:lnTo>
+                  <a:lnTo>
+                    <a:pt x="984822" y="119378"/>
+                  </a:lnTo>
+                  <a:lnTo>
+                    <a:pt x="1055167" y="126930"/>
+                  </a:lnTo>
+                  <a:lnTo>
+                    <a:pt x="1125511" y="134363"/>
+                  </a:lnTo>
+                  <a:lnTo>
+                    <a:pt x="1195856" y="141678"/>
+                  </a:lnTo>
+                  <a:lnTo>
+                    <a:pt x="1266200" y="148878"/>
+                  </a:lnTo>
+                  <a:lnTo>
+                    <a:pt x="1336545" y="155965"/>
+                  </a:lnTo>
+                  <a:lnTo>
+                    <a:pt x="1406889" y="162939"/>
+                  </a:lnTo>
+                  <a:lnTo>
+                    <a:pt x="1477234" y="169804"/>
+                  </a:lnTo>
+                  <a:lnTo>
+                    <a:pt x="1547578" y="176560"/>
+                  </a:lnTo>
+                  <a:lnTo>
+                    <a:pt x="1617923" y="183209"/>
+                  </a:lnTo>
+                  <a:lnTo>
+                    <a:pt x="1688267" y="189753"/>
+                  </a:lnTo>
+                  <a:lnTo>
+                    <a:pt x="1758612" y="196195"/>
+                  </a:lnTo>
+                  <a:lnTo>
+                    <a:pt x="1828956" y="202534"/>
+                  </a:lnTo>
+                  <a:lnTo>
+                    <a:pt x="1899301" y="208773"/>
+                  </a:lnTo>
+                  <a:lnTo>
+                    <a:pt x="1969645" y="214914"/>
+                  </a:lnTo>
+                  <a:lnTo>
+                    <a:pt x="2039990" y="220958"/>
+                  </a:lnTo>
+                  <a:lnTo>
+                    <a:pt x="2110334" y="226906"/>
+                  </a:lnTo>
+                  <a:lnTo>
+                    <a:pt x="2180679" y="232761"/>
+                  </a:lnTo>
+                  <a:lnTo>
+                    <a:pt x="2251023" y="238523"/>
+                  </a:lnTo>
+                  <a:lnTo>
+                    <a:pt x="2321368" y="244194"/>
+                  </a:lnTo>
+                  <a:lnTo>
+                    <a:pt x="2391712" y="249776"/>
+                  </a:lnTo>
+                  <a:lnTo>
+                    <a:pt x="2462057" y="255269"/>
+                  </a:lnTo>
+                  <a:lnTo>
+                    <a:pt x="2532401" y="260676"/>
+                  </a:lnTo>
+                  <a:lnTo>
+                    <a:pt x="2602746" y="265997"/>
+                  </a:lnTo>
+                  <a:lnTo>
+                    <a:pt x="2673090" y="271235"/>
+                  </a:lnTo>
+                  <a:lnTo>
+                    <a:pt x="2743435" y="276390"/>
+                  </a:lnTo>
+                  <a:lnTo>
+                    <a:pt x="2813779" y="281463"/>
+                  </a:lnTo>
+                  <a:lnTo>
+                    <a:pt x="2884124" y="286456"/>
+                  </a:lnTo>
+                  <a:lnTo>
+                    <a:pt x="2954468" y="291371"/>
+                  </a:lnTo>
+                  <a:lnTo>
+                    <a:pt x="3024813" y="296207"/>
+                  </a:lnTo>
+                  <a:lnTo>
+                    <a:pt x="3095157" y="298493"/>
+                  </a:lnTo>
+                  <a:lnTo>
+                    <a:pt x="3165502" y="298651"/>
+                  </a:lnTo>
+                  <a:lnTo>
+                    <a:pt x="3235846" y="298809"/>
+                  </a:lnTo>
+                  <a:lnTo>
+                    <a:pt x="3306191" y="298967"/>
+                  </a:lnTo>
+                  <a:lnTo>
+                    <a:pt x="3376535" y="299124"/>
+                  </a:lnTo>
+                  <a:lnTo>
+                    <a:pt x="3446880" y="299282"/>
+                  </a:lnTo>
+                  <a:lnTo>
+                    <a:pt x="3517224" y="299439"/>
+                  </a:lnTo>
+                  <a:lnTo>
+                    <a:pt x="3587569" y="299597"/>
+                  </a:lnTo>
+                  <a:lnTo>
+                    <a:pt x="3657913" y="299754"/>
+                  </a:lnTo>
+                  <a:lnTo>
+                    <a:pt x="3728257" y="299912"/>
+                  </a:lnTo>
+                  <a:lnTo>
+                    <a:pt x="3798602" y="300069"/>
+                  </a:lnTo>
+                  <a:lnTo>
+                    <a:pt x="3868946" y="300226"/>
+                  </a:lnTo>
+                  <a:lnTo>
+                    <a:pt x="3939291" y="300383"/>
+                  </a:lnTo>
+                  <a:lnTo>
+                    <a:pt x="4009635" y="300540"/>
+                  </a:lnTo>
+                  <a:lnTo>
+                    <a:pt x="4079980" y="300697"/>
+                  </a:lnTo>
+                  <a:lnTo>
+                    <a:pt x="4150324" y="300853"/>
+                  </a:lnTo>
+                  <a:lnTo>
+                    <a:pt x="4220669" y="301010"/>
+                  </a:lnTo>
+                  <a:lnTo>
+                    <a:pt x="4291013" y="301167"/>
+                  </a:lnTo>
+                  <a:lnTo>
+                    <a:pt x="4361358" y="301323"/>
+                  </a:lnTo>
+                  <a:lnTo>
+                    <a:pt x="4431702" y="301480"/>
+                  </a:lnTo>
+                  <a:lnTo>
+                    <a:pt x="4502047" y="301636"/>
+                  </a:lnTo>
+                  <a:lnTo>
+                    <a:pt x="4572391" y="301792"/>
+                  </a:lnTo>
+                  <a:lnTo>
+                    <a:pt x="4642736" y="301949"/>
+                  </a:lnTo>
+                  <a:lnTo>
+                    <a:pt x="4713080" y="302105"/>
+                  </a:lnTo>
+                  <a:lnTo>
+                    <a:pt x="4783425" y="302261"/>
+                  </a:lnTo>
+                  <a:lnTo>
+                    <a:pt x="4853769" y="302417"/>
+                  </a:lnTo>
+                  <a:lnTo>
+                    <a:pt x="4924114" y="302573"/>
+                  </a:lnTo>
+                  <a:lnTo>
+                    <a:pt x="4994458" y="302728"/>
+                  </a:lnTo>
+                  <a:lnTo>
+                    <a:pt x="5064803" y="302884"/>
+                  </a:lnTo>
+                  <a:lnTo>
+                    <a:pt x="5135147" y="303040"/>
+                  </a:lnTo>
+                  <a:lnTo>
+                    <a:pt x="5205492" y="303195"/>
+                  </a:lnTo>
+                  <a:lnTo>
+                    <a:pt x="5275836" y="303351"/>
+                  </a:lnTo>
+                  <a:lnTo>
+                    <a:pt x="5346181" y="303506"/>
+                  </a:lnTo>
+                  <a:lnTo>
+                    <a:pt x="5416525" y="303661"/>
+                  </a:lnTo>
+                  <a:lnTo>
+                    <a:pt x="5486870" y="303817"/>
+                  </a:lnTo>
+                  <a:lnTo>
+                    <a:pt x="5557214" y="303972"/>
+                  </a:lnTo>
+                  <a:lnTo>
+                    <a:pt x="5627559" y="304127"/>
+                  </a:lnTo>
+                  <a:lnTo>
+                    <a:pt x="5697903" y="304282"/>
+                  </a:lnTo>
+                  <a:lnTo>
+                    <a:pt x="5768248" y="304437"/>
+                  </a:lnTo>
+                  <a:lnTo>
+                    <a:pt x="5838592" y="304592"/>
+                  </a:lnTo>
+                  <a:lnTo>
+                    <a:pt x="5908937" y="304746"/>
+                  </a:lnTo>
+                  <a:lnTo>
+                    <a:pt x="5979281" y="304901"/>
+                  </a:lnTo>
+                  <a:lnTo>
+                    <a:pt x="6049626" y="305055"/>
+                  </a:lnTo>
+                  <a:lnTo>
+                    <a:pt x="6119970" y="305210"/>
+                  </a:lnTo>
+                  <a:lnTo>
+                    <a:pt x="6190315" y="305364"/>
+                  </a:lnTo>
+                  <a:lnTo>
+                    <a:pt x="6260659" y="305519"/>
+                  </a:lnTo>
+                  <a:lnTo>
+                    <a:pt x="6331004" y="305673"/>
+                  </a:lnTo>
+                  <a:lnTo>
+                    <a:pt x="6401348" y="305827"/>
+                  </a:lnTo>
+                  <a:lnTo>
+                    <a:pt x="6471693" y="305981"/>
+                  </a:lnTo>
+                  <a:lnTo>
+                    <a:pt x="6542037" y="306135"/>
+                  </a:lnTo>
+                  <a:lnTo>
+                    <a:pt x="6612382" y="306289"/>
+                  </a:lnTo>
+                  <a:lnTo>
+                    <a:pt x="6682726" y="306443"/>
+                  </a:lnTo>
+                  <a:lnTo>
+                    <a:pt x="6753071" y="306597"/>
+                  </a:lnTo>
+                  <a:lnTo>
+                    <a:pt x="6823415" y="306750"/>
+                  </a:lnTo>
+                  <a:lnTo>
+                    <a:pt x="6893760" y="306904"/>
+                  </a:lnTo>
+                  <a:lnTo>
+                    <a:pt x="6964104" y="307057"/>
+                  </a:lnTo>
+                </a:path>
+              </a:pathLst>
+            </a:custGeom>
+          </p:spPr>
+          <p:txBody>
+            <a:bodyPr/>
+            <a:lstStyle/>
+            <a:p/>
+          </p:txBody>
+        </p:sp>
+        <p:sp>
+          <p:nvSpPr>
+            <p:cNvPr id="73" name="pl73"/>
+            <p:cNvSpPr/>
+            <p:nvPr/>
+          </p:nvSpPr>
+          <p:spPr>
+            <a:xfrm>
+              <a:off x="1235312" y="5287405"/>
+              <a:ext cx="6964104" cy="182596"/>
+            </a:xfrm>
+            <a:custGeom>
+              <a:avLst/>
+              <a:pathLst>
+                <a:path w="6964104" h="182596">
+                  <a:moveTo>
+                    <a:pt x="6964104" y="182596"/>
+                  </a:moveTo>
+                  <a:lnTo>
+                    <a:pt x="6893760" y="180612"/>
+                  </a:lnTo>
+                  <a:lnTo>
+                    <a:pt x="6823415" y="178597"/>
+                  </a:lnTo>
+                  <a:lnTo>
+                    <a:pt x="6753071" y="176548"/>
+                  </a:lnTo>
+                  <a:lnTo>
+                    <a:pt x="6682726" y="174467"/>
+                  </a:lnTo>
+                  <a:lnTo>
+                    <a:pt x="6612382" y="172353"/>
+                  </a:lnTo>
+                  <a:lnTo>
+                    <a:pt x="6542037" y="170205"/>
+                  </a:lnTo>
+                  <a:lnTo>
+                    <a:pt x="6471693" y="168022"/>
+                  </a:lnTo>
+                  <a:lnTo>
+                    <a:pt x="6401348" y="165804"/>
+                  </a:lnTo>
+                  <a:lnTo>
+                    <a:pt x="6331004" y="163551"/>
+                  </a:lnTo>
+                  <a:lnTo>
+                    <a:pt x="6260659" y="161261"/>
+                  </a:lnTo>
+                  <a:lnTo>
+                    <a:pt x="6190315" y="158935"/>
+                  </a:lnTo>
+                  <a:lnTo>
+                    <a:pt x="6119970" y="156572"/>
+                  </a:lnTo>
+                  <a:lnTo>
+                    <a:pt x="6049626" y="154170"/>
+                  </a:lnTo>
+                  <a:lnTo>
+                    <a:pt x="5979281" y="151730"/>
+                  </a:lnTo>
+                  <a:lnTo>
+                    <a:pt x="5908937" y="149251"/>
+                  </a:lnTo>
+                  <a:lnTo>
+                    <a:pt x="5838592" y="146732"/>
+                  </a:lnTo>
+                  <a:lnTo>
+                    <a:pt x="5768248" y="144173"/>
+                  </a:lnTo>
+                  <a:lnTo>
+                    <a:pt x="5697903" y="141573"/>
+                  </a:lnTo>
+                  <a:lnTo>
+                    <a:pt x="5627559" y="138931"/>
+                  </a:lnTo>
+                  <a:lnTo>
+                    <a:pt x="5557214" y="136246"/>
+                  </a:lnTo>
+                  <a:lnTo>
+                    <a:pt x="5486870" y="133519"/>
+                  </a:lnTo>
+                  <a:lnTo>
+                    <a:pt x="5416525" y="130748"/>
+                  </a:lnTo>
+                  <a:lnTo>
+                    <a:pt x="5346181" y="127932"/>
+                  </a:lnTo>
+                  <a:lnTo>
+                    <a:pt x="5275836" y="125071"/>
+                  </a:lnTo>
+                  <a:lnTo>
+                    <a:pt x="5205492" y="122164"/>
+                  </a:lnTo>
+                  <a:lnTo>
+                    <a:pt x="5135147" y="119211"/>
+                  </a:lnTo>
+                  <a:lnTo>
+                    <a:pt x="5064803" y="116210"/>
+                  </a:lnTo>
+                  <a:lnTo>
+                    <a:pt x="4994458" y="113161"/>
+                  </a:lnTo>
+                  <a:lnTo>
+                    <a:pt x="4924114" y="110064"/>
+                  </a:lnTo>
+                  <a:lnTo>
+                    <a:pt x="4853769" y="106916"/>
+                  </a:lnTo>
+                  <a:lnTo>
+                    <a:pt x="4783425" y="103718"/>
+                  </a:lnTo>
+                  <a:lnTo>
+                    <a:pt x="4713080" y="100469"/>
+                  </a:lnTo>
+                  <a:lnTo>
+                    <a:pt x="4642736" y="97168"/>
+                  </a:lnTo>
+                  <a:lnTo>
+                    <a:pt x="4572391" y="93813"/>
+                  </a:lnTo>
+                  <a:lnTo>
+                    <a:pt x="4502047" y="90405"/>
+                  </a:lnTo>
+                  <a:lnTo>
+                    <a:pt x="4431702" y="86942"/>
+                  </a:lnTo>
+                  <a:lnTo>
+                    <a:pt x="4361358" y="83424"/>
+                  </a:lnTo>
+                  <a:lnTo>
+                    <a:pt x="4291013" y="79849"/>
+                  </a:lnTo>
+                  <a:lnTo>
+                    <a:pt x="4220669" y="76217"/>
+                  </a:lnTo>
+                  <a:lnTo>
+                    <a:pt x="4150324" y="72527"/>
+                  </a:lnTo>
+                  <a:lnTo>
+                    <a:pt x="4079980" y="68777"/>
+                  </a:lnTo>
+                  <a:lnTo>
+                    <a:pt x="4009635" y="64968"/>
+                  </a:lnTo>
+                  <a:lnTo>
+                    <a:pt x="3939291" y="61097"/>
+                  </a:lnTo>
+                  <a:lnTo>
+                    <a:pt x="3868946" y="57164"/>
+                  </a:lnTo>
+                  <a:lnTo>
+                    <a:pt x="3798602" y="53168"/>
+                  </a:lnTo>
+                  <a:lnTo>
+                    <a:pt x="3728257" y="49108"/>
+                  </a:lnTo>
+                  <a:lnTo>
+                    <a:pt x="3657913" y="44982"/>
+                  </a:lnTo>
+                  <a:lnTo>
+                    <a:pt x="3587569" y="40791"/>
+                  </a:lnTo>
+                  <a:lnTo>
+                    <a:pt x="3517224" y="36532"/>
+                  </a:lnTo>
+                  <a:lnTo>
+                    <a:pt x="3446880" y="32205"/>
+                  </a:lnTo>
+                  <a:lnTo>
+                    <a:pt x="3376535" y="27809"/>
+                  </a:lnTo>
+                  <a:lnTo>
+                    <a:pt x="3306191" y="23342"/>
+                  </a:lnTo>
+                  <a:lnTo>
+                    <a:pt x="3235846" y="18804"/>
+                  </a:lnTo>
+                  <a:lnTo>
+                    <a:pt x="3165502" y="14192"/>
+                  </a:lnTo>
+                  <a:lnTo>
+                    <a:pt x="3095157" y="9507"/>
+                  </a:lnTo>
+                  <a:lnTo>
+                    <a:pt x="3024813" y="6874"/>
+                  </a:lnTo>
+                  <a:lnTo>
+                    <a:pt x="2954468" y="6716"/>
+                  </a:lnTo>
+                  <a:lnTo>
+                    <a:pt x="2884124" y="6558"/>
+                  </a:lnTo>
+                  <a:lnTo>
+                    <a:pt x="2813779" y="6400"/>
+                  </a:lnTo>
+                  <a:lnTo>
+                    <a:pt x="2743435" y="6241"/>
+                  </a:lnTo>
+                  <a:lnTo>
+                    <a:pt x="2673090" y="6083"/>
+                  </a:lnTo>
+                  <a:lnTo>
+                    <a:pt x="2602746" y="5924"/>
+                  </a:lnTo>
+                  <a:lnTo>
+                    <a:pt x="2532401" y="5766"/>
+                  </a:lnTo>
+                  <a:lnTo>
+                    <a:pt x="2462057" y="5607"/>
+                  </a:lnTo>
+                  <a:lnTo>
+                    <a:pt x="2391712" y="5448"/>
+                  </a:lnTo>
+                  <a:lnTo>
+                    <a:pt x="2321368" y="5289"/>
+                  </a:lnTo>
+                  <a:lnTo>
+                    <a:pt x="2251023" y="5130"/>
+                  </a:lnTo>
+                  <a:lnTo>
+                    <a:pt x="2180679" y="4971"/>
+                  </a:lnTo>
+                  <a:lnTo>
+                    <a:pt x="2110334" y="4812"/>
+                  </a:lnTo>
+                  <a:lnTo>
+                    <a:pt x="2039990" y="4653"/>
+                  </a:lnTo>
+                  <a:lnTo>
+                    <a:pt x="1969645" y="4494"/>
+                  </a:lnTo>
+                  <a:lnTo>
+                    <a:pt x="1899301" y="4334"/>
+                  </a:lnTo>
+                  <a:lnTo>
+                    <a:pt x="1828956" y="4175"/>
+                  </a:lnTo>
+                  <a:lnTo>
+                    <a:pt x="1758612" y="4015"/>
+                  </a:lnTo>
+                  <a:lnTo>
+                    <a:pt x="1688267" y="3856"/>
+                  </a:lnTo>
+                  <a:lnTo>
+                    <a:pt x="1617923" y="3696"/>
+                  </a:lnTo>
+                  <a:lnTo>
+                    <a:pt x="1547578" y="3536"/>
+                  </a:lnTo>
+                  <a:lnTo>
+                    <a:pt x="1477234" y="3376"/>
+                  </a:lnTo>
+                  <a:lnTo>
+                    <a:pt x="1406889" y="3216"/>
+                  </a:lnTo>
+                  <a:lnTo>
+                    <a:pt x="1336545" y="3056"/>
+                  </a:lnTo>
+                  <a:lnTo>
+                    <a:pt x="1266200" y="2896"/>
+                  </a:lnTo>
+                  <a:lnTo>
+                    <a:pt x="1195856" y="2736"/>
+                  </a:lnTo>
+                  <a:lnTo>
+                    <a:pt x="1125511" y="2576"/>
+                  </a:lnTo>
+                  <a:lnTo>
+                    <a:pt x="1055167" y="2415"/>
+                  </a:lnTo>
+                  <a:lnTo>
+                    <a:pt x="984822" y="2255"/>
+                  </a:lnTo>
+                  <a:lnTo>
+                    <a:pt x="914478" y="2094"/>
+                  </a:lnTo>
+                  <a:lnTo>
+                    <a:pt x="844133" y="1934"/>
+                  </a:lnTo>
+                  <a:lnTo>
+                    <a:pt x="773789" y="1773"/>
+                  </a:lnTo>
+                  <a:lnTo>
+                    <a:pt x="703444" y="1612"/>
+                  </a:lnTo>
+                  <a:lnTo>
+                    <a:pt x="633100" y="1451"/>
+                  </a:lnTo>
+                  <a:lnTo>
+                    <a:pt x="562755" y="1290"/>
+                  </a:lnTo>
+                  <a:lnTo>
+                    <a:pt x="492411" y="1129"/>
+                  </a:lnTo>
+                  <a:lnTo>
+                    <a:pt x="422066" y="968"/>
+                  </a:lnTo>
+                  <a:lnTo>
+                    <a:pt x="351722" y="807"/>
+                  </a:lnTo>
+                  <a:lnTo>
+                    <a:pt x="281377" y="646"/>
+                  </a:lnTo>
+                  <a:lnTo>
+                    <a:pt x="211033" y="484"/>
+                  </a:lnTo>
+                  <a:lnTo>
+                    <a:pt x="140688" y="323"/>
+                  </a:lnTo>
+                  <a:lnTo>
+                    <a:pt x="70344" y="161"/>
+                  </a:lnTo>
+                  <a:lnTo>
+                    <a:pt x="0" y="0"/>
+                  </a:lnTo>
+                </a:path>
+              </a:pathLst>
+            </a:custGeom>
+          </p:spPr>
+          <p:txBody>
+            <a:bodyPr/>
+            <a:lstStyle/>
+            <a:p/>
+          </p:txBody>
+        </p:sp>
+        <p:sp>
+          <p:nvSpPr>
+            <p:cNvPr id="74" name="pl74"/>
+            <p:cNvSpPr/>
+            <p:nvPr/>
+          </p:nvSpPr>
+          <p:spPr>
+            <a:xfrm>
+              <a:off x="1235312" y="5165811"/>
+              <a:ext cx="6964104" cy="238262"/>
+            </a:xfrm>
+            <a:custGeom>
+              <a:avLst/>
+              <a:pathLst>
+                <a:path w="6964104" h="238262">
+                  <a:moveTo>
+                    <a:pt x="0" y="0"/>
+                  </a:moveTo>
+                  <a:lnTo>
+                    <a:pt x="70344" y="3503"/>
+                  </a:lnTo>
+                  <a:lnTo>
+                    <a:pt x="140688" y="6977"/>
+                  </a:lnTo>
+                  <a:lnTo>
+                    <a:pt x="211033" y="10423"/>
+                  </a:lnTo>
+                  <a:lnTo>
+                    <a:pt x="281377" y="13840"/>
+                  </a:lnTo>
+                  <a:lnTo>
+                    <a:pt x="351722" y="17230"/>
+                  </a:lnTo>
+                  <a:lnTo>
+                    <a:pt x="422066" y="20592"/>
+                  </a:lnTo>
+                  <a:lnTo>
+                    <a:pt x="492411" y="23926"/>
+                  </a:lnTo>
+                  <a:lnTo>
+                    <a:pt x="562755" y="27234"/>
+                  </a:lnTo>
+                  <a:lnTo>
+                    <a:pt x="633100" y="30514"/>
+                  </a:lnTo>
+                  <a:lnTo>
+                    <a:pt x="703444" y="33767"/>
+                  </a:lnTo>
+                  <a:lnTo>
+                    <a:pt x="773789" y="36993"/>
+                  </a:lnTo>
+                  <a:lnTo>
+                    <a:pt x="844133" y="40193"/>
+                  </a:lnTo>
+                  <a:lnTo>
+                    <a:pt x="914478" y="43367"/>
+                  </a:lnTo>
+                  <a:lnTo>
+                    <a:pt x="984822" y="46515"/>
+                  </a:lnTo>
+                  <a:lnTo>
+                    <a:pt x="1055167" y="49638"/>
+                  </a:lnTo>
+                  <a:lnTo>
+                    <a:pt x="1125511" y="52734"/>
+                  </a:lnTo>
+                  <a:lnTo>
+                    <a:pt x="1195856" y="55805"/>
+                  </a:lnTo>
+                  <a:lnTo>
+                    <a:pt x="1266200" y="58852"/>
+                  </a:lnTo>
+                  <a:lnTo>
+                    <a:pt x="1336545" y="61873"/>
+                  </a:lnTo>
+                  <a:lnTo>
+                    <a:pt x="1406889" y="64869"/>
+                  </a:lnTo>
+                  <a:lnTo>
+                    <a:pt x="1477234" y="67841"/>
+                  </a:lnTo>
+                  <a:lnTo>
+                    <a:pt x="1547578" y="70789"/>
+                  </a:lnTo>
+                  <a:lnTo>
+                    <a:pt x="1617923" y="73712"/>
+                  </a:lnTo>
+                  <a:lnTo>
+                    <a:pt x="1688267" y="76612"/>
+                  </a:lnTo>
+                  <a:lnTo>
+                    <a:pt x="1758612" y="79487"/>
+                  </a:lnTo>
+                  <a:lnTo>
+                    <a:pt x="1828956" y="82340"/>
+                  </a:lnTo>
+                  <a:lnTo>
+                    <a:pt x="1899301" y="85169"/>
+                  </a:lnTo>
+                  <a:lnTo>
+                    <a:pt x="1969645" y="87974"/>
+                  </a:lnTo>
+                  <a:lnTo>
+                    <a:pt x="2039990" y="90757"/>
+                  </a:lnTo>
+                  <a:lnTo>
+                    <a:pt x="2110334" y="93517"/>
+                  </a:lnTo>
+                  <a:lnTo>
+                    <a:pt x="2180679" y="96254"/>
+                  </a:lnTo>
+                  <a:lnTo>
+                    <a:pt x="2251023" y="98969"/>
+                  </a:lnTo>
+                  <a:lnTo>
+                    <a:pt x="2321368" y="101662"/>
+                  </a:lnTo>
+                  <a:lnTo>
+                    <a:pt x="2391712" y="104333"/>
+                  </a:lnTo>
+                  <a:lnTo>
+                    <a:pt x="2462057" y="106982"/>
+                  </a:lnTo>
+                  <a:lnTo>
+                    <a:pt x="2532401" y="109609"/>
+                  </a:lnTo>
+                  <a:lnTo>
+                    <a:pt x="2602746" y="112214"/>
+                  </a:lnTo>
+                  <a:lnTo>
+                    <a:pt x="2673090" y="114799"/>
+                  </a:lnTo>
+                  <a:lnTo>
+                    <a:pt x="2743435" y="117362"/>
+                  </a:lnTo>
+                  <a:lnTo>
+                    <a:pt x="2813779" y="119904"/>
+                  </a:lnTo>
+                  <a:lnTo>
+                    <a:pt x="2884124" y="122425"/>
+                  </a:lnTo>
+                  <a:lnTo>
+                    <a:pt x="2954468" y="124926"/>
+                  </a:lnTo>
+                  <a:lnTo>
+                    <a:pt x="3024813" y="127406"/>
+                  </a:lnTo>
+                  <a:lnTo>
+                    <a:pt x="3095157" y="129866"/>
+                  </a:lnTo>
+                  <a:lnTo>
+                    <a:pt x="3165502" y="132306"/>
+                  </a:lnTo>
+                  <a:lnTo>
+                    <a:pt x="3235846" y="134726"/>
+                  </a:lnTo>
+                  <a:lnTo>
+                    <a:pt x="3306191" y="137126"/>
+                  </a:lnTo>
+                  <a:lnTo>
+                    <a:pt x="3376535" y="139506"/>
+                  </a:lnTo>
+                  <a:lnTo>
+                    <a:pt x="3446880" y="141867"/>
+                  </a:lnTo>
+                  <a:lnTo>
+                    <a:pt x="3517224" y="144209"/>
+                  </a:lnTo>
+                  <a:lnTo>
+                    <a:pt x="3587569" y="146531"/>
+                  </a:lnTo>
+                  <a:lnTo>
+                    <a:pt x="3657913" y="148834"/>
+                  </a:lnTo>
+                  <a:lnTo>
+                    <a:pt x="3728257" y="151119"/>
+                  </a:lnTo>
+                  <a:lnTo>
+                    <a:pt x="3798602" y="153385"/>
+                  </a:lnTo>
+                  <a:lnTo>
+                    <a:pt x="3868946" y="155632"/>
+                  </a:lnTo>
+                  <a:lnTo>
+                    <a:pt x="3939291" y="157861"/>
+                  </a:lnTo>
+                  <a:lnTo>
+                    <a:pt x="4009635" y="160071"/>
+                  </a:lnTo>
+                  <a:lnTo>
+                    <a:pt x="4079980" y="162264"/>
+                  </a:lnTo>
+                  <a:lnTo>
+                    <a:pt x="4150324" y="164438"/>
+                  </a:lnTo>
+                  <a:lnTo>
+                    <a:pt x="4220669" y="166595"/>
+                  </a:lnTo>
+                  <a:lnTo>
+                    <a:pt x="4291013" y="168734"/>
+                  </a:lnTo>
+                  <a:lnTo>
+                    <a:pt x="4361358" y="170856"/>
+                  </a:lnTo>
+                  <a:lnTo>
+                    <a:pt x="4431702" y="172960"/>
+                  </a:lnTo>
+                  <a:lnTo>
+                    <a:pt x="4502047" y="175047"/>
+                  </a:lnTo>
+                  <a:lnTo>
+                    <a:pt x="4572391" y="177117"/>
+                  </a:lnTo>
+                  <a:lnTo>
+                    <a:pt x="4642736" y="179170"/>
+                  </a:lnTo>
+                  <a:lnTo>
+                    <a:pt x="4713080" y="181206"/>
+                  </a:lnTo>
+                  <a:lnTo>
+                    <a:pt x="4783425" y="183225"/>
+                  </a:lnTo>
+                  <a:lnTo>
+                    <a:pt x="4853769" y="185228"/>
+                  </a:lnTo>
+                  <a:lnTo>
+                    <a:pt x="4924114" y="187215"/>
+                  </a:lnTo>
+                  <a:lnTo>
+                    <a:pt x="4994458" y="189185"/>
+                  </a:lnTo>
+                  <a:lnTo>
+                    <a:pt x="5064803" y="191139"/>
+                  </a:lnTo>
+                  <a:lnTo>
+                    <a:pt x="5135147" y="193077"/>
+                  </a:lnTo>
+                  <a:lnTo>
+                    <a:pt x="5205492" y="195000"/>
+                  </a:lnTo>
+                  <a:lnTo>
+                    <a:pt x="5275836" y="196906"/>
+                  </a:lnTo>
+                  <a:lnTo>
+                    <a:pt x="5346181" y="198797"/>
+                  </a:lnTo>
+                  <a:lnTo>
+                    <a:pt x="5416525" y="200673"/>
+                  </a:lnTo>
+                  <a:lnTo>
+                    <a:pt x="5486870" y="202533"/>
+                  </a:lnTo>
+                  <a:lnTo>
+                    <a:pt x="5557214" y="204378"/>
+                  </a:lnTo>
+                  <a:lnTo>
+                    <a:pt x="5627559" y="206207"/>
+                  </a:lnTo>
+                  <a:lnTo>
+                    <a:pt x="5697903" y="208022"/>
+                  </a:lnTo>
+                  <a:lnTo>
+                    <a:pt x="5768248" y="209822"/>
+                  </a:lnTo>
+                  <a:lnTo>
+                    <a:pt x="5838592" y="211607"/>
+                  </a:lnTo>
+                  <a:lnTo>
+                    <a:pt x="5908937" y="213378"/>
+                  </a:lnTo>
+                  <a:lnTo>
+                    <a:pt x="5979281" y="215134"/>
+                  </a:lnTo>
+                  <a:lnTo>
+                    <a:pt x="6049626" y="216876"/>
+                  </a:lnTo>
+                  <a:lnTo>
+                    <a:pt x="6119970" y="218603"/>
+                  </a:lnTo>
+                  <a:lnTo>
+                    <a:pt x="6190315" y="220316"/>
+                  </a:lnTo>
+                  <a:lnTo>
+                    <a:pt x="6260659" y="222016"/>
+                  </a:lnTo>
+                  <a:lnTo>
+                    <a:pt x="6331004" y="223701"/>
+                  </a:lnTo>
+                  <a:lnTo>
+                    <a:pt x="6401348" y="225373"/>
+                  </a:lnTo>
+                  <a:lnTo>
+                    <a:pt x="6471693" y="227030"/>
+                  </a:lnTo>
+                  <a:lnTo>
+                    <a:pt x="6542037" y="228675"/>
+                  </a:lnTo>
+                  <a:lnTo>
+                    <a:pt x="6612382" y="230306"/>
+                  </a:lnTo>
+                  <a:lnTo>
+                    <a:pt x="6682726" y="231923"/>
+                  </a:lnTo>
+                  <a:lnTo>
+                    <a:pt x="6753071" y="233527"/>
+                  </a:lnTo>
+                  <a:lnTo>
+                    <a:pt x="6823415" y="235118"/>
+                  </a:lnTo>
+                  <a:lnTo>
+                    <a:pt x="6893760" y="236697"/>
+                  </a:lnTo>
+                  <a:lnTo>
+                    <a:pt x="6964104" y="238262"/>
+                  </a:lnTo>
+                </a:path>
+              </a:pathLst>
+            </a:custGeom>
+            <a:ln w="27101" cap="flat">
+              <a:solidFill>
+                <a:srgbClr val="FF8C00">
+                  <a:alpha val="100000"/>
+                </a:srgbClr>
+              </a:solidFill>
+              <a:prstDash val="solid"/>
+              <a:round/>
+            </a:ln>
+          </p:spPr>
+          <p:txBody>
+            <a:bodyPr/>
+            <a:lstStyle/>
+            <a:p/>
+          </p:txBody>
+        </p:sp>
+        <p:sp>
+          <p:nvSpPr>
+            <p:cNvPr id="75" name="pl75"/>
+            <p:cNvSpPr/>
+            <p:nvPr/>
+          </p:nvSpPr>
+          <p:spPr>
+            <a:xfrm>
+              <a:off x="887106" y="5294352"/>
+              <a:ext cx="7660515" cy="0"/>
+            </a:xfrm>
+            <a:custGeom>
+              <a:avLst/>
+              <a:pathLst>
+                <a:path w="7660515" h="0">
+                  <a:moveTo>
+                    <a:pt x="0" y="0"/>
+                  </a:moveTo>
+                  <a:lnTo>
+                    <a:pt x="7660515" y="0"/>
+                  </a:lnTo>
+                  <a:lnTo>
+                    <a:pt x="7660515" y="0"/>
+                  </a:lnTo>
+                </a:path>
+              </a:pathLst>
+            </a:custGeom>
+            <a:ln w="13550" cap="flat">
+              <a:solidFill>
+                <a:srgbClr val="7F7F7F">
+                  <a:alpha val="100000"/>
+                </a:srgbClr>
+              </a:solidFill>
+              <a:prstDash val="dash"/>
+              <a:round/>
+            </a:ln>
+          </p:spPr>
+          <p:txBody>
+            <a:bodyPr/>
+            <a:lstStyle/>
+            <a:p/>
+          </p:txBody>
+        </p:sp>
+        <p:sp>
+          <p:nvSpPr>
+            <p:cNvPr id="76" name="pl76"/>
+            <p:cNvSpPr/>
+            <p:nvPr/>
+          </p:nvSpPr>
+          <p:spPr>
+            <a:xfrm>
+              <a:off x="4292500" y="4336484"/>
+              <a:ext cx="0" cy="1317069"/>
+            </a:xfrm>
+            <a:custGeom>
+              <a:avLst/>
+              <a:pathLst>
+                <a:path w="0" h="1317069">
+                  <a:moveTo>
+                    <a:pt x="0" y="1317069"/>
+                  </a:moveTo>
+                  <a:lnTo>
+                    <a:pt x="0" y="0"/>
+                  </a:lnTo>
+                  <a:lnTo>
+                    <a:pt x="0" y="0"/>
+                  </a:lnTo>
+                </a:path>
+              </a:pathLst>
+            </a:custGeom>
+            <a:ln w="13550" cap="flat">
+              <a:solidFill>
+                <a:srgbClr val="666666">
+                  <a:alpha val="100000"/>
+                </a:srgbClr>
+              </a:solidFill>
+              <a:prstDash val="dot"/>
+              <a:round/>
+            </a:ln>
+          </p:spPr>
+          <p:txBody>
+            <a:bodyPr/>
+            <a:lstStyle/>
+            <a:p/>
+          </p:txBody>
+        </p:sp>
+        <p:sp>
+          <p:nvSpPr>
+            <p:cNvPr id="77" name="pl77"/>
+            <p:cNvSpPr/>
+            <p:nvPr/>
+          </p:nvSpPr>
+          <p:spPr>
+            <a:xfrm>
+              <a:off x="3124839" y="4336484"/>
+              <a:ext cx="0" cy="1317069"/>
+            </a:xfrm>
+            <a:custGeom>
+              <a:avLst/>
+              <a:pathLst>
+                <a:path w="0" h="1317069">
+                  <a:moveTo>
+                    <a:pt x="0" y="1317069"/>
+                  </a:moveTo>
+                  <a:lnTo>
+                    <a:pt x="0" y="0"/>
+                  </a:lnTo>
+                  <a:lnTo>
+                    <a:pt x="0" y="0"/>
+                  </a:lnTo>
+                </a:path>
+              </a:pathLst>
+            </a:custGeom>
+            <a:ln w="13550" cap="flat">
+              <a:solidFill>
+                <a:srgbClr val="4682B4">
+                  <a:alpha val="69803"/>
+                </a:srgbClr>
+              </a:solidFill>
+              <a:prstDash val="dash"/>
+              <a:round/>
+            </a:ln>
+          </p:spPr>
+          <p:txBody>
+            <a:bodyPr/>
+            <a:lstStyle/>
+            <a:p/>
+          </p:txBody>
+        </p:sp>
+        <p:sp>
+          <p:nvSpPr>
+            <p:cNvPr id="78" name="pl78"/>
+            <p:cNvSpPr/>
+            <p:nvPr/>
+          </p:nvSpPr>
+          <p:spPr>
+            <a:xfrm>
+              <a:off x="5508592" y="4336484"/>
+              <a:ext cx="0" cy="1317069"/>
+            </a:xfrm>
+            <a:custGeom>
+              <a:avLst/>
+              <a:pathLst>
+                <a:path w="0" h="1317069">
+                  <a:moveTo>
+                    <a:pt x="0" y="1317069"/>
+                  </a:moveTo>
+                  <a:lnTo>
+                    <a:pt x="0" y="0"/>
+                  </a:lnTo>
+                  <a:lnTo>
+                    <a:pt x="0" y="0"/>
+                  </a:lnTo>
+                </a:path>
+              </a:pathLst>
+            </a:custGeom>
+            <a:ln w="13550" cap="flat">
+              <a:solidFill>
+                <a:srgbClr val="4682B4">
+                  <a:alpha val="69803"/>
+                </a:srgbClr>
+              </a:solidFill>
+              <a:prstDash val="dash"/>
+              <a:round/>
+            </a:ln>
+          </p:spPr>
+          <p:txBody>
+            <a:bodyPr/>
+            <a:lstStyle/>
+            <a:p/>
+          </p:txBody>
+        </p:sp>
+        <p:sp>
+          <p:nvSpPr>
+            <p:cNvPr id="79" name="tx79"/>
+            <p:cNvSpPr/>
+            <p:nvPr/>
+          </p:nvSpPr>
+          <p:spPr>
+            <a:xfrm>
+              <a:off x="762297" y="5553636"/>
+              <a:ext cx="62179" cy="80101"/>
+            </a:xfrm>
+            <a:prstGeom prst="rect">
+              <a:avLst/>
+            </a:prstGeom>
+            <a:noFill/>
+          </p:spPr>
+          <p:txBody>
+            <a:bodyPr lIns="0" rIns="0" tIns="0" bIns="0" anchorCtr="1" anchor="ctr" wrap="none"/>
+            <a:lstStyle/>
+            <a:p>
+              <a:pPr algn="l" marL="0" marR="0" indent="0">
+                <a:lnSpc>
+                  <a:spcPts val="880"/>
+                </a:lnSpc>
+                <a:spcBef>
+                  <a:spcPts val="0"/>
+                </a:spcBef>
+                <a:spcAft>
+                  <a:spcPts val="0"/>
+                </a:spcAft>
+              </a:pPr>
+              <a:r>
+                <a:rPr sz="880">
+                  <a:solidFill>
+                    <a:srgbClr val="4D4D4D">
+                      <a:alpha val="100000"/>
+                    </a:srgbClr>
+                  </a:solidFill>
+                  <a:latin typeface="Helvetica"/>
+                  <a:cs typeface="Helvetica"/>
+                </a:rPr>
+                <a:t>0</a:t>
+              </a:r>
+            </a:p>
+          </p:txBody>
+        </p:sp>
+        <p:sp>
+          <p:nvSpPr>
+            <p:cNvPr id="80" name="tx80"/>
+            <p:cNvSpPr/>
+            <p:nvPr/>
+          </p:nvSpPr>
+          <p:spPr>
+            <a:xfrm>
+              <a:off x="762297" y="5254302"/>
+              <a:ext cx="62179" cy="80101"/>
+            </a:xfrm>
+            <a:prstGeom prst="rect">
+              <a:avLst/>
+            </a:prstGeom>
+            <a:noFill/>
+          </p:spPr>
+          <p:txBody>
+            <a:bodyPr lIns="0" rIns="0" tIns="0" bIns="0" anchorCtr="1" anchor="ctr" wrap="none"/>
+            <a:lstStyle/>
+            <a:p>
+              <a:pPr algn="l" marL="0" marR="0" indent="0">
+                <a:lnSpc>
+                  <a:spcPts val="880"/>
+                </a:lnSpc>
+                <a:spcBef>
+                  <a:spcPts val="0"/>
+                </a:spcBef>
+                <a:spcAft>
+                  <a:spcPts val="0"/>
+                </a:spcAft>
+              </a:pPr>
+              <a:r>
+                <a:rPr sz="880">
+                  <a:solidFill>
+                    <a:srgbClr val="4D4D4D">
+                      <a:alpha val="100000"/>
+                    </a:srgbClr>
+                  </a:solidFill>
+                  <a:latin typeface="Helvetica"/>
+                  <a:cs typeface="Helvetica"/>
+                </a:rPr>
+                <a:t>1</a:t>
+              </a:r>
+            </a:p>
+          </p:txBody>
+        </p:sp>
+        <p:sp>
+          <p:nvSpPr>
+            <p:cNvPr id="81" name="tx81"/>
+            <p:cNvSpPr/>
+            <p:nvPr/>
+          </p:nvSpPr>
+          <p:spPr>
+            <a:xfrm>
+              <a:off x="762297" y="4954968"/>
+              <a:ext cx="62179" cy="80101"/>
+            </a:xfrm>
+            <a:prstGeom prst="rect">
+              <a:avLst/>
+            </a:prstGeom>
+            <a:noFill/>
+          </p:spPr>
+          <p:txBody>
+            <a:bodyPr lIns="0" rIns="0" tIns="0" bIns="0" anchorCtr="1" anchor="ctr" wrap="none"/>
+            <a:lstStyle/>
+            <a:p>
+              <a:pPr algn="l" marL="0" marR="0" indent="0">
+                <a:lnSpc>
+                  <a:spcPts val="880"/>
+                </a:lnSpc>
+                <a:spcBef>
+                  <a:spcPts val="0"/>
+                </a:spcBef>
+                <a:spcAft>
+                  <a:spcPts val="0"/>
+                </a:spcAft>
+              </a:pPr>
+              <a:r>
+                <a:rPr sz="880">
+                  <a:solidFill>
+                    <a:srgbClr val="4D4D4D">
+                      <a:alpha val="100000"/>
+                    </a:srgbClr>
+                  </a:solidFill>
+                  <a:latin typeface="Helvetica"/>
+                  <a:cs typeface="Helvetica"/>
+                </a:rPr>
+                <a:t>2</a:t>
+              </a:r>
+            </a:p>
+          </p:txBody>
+        </p:sp>
+        <p:sp>
+          <p:nvSpPr>
+            <p:cNvPr id="82" name="tx82"/>
+            <p:cNvSpPr/>
+            <p:nvPr/>
+          </p:nvSpPr>
+          <p:spPr>
+            <a:xfrm>
+              <a:off x="762297" y="4655634"/>
+              <a:ext cx="62179" cy="80101"/>
+            </a:xfrm>
+            <a:prstGeom prst="rect">
+              <a:avLst/>
+            </a:prstGeom>
+            <a:noFill/>
+          </p:spPr>
+          <p:txBody>
+            <a:bodyPr lIns="0" rIns="0" tIns="0" bIns="0" anchorCtr="1" anchor="ctr" wrap="none"/>
+            <a:lstStyle/>
+            <a:p>
+              <a:pPr algn="l" marL="0" marR="0" indent="0">
+                <a:lnSpc>
+                  <a:spcPts val="880"/>
+                </a:lnSpc>
+                <a:spcBef>
+                  <a:spcPts val="0"/>
+                </a:spcBef>
+                <a:spcAft>
+                  <a:spcPts val="0"/>
+                </a:spcAft>
+              </a:pPr>
+              <a:r>
+                <a:rPr sz="880">
+                  <a:solidFill>
+                    <a:srgbClr val="4D4D4D">
+                      <a:alpha val="100000"/>
+                    </a:srgbClr>
+                  </a:solidFill>
+                  <a:latin typeface="Helvetica"/>
+                  <a:cs typeface="Helvetica"/>
+                </a:rPr>
+                <a:t>3</a:t>
+              </a:r>
+            </a:p>
+          </p:txBody>
+        </p:sp>
+        <p:sp>
+          <p:nvSpPr>
+            <p:cNvPr id="83" name="tx83"/>
+            <p:cNvSpPr/>
+            <p:nvPr/>
+          </p:nvSpPr>
+          <p:spPr>
+            <a:xfrm>
+              <a:off x="762297" y="4356300"/>
+              <a:ext cx="62179" cy="80101"/>
+            </a:xfrm>
+            <a:prstGeom prst="rect">
+              <a:avLst/>
+            </a:prstGeom>
+            <a:noFill/>
+          </p:spPr>
+          <p:txBody>
+            <a:bodyPr lIns="0" rIns="0" tIns="0" bIns="0" anchorCtr="1" anchor="ctr" wrap="none"/>
+            <a:lstStyle/>
+            <a:p>
+              <a:pPr algn="l" marL="0" marR="0" indent="0">
+                <a:lnSpc>
+                  <a:spcPts val="880"/>
+                </a:lnSpc>
+                <a:spcBef>
+                  <a:spcPts val="0"/>
+                </a:spcBef>
+                <a:spcAft>
+                  <a:spcPts val="0"/>
+                </a:spcAft>
+              </a:pPr>
+              <a:r>
+                <a:rPr sz="880">
+                  <a:solidFill>
+                    <a:srgbClr val="4D4D4D">
+                      <a:alpha val="100000"/>
+                    </a:srgbClr>
+                  </a:solidFill>
+                  <a:latin typeface="Helvetica"/>
+                  <a:cs typeface="Helvetica"/>
+                </a:rPr>
+                <a:t>4</a:t>
+              </a:r>
+            </a:p>
+          </p:txBody>
+        </p:sp>
+        <p:sp>
+          <p:nvSpPr>
+            <p:cNvPr id="84" name="tx84"/>
+            <p:cNvSpPr/>
+            <p:nvPr/>
+          </p:nvSpPr>
+          <p:spPr>
+            <a:xfrm>
+              <a:off x="1346003" y="5716183"/>
+              <a:ext cx="161574" cy="80101"/>
+            </a:xfrm>
+            <a:prstGeom prst="rect">
+              <a:avLst/>
+            </a:prstGeom>
+            <a:noFill/>
+          </p:spPr>
+          <p:txBody>
+            <a:bodyPr lIns="0" rIns="0" tIns="0" bIns="0" anchorCtr="1" anchor="ctr" wrap="none"/>
+            <a:lstStyle/>
+            <a:p>
+              <a:pPr algn="l" marL="0" marR="0" indent="0">
+                <a:lnSpc>
+                  <a:spcPts val="880"/>
+                </a:lnSpc>
+                <a:spcBef>
+                  <a:spcPts val="0"/>
+                </a:spcBef>
+                <a:spcAft>
+                  <a:spcPts val="0"/>
+                </a:spcAft>
+              </a:pPr>
+              <a:r>
+                <a:rPr sz="880">
+                  <a:solidFill>
+                    <a:srgbClr val="4D4D4D">
+                      <a:alpha val="100000"/>
+                    </a:srgbClr>
+                  </a:solidFill>
+                  <a:latin typeface="Helvetica"/>
+                  <a:cs typeface="Helvetica"/>
+                </a:rPr>
+                <a:t>-50</a:t>
+              </a:r>
+            </a:p>
+          </p:txBody>
+        </p:sp>
+        <p:sp>
+          <p:nvSpPr>
+            <p:cNvPr id="85" name="tx85"/>
+            <p:cNvSpPr/>
+            <p:nvPr/>
+          </p:nvSpPr>
+          <p:spPr>
+            <a:xfrm>
+              <a:off x="2196512" y="5716183"/>
+              <a:ext cx="161574" cy="80101"/>
+            </a:xfrm>
+            <a:prstGeom prst="rect">
+              <a:avLst/>
+            </a:prstGeom>
+            <a:noFill/>
+          </p:spPr>
+          <p:txBody>
+            <a:bodyPr lIns="0" rIns="0" tIns="0" bIns="0" anchorCtr="1" anchor="ctr" wrap="none"/>
+            <a:lstStyle/>
+            <a:p>
+              <a:pPr algn="l" marL="0" marR="0" indent="0">
+                <a:lnSpc>
+                  <a:spcPts val="880"/>
+                </a:lnSpc>
+                <a:spcBef>
+                  <a:spcPts val="0"/>
+                </a:spcBef>
+                <a:spcAft>
+                  <a:spcPts val="0"/>
+                </a:spcAft>
+              </a:pPr>
+              <a:r>
+                <a:rPr sz="880">
+                  <a:solidFill>
+                    <a:srgbClr val="4D4D4D">
+                      <a:alpha val="100000"/>
+                    </a:srgbClr>
+                  </a:solidFill>
+                  <a:latin typeface="Helvetica"/>
+                  <a:cs typeface="Helvetica"/>
+                </a:rPr>
+                <a:t>-40</a:t>
+              </a:r>
+            </a:p>
+          </p:txBody>
+        </p:sp>
+        <p:sp>
+          <p:nvSpPr>
+            <p:cNvPr id="86" name="tx86"/>
+            <p:cNvSpPr/>
+            <p:nvPr/>
+          </p:nvSpPr>
+          <p:spPr>
+            <a:xfrm>
+              <a:off x="3047022" y="5716183"/>
+              <a:ext cx="161574" cy="80101"/>
+            </a:xfrm>
+            <a:prstGeom prst="rect">
+              <a:avLst/>
+            </a:prstGeom>
+            <a:noFill/>
+          </p:spPr>
+          <p:txBody>
+            <a:bodyPr lIns="0" rIns="0" tIns="0" bIns="0" anchorCtr="1" anchor="ctr" wrap="none"/>
+            <a:lstStyle/>
+            <a:p>
+              <a:pPr algn="l" marL="0" marR="0" indent="0">
+                <a:lnSpc>
+                  <a:spcPts val="880"/>
+                </a:lnSpc>
+                <a:spcBef>
+                  <a:spcPts val="0"/>
+                </a:spcBef>
+                <a:spcAft>
+                  <a:spcPts val="0"/>
+                </a:spcAft>
+              </a:pPr>
+              <a:r>
+                <a:rPr sz="880">
+                  <a:solidFill>
+                    <a:srgbClr val="4D4D4D">
+                      <a:alpha val="100000"/>
+                    </a:srgbClr>
+                  </a:solidFill>
+                  <a:latin typeface="Helvetica"/>
+                  <a:cs typeface="Helvetica"/>
+                </a:rPr>
+                <a:t>-30</a:t>
+              </a:r>
+            </a:p>
+          </p:txBody>
+        </p:sp>
+        <p:sp>
+          <p:nvSpPr>
+            <p:cNvPr id="87" name="tx87"/>
+            <p:cNvSpPr/>
+            <p:nvPr/>
+          </p:nvSpPr>
+          <p:spPr>
+            <a:xfrm>
+              <a:off x="3897531" y="5716183"/>
+              <a:ext cx="161574" cy="80101"/>
+            </a:xfrm>
+            <a:prstGeom prst="rect">
+              <a:avLst/>
+            </a:prstGeom>
+            <a:noFill/>
+          </p:spPr>
+          <p:txBody>
+            <a:bodyPr lIns="0" rIns="0" tIns="0" bIns="0" anchorCtr="1" anchor="ctr" wrap="none"/>
+            <a:lstStyle/>
+            <a:p>
+              <a:pPr algn="l" marL="0" marR="0" indent="0">
+                <a:lnSpc>
+                  <a:spcPts val="880"/>
+                </a:lnSpc>
+                <a:spcBef>
+                  <a:spcPts val="0"/>
+                </a:spcBef>
+                <a:spcAft>
+                  <a:spcPts val="0"/>
+                </a:spcAft>
+              </a:pPr>
+              <a:r>
+                <a:rPr sz="880">
+                  <a:solidFill>
+                    <a:srgbClr val="4D4D4D">
+                      <a:alpha val="100000"/>
+                    </a:srgbClr>
+                  </a:solidFill>
+                  <a:latin typeface="Helvetica"/>
+                  <a:cs typeface="Helvetica"/>
+                </a:rPr>
+                <a:t>-20</a:t>
+              </a:r>
+            </a:p>
+          </p:txBody>
+        </p:sp>
+        <p:sp>
+          <p:nvSpPr>
+            <p:cNvPr id="88" name="tx88"/>
+            <p:cNvSpPr/>
+            <p:nvPr/>
+          </p:nvSpPr>
+          <p:spPr>
+            <a:xfrm>
+              <a:off x="4748041" y="5716183"/>
+              <a:ext cx="161574" cy="80101"/>
+            </a:xfrm>
+            <a:prstGeom prst="rect">
+              <a:avLst/>
+            </a:prstGeom>
+            <a:noFill/>
+          </p:spPr>
+          <p:txBody>
+            <a:bodyPr lIns="0" rIns="0" tIns="0" bIns="0" anchorCtr="1" anchor="ctr" wrap="none"/>
+            <a:lstStyle/>
+            <a:p>
+              <a:pPr algn="l" marL="0" marR="0" indent="0">
+                <a:lnSpc>
+                  <a:spcPts val="880"/>
+                </a:lnSpc>
+                <a:spcBef>
+                  <a:spcPts val="0"/>
+                </a:spcBef>
+                <a:spcAft>
+                  <a:spcPts val="0"/>
+                </a:spcAft>
+              </a:pPr>
+              <a:r>
+                <a:rPr sz="880">
+                  <a:solidFill>
+                    <a:srgbClr val="4D4D4D">
+                      <a:alpha val="100000"/>
+                    </a:srgbClr>
+                  </a:solidFill>
+                  <a:latin typeface="Helvetica"/>
+                  <a:cs typeface="Helvetica"/>
+                </a:rPr>
+                <a:t>-10</a:t>
+              </a:r>
+            </a:p>
+          </p:txBody>
+        </p:sp>
+        <p:sp>
+          <p:nvSpPr>
+            <p:cNvPr id="89" name="tx89"/>
+            <p:cNvSpPr/>
+            <p:nvPr/>
+          </p:nvSpPr>
+          <p:spPr>
+            <a:xfrm>
+              <a:off x="5648248" y="5716183"/>
+              <a:ext cx="62179" cy="80101"/>
+            </a:xfrm>
+            <a:prstGeom prst="rect">
+              <a:avLst/>
+            </a:prstGeom>
+            <a:noFill/>
+          </p:spPr>
+          <p:txBody>
+            <a:bodyPr lIns="0" rIns="0" tIns="0" bIns="0" anchorCtr="1" anchor="ctr" wrap="none"/>
+            <a:lstStyle/>
+            <a:p>
+              <a:pPr algn="l" marL="0" marR="0" indent="0">
+                <a:lnSpc>
+                  <a:spcPts val="880"/>
+                </a:lnSpc>
+                <a:spcBef>
+                  <a:spcPts val="0"/>
+                </a:spcBef>
+                <a:spcAft>
+                  <a:spcPts val="0"/>
+                </a:spcAft>
+              </a:pPr>
+              <a:r>
+                <a:rPr sz="880">
+                  <a:solidFill>
+                    <a:srgbClr val="4D4D4D">
+                      <a:alpha val="100000"/>
+                    </a:srgbClr>
+                  </a:solidFill>
+                  <a:latin typeface="Helvetica"/>
+                  <a:cs typeface="Helvetica"/>
+                </a:rPr>
+                <a:t>0</a:t>
+              </a:r>
+            </a:p>
+          </p:txBody>
+        </p:sp>
+        <p:sp>
+          <p:nvSpPr>
+            <p:cNvPr id="90" name="tx90"/>
+            <p:cNvSpPr/>
+            <p:nvPr/>
+          </p:nvSpPr>
+          <p:spPr>
+            <a:xfrm>
+              <a:off x="6467667" y="5716183"/>
+              <a:ext cx="124358" cy="80101"/>
+            </a:xfrm>
+            <a:prstGeom prst="rect">
+              <a:avLst/>
+            </a:prstGeom>
+            <a:noFill/>
+          </p:spPr>
+          <p:txBody>
+            <a:bodyPr lIns="0" rIns="0" tIns="0" bIns="0" anchorCtr="1" anchor="ctr" wrap="none"/>
+            <a:lstStyle/>
+            <a:p>
+              <a:pPr algn="l" marL="0" marR="0" indent="0">
+                <a:lnSpc>
+                  <a:spcPts val="880"/>
+                </a:lnSpc>
+                <a:spcBef>
+                  <a:spcPts val="0"/>
+                </a:spcBef>
+                <a:spcAft>
+                  <a:spcPts val="0"/>
+                </a:spcAft>
+              </a:pPr>
+              <a:r>
+                <a:rPr sz="880">
+                  <a:solidFill>
+                    <a:srgbClr val="4D4D4D">
+                      <a:alpha val="100000"/>
+                    </a:srgbClr>
+                  </a:solidFill>
+                  <a:latin typeface="Helvetica"/>
+                  <a:cs typeface="Helvetica"/>
+                </a:rPr>
+                <a:t>10</a:t>
+              </a:r>
+            </a:p>
+          </p:txBody>
+        </p:sp>
+        <p:sp>
+          <p:nvSpPr>
+            <p:cNvPr id="91" name="tx91"/>
+            <p:cNvSpPr/>
+            <p:nvPr/>
+          </p:nvSpPr>
+          <p:spPr>
+            <a:xfrm>
+              <a:off x="7318177" y="5716183"/>
+              <a:ext cx="124358" cy="80101"/>
+            </a:xfrm>
+            <a:prstGeom prst="rect">
+              <a:avLst/>
+            </a:prstGeom>
+            <a:noFill/>
+          </p:spPr>
+          <p:txBody>
+            <a:bodyPr lIns="0" rIns="0" tIns="0" bIns="0" anchorCtr="1" anchor="ctr" wrap="none"/>
+            <a:lstStyle/>
+            <a:p>
+              <a:pPr algn="l" marL="0" marR="0" indent="0">
+                <a:lnSpc>
+                  <a:spcPts val="880"/>
+                </a:lnSpc>
+                <a:spcBef>
+                  <a:spcPts val="0"/>
+                </a:spcBef>
+                <a:spcAft>
+                  <a:spcPts val="0"/>
+                </a:spcAft>
+              </a:pPr>
+              <a:r>
+                <a:rPr sz="880">
+                  <a:solidFill>
+                    <a:srgbClr val="4D4D4D">
+                      <a:alpha val="100000"/>
+                    </a:srgbClr>
+                  </a:solidFill>
+                  <a:latin typeface="Helvetica"/>
+                  <a:cs typeface="Helvetica"/>
+                </a:rPr>
+                <a:t>20</a:t>
+              </a:r>
+            </a:p>
+          </p:txBody>
+        </p:sp>
+        <p:sp>
+          <p:nvSpPr>
+            <p:cNvPr id="92" name="tx92"/>
+            <p:cNvSpPr/>
+            <p:nvPr/>
+          </p:nvSpPr>
+          <p:spPr>
+            <a:xfrm>
+              <a:off x="8168686" y="5716183"/>
+              <a:ext cx="124358" cy="80101"/>
+            </a:xfrm>
+            <a:prstGeom prst="rect">
+              <a:avLst/>
+            </a:prstGeom>
+            <a:noFill/>
+          </p:spPr>
+          <p:txBody>
+            <a:bodyPr lIns="0" rIns="0" tIns="0" bIns="0" anchorCtr="1" anchor="ctr" wrap="none"/>
+            <a:lstStyle/>
+            <a:p>
+              <a:pPr algn="l" marL="0" marR="0" indent="0">
+                <a:lnSpc>
+                  <a:spcPts val="880"/>
+                </a:lnSpc>
+                <a:spcBef>
+                  <a:spcPts val="0"/>
+                </a:spcBef>
+                <a:spcAft>
+                  <a:spcPts val="0"/>
+                </a:spcAft>
+              </a:pPr>
+              <a:r>
+                <a:rPr sz="880">
+                  <a:solidFill>
+                    <a:srgbClr val="4D4D4D">
+                      <a:alpha val="100000"/>
+                    </a:srgbClr>
+                  </a:solidFill>
+                  <a:latin typeface="Helvetica"/>
+                  <a:cs typeface="Helvetica"/>
+                </a:rPr>
+                <a:t>30</a:t>
+              </a:r>
+            </a:p>
+          </p:txBody>
+        </p:sp>
+        <p:sp>
+          <p:nvSpPr>
+            <p:cNvPr id="93" name="tx93"/>
+            <p:cNvSpPr/>
+            <p:nvPr/>
+          </p:nvSpPr>
+          <p:spPr>
+            <a:xfrm>
+              <a:off x="1561815" y="5855859"/>
+              <a:ext cx="6311097" cy="100218"/>
+            </a:xfrm>
+            <a:prstGeom prst="rect">
+              <a:avLst/>
+            </a:prstGeom>
+            <a:noFill/>
+          </p:spPr>
+          <p:txBody>
+            <a:bodyPr lIns="0" rIns="0" tIns="0" bIns="0" anchorCtr="1" anchor="ctr" wrap="none"/>
+            <a:lstStyle/>
+            <a:p>
+              <a:pPr algn="l" marL="0" marR="0" indent="0">
+                <a:lnSpc>
+                  <a:spcPts val="1100"/>
+                </a:lnSpc>
+                <a:spcBef>
+                  <a:spcPts val="0"/>
+                </a:spcBef>
+                <a:spcAft>
+                  <a:spcPts val="0"/>
+                </a:spcAft>
+              </a:pPr>
+              <a:r>
+                <a:rPr sz="1100">
+                  <a:solidFill>
+                    <a:srgbClr val="000000">
+                      <a:alpha val="100000"/>
+                    </a:srgbClr>
+                  </a:solidFill>
+                  <a:latin typeface="Helvetica"/>
+                  <a:cs typeface="Helvetica"/>
+                </a:rPr>
+                <a:t>Sensitivity eGFR Difference (%): 100 × (CKD-EPI 2012 CysC − CKD-EPI 2021 Cr) / CKD-EPI 2021 Cr</a:t>
+              </a:r>
+            </a:p>
+          </p:txBody>
+        </p:sp>
+        <p:sp>
+          <p:nvSpPr>
+            <p:cNvPr id="94" name="tx94"/>
+            <p:cNvSpPr/>
+            <p:nvPr/>
+          </p:nvSpPr>
+          <p:spPr>
+            <a:xfrm rot="-5400000">
+              <a:off x="138035" y="4944909"/>
+              <a:ext cx="1016904" cy="100218"/>
+            </a:xfrm>
+            <a:prstGeom prst="rect">
+              <a:avLst/>
+            </a:prstGeom>
+            <a:noFill/>
+          </p:spPr>
+          <p:txBody>
+            <a:bodyPr lIns="0" rIns="0" tIns="0" bIns="0" anchorCtr="1" anchor="ctr" wrap="none"/>
+            <a:lstStyle/>
+            <a:p>
+              <a:pPr algn="l" marL="0" marR="0" indent="0">
+                <a:lnSpc>
+                  <a:spcPts val="1100"/>
+                </a:lnSpc>
+                <a:spcBef>
+                  <a:spcPts val="0"/>
+                </a:spcBef>
+                <a:spcAft>
+                  <a:spcPts val="0"/>
+                </a:spcAft>
+              </a:pPr>
+              <a:r>
+                <a:rPr sz="1100">
+                  <a:solidFill>
+                    <a:srgbClr val="000000">
+                      <a:alpha val="100000"/>
+                    </a:srgbClr>
+                  </a:solidFill>
+                  <a:latin typeface="Helvetica"/>
+                  <a:cs typeface="Helvetica"/>
+                </a:rPr>
+                <a:t>subHR (95% CI)</a:t>
+              </a:r>
+            </a:p>
+          </p:txBody>
+        </p:sp>
+        <p:sp>
+          <p:nvSpPr>
+            <p:cNvPr id="95" name="tx95"/>
+            <p:cNvSpPr/>
+            <p:nvPr/>
+          </p:nvSpPr>
+          <p:spPr>
+            <a:xfrm>
+              <a:off x="887106" y="4159544"/>
+              <a:ext cx="6959864" cy="82021"/>
+            </a:xfrm>
+            <a:prstGeom prst="rect">
+              <a:avLst/>
+            </a:prstGeom>
+            <a:noFill/>
+          </p:spPr>
+          <p:txBody>
+            <a:bodyPr lIns="0" rIns="0" tIns="0" bIns="0" anchorCtr="1" anchor="ctr" wrap="none"/>
+            <a:lstStyle/>
+            <a:p>
+              <a:pPr algn="l" marL="0" marR="0" indent="0">
+                <a:lnSpc>
+                  <a:spcPts val="900"/>
+                </a:lnSpc>
+                <a:spcBef>
+                  <a:spcPts val="0"/>
+                </a:spcBef>
+                <a:spcAft>
+                  <a:spcPts val="0"/>
+                </a:spcAft>
+              </a:pPr>
+              <a:r>
+                <a:rPr sz="900">
+                  <a:solidFill>
+                    <a:srgbClr val="404040">
+                      <a:alpha val="100000"/>
+                    </a:srgbClr>
+                  </a:solidFill>
+                  <a:latin typeface="Helvetica"/>
+                  <a:cs typeface="Helvetica"/>
+                </a:rPr>
+                <a:t>subHR per 10 % decline: 1.10 (1.01-1.21), p_Bonf = 0.217 (n = 6)  |  per IQR decline (Δ = 28.0 %): 1.32 (1.02-1.71)  |  IQR: [-30.0, -2.0] %</a:t>
+              </a:r>
+            </a:p>
+          </p:txBody>
+        </p:sp>
+        <p:sp>
+          <p:nvSpPr>
+            <p:cNvPr id="96" name="tx96"/>
+            <p:cNvSpPr/>
+            <p:nvPr/>
+          </p:nvSpPr>
+          <p:spPr>
+            <a:xfrm>
+              <a:off x="887106" y="3932770"/>
               <a:ext cx="3528761" cy="120152"/>
             </a:xfrm>
             <a:prstGeom prst="rect">
